--- a/docs/user_manual/CodeWidget_ユーザーマニュアル_JP.pptx
+++ b/docs/user_manual/CodeWidget_ユーザーマニュアル_JP.pptx
@@ -4,6 +4,9 @@
   <p:sldMasterIdLst>
     <p:sldMasterId id="2147483648" r:id="rId1"/>
   </p:sldMasterIdLst>
+  <p:notesMasterIdLst>
+    <p:notesMasterId r:id="rId15"/>
+  </p:notesMasterIdLst>
   <p:sldIdLst>
     <p:sldId id="256" r:id="rId2"/>
     <p:sldId id="257" r:id="rId3"/>
@@ -19,10 +22,7 @@
     <p:sldId id="267" r:id="rId13"/>
     <p:sldId id="268" r:id="rId14"/>
   </p:sldIdLst>
-  <p:notesMasterIdLst>
-    <p:notesMasterId r:id="rId15"/>
-  </p:notesMasterIdLst>
-  <p:sldSz cx="9144000" cy="5143500"/>
+  <p:sldSz cx="9144000" cy="5143500" type="screen16x9"/>
   <p:notesSz cx="5143500" cy="9144000"/>
   <p:defaultTextStyle>
     <a:lvl1pPr marL="0" algn="l" defTabSz="914400" rtl="0" eaLnBrk="1" latinLnBrk="0" hangingPunct="1">
@@ -116,6 +116,11 @@
       </a:defRPr>
     </a:lvl9pPr>
   </p:defaultTextStyle>
+  <p:extLst>
+    <p:ext uri="{EFAFB233-063F-42B5-8137-9DF3F51BA10A}">
+      <p15:sldGuideLst xmlns:p15="http://schemas.microsoft.com/office/powerpoint/2012/main"/>
+    </p:ext>
+  </p:extLst>
 </p:presentation>
 </file>
 
@@ -141,234 +146,10 @@
           <a:chExt cx="0" cy="0"/>
         </a:xfrm>
       </p:grpSpPr>
-      <p:sp>
-        <p:nvSpPr>
-          <p:cNvPr id="2" name="Header Placeholder 1"/>
-          <p:cNvSpPr>
-            <a:spLocks noGrp="1"/>
-          </p:cNvSpPr>
-          <p:nvPr>
-            <p:ph type="hdr" sz="quarter"/>
-          </p:nvPr>
-        </p:nvSpPr>
-        <p:spPr>
-          <a:xfrm>
-            <a:off x="0" y="0"/>
-            <a:ext cx="2971800" cy="458788"/>
-          </a:xfrm>
-          <a:prstGeom prst="rect">
-            <a:avLst/>
-          </a:prstGeom>
-        </p:spPr>
-        <p:txBody>
-          <a:bodyPr vert="horz" lIns="91440" tIns="45720" rIns="91440" bIns="45720" rtlCol="0"/>
-          <a:lstStyle>
-            <a:lvl1pPr algn="l">
-              <a:defRPr sz="1200"/>
-            </a:lvl1pPr>
-          </a:lstStyle>
-          <a:p>
-            <a:endParaRPr lang="en-US"/>
-          </a:p>
-        </p:txBody>
-      </p:sp>
-      <p:sp>
-        <p:nvSpPr>
-          <p:cNvPr id="3" name="Date Placeholder 2"/>
-          <p:cNvSpPr>
-            <a:spLocks noGrp="1"/>
-          </p:cNvSpPr>
-          <p:nvPr>
-            <p:ph type="dt" idx="1"/>
-          </p:nvPr>
-        </p:nvSpPr>
-        <p:spPr>
-          <a:xfrm>
-            <a:off x="3884613" y="0"/>
-            <a:ext cx="2971800" cy="458788"/>
-          </a:xfrm>
-          <a:prstGeom prst="rect">
-            <a:avLst/>
-          </a:prstGeom>
-        </p:spPr>
-        <p:txBody>
-          <a:bodyPr vert="horz" lIns="91440" tIns="45720" rIns="91440" bIns="45720" rtlCol="0"/>
-          <a:lstStyle>
-            <a:lvl1pPr algn="r">
-              <a:defRPr sz="1200"/>
-            </a:lvl1pPr>
-          </a:lstStyle>
-          <a:p>
-            <a:fld id="{5282F153-3F37-0F45-9E97-73ACFA13230C}" type="datetimeFigureOut">
-              <a:rPr lang="en-US"/>
-              <a:t>7/23/19</a:t>
-            </a:fld>
-            <a:endParaRPr lang="en-US"/>
-          </a:p>
-        </p:txBody>
-      </p:sp>
-      <p:sp>
-        <p:nvSpPr>
-          <p:cNvPr id="4" name="Slide Image Placeholder 3"/>
-          <p:cNvSpPr>
-            <a:spLocks noGrp="1" noRot="1" noChangeAspect="1"/>
-          </p:cNvSpPr>
-          <p:nvPr>
-            <p:ph type="sldImg" idx="2"/>
-          </p:nvPr>
-        </p:nvSpPr>
-        <p:spPr>
-          <a:xfrm>
-            <a:off x="685800" y="1143000"/>
-            <a:ext cx="5486400" cy="3086100"/>
-          </a:xfrm>
-          <a:prstGeom prst="rect">
-            <a:avLst/>
-          </a:prstGeom>
-          <a:noFill/>
-          <a:ln w="12700">
-            <a:solidFill>
-              <a:prstClr val="black"/>
-            </a:solidFill>
-          </a:ln>
-        </p:spPr>
-        <p:txBody>
-          <a:bodyPr vert="horz" lIns="91440" tIns="45720" rIns="91440" bIns="45720" rtlCol="0" anchor="ctr"/>
-          <a:lstStyle/>
-          <a:p>
-            <a:endParaRPr lang="en-US"/>
-          </a:p>
-        </p:txBody>
-      </p:sp>
-      <p:sp>
-        <p:nvSpPr>
-          <p:cNvPr id="5" name="Notes Placeholder 4"/>
-          <p:cNvSpPr>
-            <a:spLocks noGrp="1"/>
-          </p:cNvSpPr>
-          <p:nvPr>
-            <p:ph type="body" sz="quarter" idx="3"/>
-          </p:nvPr>
-        </p:nvSpPr>
-        <p:spPr>
-          <a:xfrm>
-            <a:off x="685800" y="4400550"/>
-            <a:ext cx="5486400" cy="3600450"/>
-          </a:xfrm>
-          <a:prstGeom prst="rect">
-            <a:avLst/>
-          </a:prstGeom>
-        </p:spPr>
-        <p:txBody>
-          <a:bodyPr vert="horz" lIns="91440" tIns="45720" rIns="91440" bIns="45720" rtlCol="0"/>
-          <a:lstStyle/>
-          <a:p>
-            <a:pPr lvl="0"/>
-            <a:r>
-              <a:rPr lang="en-US"/>
-              <a:t>Click to edit Master text styles</a:t>
-            </a:r>
-          </a:p>
-          <a:p>
-            <a:pPr lvl="1"/>
-            <a:r>
-              <a:rPr lang="en-US"/>
-              <a:t>Second level</a:t>
-            </a:r>
-          </a:p>
-          <a:p>
-            <a:pPr lvl="2"/>
-            <a:r>
-              <a:rPr lang="en-US"/>
-              <a:t>Third level</a:t>
-            </a:r>
-          </a:p>
-          <a:p>
-            <a:pPr lvl="3"/>
-            <a:r>
-              <a:rPr lang="en-US"/>
-              <a:t>Fourth level</a:t>
-            </a:r>
-          </a:p>
-          <a:p>
-            <a:pPr lvl="4"/>
-            <a:r>
-              <a:rPr lang="en-US"/>
-              <a:t>Fifth level</a:t>
-            </a:r>
-          </a:p>
-        </p:txBody>
-      </p:sp>
-      <p:sp>
-        <p:nvSpPr>
-          <p:cNvPr id="6" name="Footer Placeholder 5"/>
-          <p:cNvSpPr>
-            <a:spLocks noGrp="1"/>
-          </p:cNvSpPr>
-          <p:nvPr>
-            <p:ph type="ftr" sz="quarter" idx="4"/>
-          </p:nvPr>
-        </p:nvSpPr>
-        <p:spPr>
-          <a:xfrm>
-            <a:off x="0" y="8685213"/>
-            <a:ext cx="2971800" cy="458787"/>
-          </a:xfrm>
-          <a:prstGeom prst="rect">
-            <a:avLst/>
-          </a:prstGeom>
-        </p:spPr>
-        <p:txBody>
-          <a:bodyPr vert="horz" lIns="91440" tIns="45720" rIns="91440" bIns="45720" rtlCol="0" anchor="b"/>
-          <a:lstStyle>
-            <a:lvl1pPr algn="l">
-              <a:defRPr sz="1200"/>
-            </a:lvl1pPr>
-          </a:lstStyle>
-          <a:p>
-            <a:endParaRPr lang="en-US"/>
-          </a:p>
-        </p:txBody>
-      </p:sp>
-      <p:sp>
-        <p:nvSpPr>
-          <p:cNvPr id="7" name="Slide Number Placeholder 6"/>
-          <p:cNvSpPr>
-            <a:spLocks noGrp="1"/>
-          </p:cNvSpPr>
-          <p:nvPr>
-            <p:ph type="sldNum" sz="quarter" idx="5"/>
-          </p:nvPr>
-        </p:nvSpPr>
-        <p:spPr>
-          <a:xfrm>
-            <a:off x="3884613" y="8685213"/>
-            <a:ext cx="2971800" cy="458787"/>
-          </a:xfrm>
-          <a:prstGeom prst="rect">
-            <a:avLst/>
-          </a:prstGeom>
-        </p:spPr>
-        <p:txBody>
-          <a:bodyPr vert="horz" lIns="91440" tIns="45720" rIns="91440" bIns="45720" rtlCol="0" anchor="b"/>
-          <a:lstStyle>
-            <a:lvl1pPr algn="r">
-              <a:defRPr sz="1200"/>
-            </a:lvl1pPr>
-          </a:lstStyle>
-          <a:p>
-            <a:fld id="{CE5E9CC1-C706-0F49-92D6-E571CC5EEA8F}" type="slidenum">
-              <a:rPr lang="en-US"/>
-              <a:t>‹#›</a:t>
-            </a:fld>
-            <a:endParaRPr lang="en-US"/>
-          </a:p>
-        </p:txBody>
-      </p:sp>
     </p:spTree>
     <p:extLst>
       <p:ext uri="{BB962C8B-B14F-4D97-AF65-F5344CB8AC3E}">
-        <p14:creationId xmlns:p14="http://schemas.microsoft.com/office/powerpoint/2010/main" val="1024086991"/>
+        <p14:creationId xmlns:p14="http://schemas.microsoft.com/office/powerpoint/2010/main" val="2143903486"/>
       </p:ext>
     </p:extLst>
   </p:cSld>
@@ -512,10 +293,6 @@
           <a:bodyPr/>
           <a:lstStyle/>
           <a:p>
-            <a:r>
-              <a:rPr lang="en-US" dirty="0"/>
-              <a:t/>
-            </a:r>
             <a:endParaRPr lang="en-US" dirty="0"/>
           </a:p>
         </p:txBody>
@@ -600,10 +377,6 @@
           <a:bodyPr/>
           <a:lstStyle/>
           <a:p>
-            <a:r>
-              <a:rPr lang="en-US" dirty="0"/>
-              <a:t/>
-            </a:r>
             <a:endParaRPr lang="en-US" dirty="0"/>
           </a:p>
         </p:txBody>
@@ -688,10 +461,6 @@
           <a:bodyPr/>
           <a:lstStyle/>
           <a:p>
-            <a:r>
-              <a:rPr lang="en-US" dirty="0"/>
-              <a:t/>
-            </a:r>
             <a:endParaRPr lang="en-US" dirty="0"/>
           </a:p>
         </p:txBody>
@@ -776,10 +545,6 @@
           <a:bodyPr/>
           <a:lstStyle/>
           <a:p>
-            <a:r>
-              <a:rPr lang="en-US" dirty="0"/>
-              <a:t/>
-            </a:r>
             <a:endParaRPr lang="en-US" dirty="0"/>
           </a:p>
         </p:txBody>
@@ -864,10 +629,6 @@
           <a:bodyPr/>
           <a:lstStyle/>
           <a:p>
-            <a:r>
-              <a:rPr lang="en-US" dirty="0"/>
-              <a:t/>
-            </a:r>
             <a:endParaRPr lang="en-US" dirty="0"/>
           </a:p>
         </p:txBody>
@@ -952,10 +713,6 @@
           <a:bodyPr/>
           <a:lstStyle/>
           <a:p>
-            <a:r>
-              <a:rPr lang="en-US" dirty="0"/>
-              <a:t/>
-            </a:r>
             <a:endParaRPr lang="en-US" dirty="0"/>
           </a:p>
         </p:txBody>
@@ -1040,10 +797,6 @@
           <a:bodyPr/>
           <a:lstStyle/>
           <a:p>
-            <a:r>
-              <a:rPr lang="en-US" dirty="0"/>
-              <a:t/>
-            </a:r>
             <a:endParaRPr lang="en-US" dirty="0"/>
           </a:p>
         </p:txBody>
@@ -1128,10 +881,6 @@
           <a:bodyPr/>
           <a:lstStyle/>
           <a:p>
-            <a:r>
-              <a:rPr lang="en-US" dirty="0"/>
-              <a:t/>
-            </a:r>
             <a:endParaRPr lang="en-US" dirty="0"/>
           </a:p>
         </p:txBody>
@@ -1216,10 +965,6 @@
           <a:bodyPr/>
           <a:lstStyle/>
           <a:p>
-            <a:r>
-              <a:rPr lang="en-US" dirty="0"/>
-              <a:t/>
-            </a:r>
             <a:endParaRPr lang="en-US" dirty="0"/>
           </a:p>
         </p:txBody>
@@ -1304,10 +1049,6 @@
           <a:bodyPr/>
           <a:lstStyle/>
           <a:p>
-            <a:r>
-              <a:rPr lang="en-US" dirty="0"/>
-              <a:t/>
-            </a:r>
             <a:endParaRPr lang="en-US" dirty="0"/>
           </a:p>
         </p:txBody>
@@ -1392,10 +1133,6 @@
           <a:bodyPr/>
           <a:lstStyle/>
           <a:p>
-            <a:r>
-              <a:rPr lang="en-US" dirty="0"/>
-              <a:t/>
-            </a:r>
             <a:endParaRPr lang="en-US" dirty="0"/>
           </a:p>
         </p:txBody>
@@ -1480,10 +1217,6 @@
           <a:bodyPr/>
           <a:lstStyle/>
           <a:p>
-            <a:r>
-              <a:rPr lang="en-US" dirty="0"/>
-              <a:t/>
-            </a:r>
             <a:endParaRPr lang="en-US" dirty="0"/>
           </a:p>
         </p:txBody>
@@ -1568,10 +1301,6 @@
           <a:bodyPr/>
           <a:lstStyle/>
           <a:p>
-            <a:r>
-              <a:rPr lang="en-US" dirty="0"/>
-              <a:t/>
-            </a:r>
             <a:endParaRPr lang="en-US" dirty="0"/>
           </a:p>
         </p:txBody>
@@ -1645,6 +1374,11 @@
 <file path=ppt/slideMasters/slideMaster1.xml><?xml version="1.0" encoding="utf-8"?>
 <p:sldMaster xmlns:a="http://schemas.openxmlformats.org/drawingml/2006/main" xmlns:r="http://schemas.openxmlformats.org/officeDocument/2006/relationships" xmlns:p="http://schemas.openxmlformats.org/presentationml/2006/main">
   <p:cSld>
+    <p:bg>
+      <p:bgRef idx="1001">
+        <a:schemeClr val="bg1"/>
+      </p:bgRef>
+    </p:bg>
     <p:spTree>
       <p:nvGrpSpPr>
         <p:cNvPr id="1" name=""/>
@@ -1955,6 +1689,13 @@
           </a:solidFill>
           <a:ln/>
         </p:spPr>
+        <p:txBody>
+          <a:bodyPr/>
+          <a:lstStyle/>
+          <a:p>
+            <a:endParaRPr lang="ja-JP" noProof="0" dirty="0"/>
+          </a:p>
+        </p:txBody>
       </p:sp>
       <p:sp>
         <p:nvSpPr>
@@ -1975,6 +1716,13 @@
           </a:solidFill>
           <a:ln/>
         </p:spPr>
+        <p:txBody>
+          <a:bodyPr/>
+          <a:lstStyle/>
+          <a:p>
+            <a:endParaRPr lang="ja-JP" noProof="0" dirty="0"/>
+          </a:p>
+        </p:txBody>
       </p:sp>
       <p:sp>
         <p:nvSpPr>
@@ -1995,6 +1743,13 @@
           </a:solidFill>
           <a:ln/>
         </p:spPr>
+        <p:txBody>
+          <a:bodyPr/>
+          <a:lstStyle/>
+          <a:p>
+            <a:endParaRPr lang="ja-JP" noProof="0" dirty="0"/>
+          </a:p>
+        </p:txBody>
       </p:sp>
       <p:sp>
         <p:nvSpPr>
@@ -2015,81 +1770,21 @@
           </a:solidFill>
           <a:ln/>
           <a:effectLst>
-            <a:outerShdw sx="100000" sy="100000" kx="0" ky="0" algn="bl" rotWithShape="0" blurRad="76200" dist="38100" dir="8100000">
+            <a:outerShdw blurRad="76200" dist="38100" dir="8100000" algn="bl" rotWithShape="0">
               <a:srgbClr val="1E40AF">
                 <a:alpha val="10000"/>
               </a:srgbClr>
             </a:outerShdw>
           </a:effectLst>
         </p:spPr>
-      </p:sp>
-      <p:sp>
-        <p:nvSpPr>
-          <p:cNvPr id="6" name="Text 4"/>
-          <p:cNvSpPr/>
-          <p:nvPr/>
-        </p:nvSpPr>
-        <p:spPr>
-          <a:xfrm>
-            <a:off x="457200" y="749808"/>
-            <a:ext cx="3657600" cy="320040"/>
-          </a:xfrm>
-          <a:prstGeom prst="rect">
-            <a:avLst/>
-          </a:prstGeom>
-          <a:noFill/>
-          <a:ln/>
-        </p:spPr>
-        <p:txBody>
-          <a:bodyPr wrap="square" rtlCol="0" anchor="ctr"/>
-          <a:lstStyle/>
-          <a:p>
-            <a:pPr algn="ctr" indent="0" marL="0">
-              <a:buNone/>
-            </a:pPr>
-            <a:r>
-              <a:rPr lang="en-US" sz="900" dirty="0">
-                <a:solidFill>
-                  <a:srgbClr val="64748B"/>
-                </a:solidFill>
-              </a:rPr>
-              <a:t>アプリ起動中</a:t>
-            </a:r>
-            <a:endParaRPr lang="en-US" sz="900" dirty="0"/>
-          </a:p>
-        </p:txBody>
-      </p:sp>
-      <p:pic>
-        <p:nvPicPr>
-          <p:cNvPr id="7" name="Image 0" descr="preencoded.png">    </p:cNvPr>
-          <p:cNvPicPr>
-            <a:picLocks noChangeAspect="1"/>
-          </p:cNvPicPr>
-          <p:nvPr/>
-        </p:nvPicPr>
-        <p:blipFill>
-          <a:blip r:embed="rId1"/>
-          <a:stretch>
-            <a:fillRect/>
-          </a:stretch>
-        </p:blipFill>
-        <p:spPr>
-          <a:xfrm>
-            <a:off x="502920" y="1143000"/>
-            <a:ext cx="3566160" cy="1636776"/>
-          </a:xfrm>
-          <a:prstGeom prst="rect">
-            <a:avLst/>
-          </a:prstGeom>
-          <a:effectLst>
-            <a:outerShdw sx="100000" sy="100000" kx="0" ky="0" algn="bl" rotWithShape="0" blurRad="76200" dist="38100" dir="8100000">
-              <a:srgbClr val="1E40AF">
-                <a:alpha val="10000"/>
-              </a:srgbClr>
-            </a:outerShdw>
-          </a:effectLst>
-        </p:spPr>
-      </p:pic>
+        <p:txBody>
+          <a:bodyPr/>
+          <a:lstStyle/>
+          <a:p>
+            <a:endParaRPr lang="ja-JP" noProof="0" dirty="0"/>
+          </a:p>
+        </p:txBody>
+      </p:sp>
       <p:sp>
         <p:nvSpPr>
           <p:cNvPr id="8" name="Text 5"/>
@@ -2111,85 +1806,18 @@
           <a:bodyPr wrap="square" rtlCol="0" anchor="ctr"/>
           <a:lstStyle/>
           <a:p>
-            <a:pPr algn="ctr" indent="0" marL="0">
-              <a:buNone/>
-            </a:pPr>
-            <a:r>
-              <a:rPr lang="en-US" sz="900" i="1" dirty="0">
+            <a:pPr marL="0" indent="0" algn="ctr">
+              <a:buNone/>
+            </a:pPr>
+            <a:r>
+              <a:rPr lang="ja-JP" sz="900" i="1" noProof="0" dirty="0">
                 <a:solidFill>
                   <a:srgbClr val="64748B"/>
                 </a:solidFill>
               </a:rPr>
               <a:t>▲  実際の出席コード表示画面</a:t>
             </a:r>
-            <a:endParaRPr lang="en-US" sz="900" dirty="0"/>
-          </a:p>
-        </p:txBody>
-      </p:sp>
-      <p:pic>
-        <p:nvPicPr>
-          <p:cNvPr id="9" name="Image 1" descr="preencoded.png">    </p:cNvPr>
-          <p:cNvPicPr>
-            <a:picLocks noChangeAspect="1"/>
-          </p:cNvPicPr>
-          <p:nvPr/>
-        </p:nvPicPr>
-        <p:blipFill>
-          <a:blip r:embed="rId2"/>
-          <a:stretch>
-            <a:fillRect/>
-          </a:stretch>
-        </p:blipFill>
-        <p:spPr>
-          <a:xfrm>
-            <a:off x="502920" y="3154680"/>
-            <a:ext cx="3566160" cy="950976"/>
-          </a:xfrm>
-          <a:prstGeom prst="rect">
-            <a:avLst/>
-          </a:prstGeom>
-          <a:effectLst>
-            <a:outerShdw sx="100000" sy="100000" kx="0" ky="0" algn="bl" rotWithShape="0" blurRad="76200" dist="38100" dir="8100000">
-              <a:srgbClr val="1E40AF">
-                <a:alpha val="10000"/>
-              </a:srgbClr>
-            </a:outerShdw>
-          </a:effectLst>
-        </p:spPr>
-      </p:pic>
-      <p:sp>
-        <p:nvSpPr>
-          <p:cNvPr id="10" name="Text 6"/>
-          <p:cNvSpPr/>
-          <p:nvPr/>
-        </p:nvSpPr>
-        <p:spPr>
-          <a:xfrm>
-            <a:off x="457200" y="4142232"/>
-            <a:ext cx="3657600" cy="201168"/>
-          </a:xfrm>
-          <a:prstGeom prst="rect">
-            <a:avLst/>
-          </a:prstGeom>
-          <a:noFill/>
-          <a:ln/>
-        </p:spPr>
-        <p:txBody>
-          <a:bodyPr wrap="square" rtlCol="0" anchor="ctr"/>
-          <a:lstStyle/>
-          <a:p>
-            <a:pPr algn="ctr" indent="0" marL="0">
-              <a:buNone/>
-            </a:pPr>
-            <a:r>
-              <a:rPr lang="en-US" sz="900" i="1" dirty="0">
-                <a:solidFill>
-                  <a:srgbClr val="64748B"/>
-                </a:solidFill>
-              </a:rPr>
-              <a:t>▲  設定ダイアログ</a:t>
-            </a:r>
-            <a:endParaRPr lang="en-US" sz="900" dirty="0"/>
+            <a:endParaRPr lang="ja-JP" sz="900" noProof="0" dirty="0"/>
           </a:p>
         </p:txBody>
       </p:sp>
@@ -2212,6 +1840,13 @@
           </a:solidFill>
           <a:ln/>
         </p:spPr>
+        <p:txBody>
+          <a:bodyPr/>
+          <a:lstStyle/>
+          <a:p>
+            <a:endParaRPr lang="ja-JP" noProof="0" dirty="0"/>
+          </a:p>
+        </p:txBody>
       </p:sp>
       <p:sp>
         <p:nvSpPr>
@@ -2234,11 +1869,11 @@
           <a:bodyPr wrap="square" rtlCol="0" anchor="ctr"/>
           <a:lstStyle/>
           <a:p>
-            <a:pPr indent="0" marL="0">
-              <a:buNone/>
-            </a:pPr>
-            <a:r>
-              <a:rPr lang="en-US" sz="4600" b="1" dirty="0">
+            <a:pPr marL="0" indent="0">
+              <a:buNone/>
+            </a:pPr>
+            <a:r>
+              <a:rPr lang="ja-JP" sz="4600" b="1" noProof="0" dirty="0">
                 <a:solidFill>
                   <a:srgbClr val="1E40AF"/>
                 </a:solidFill>
@@ -2248,7 +1883,7 @@
               </a:rPr>
               <a:t>CodeWidget</a:t>
             </a:r>
-            <a:endParaRPr lang="en-US" sz="4600" dirty="0"/>
+            <a:endParaRPr lang="ja-JP" sz="4600" noProof="0" dirty="0"/>
           </a:p>
         </p:txBody>
       </p:sp>
@@ -2273,11 +1908,11 @@
           <a:bodyPr wrap="square" rtlCol="0" anchor="ctr"/>
           <a:lstStyle/>
           <a:p>
-            <a:pPr indent="0" marL="0">
-              <a:buNone/>
-            </a:pPr>
-            <a:r>
-              <a:rPr lang="en-US" sz="2000" dirty="0">
+            <a:pPr marL="0" indent="0">
+              <a:buNone/>
+            </a:pPr>
+            <a:r>
+              <a:rPr lang="ja-JP" sz="2000" noProof="0" dirty="0">
                 <a:solidFill>
                   <a:srgbClr val="3B82F6"/>
                 </a:solidFill>
@@ -2287,7 +1922,7 @@
               </a:rPr>
               <a:t>出席コード展示ツール</a:t>
             </a:r>
-            <a:endParaRPr lang="en-US" sz="2000" dirty="0"/>
+            <a:endParaRPr lang="ja-JP" sz="2000" noProof="0" dirty="0"/>
           </a:p>
         </p:txBody>
       </p:sp>
@@ -2310,6 +1945,13 @@
           </a:solidFill>
           <a:ln/>
         </p:spPr>
+        <p:txBody>
+          <a:bodyPr/>
+          <a:lstStyle/>
+          <a:p>
+            <a:endParaRPr lang="ja-JP" noProof="0" dirty="0"/>
+          </a:p>
+        </p:txBody>
       </p:sp>
       <p:sp>
         <p:nvSpPr>
@@ -2332,11 +1974,11 @@
           <a:bodyPr wrap="square" rtlCol="0" anchor="ctr"/>
           <a:lstStyle/>
           <a:p>
-            <a:pPr indent="0" marL="0">
-              <a:buNone/>
-            </a:pPr>
-            <a:r>
-              <a:rPr lang="en-US" sz="1800" dirty="0">
+            <a:pPr marL="0" indent="0">
+              <a:buNone/>
+            </a:pPr>
+            <a:r>
+              <a:rPr lang="ja-JP" sz="1800" noProof="0" dirty="0">
                 <a:solidFill>
                   <a:srgbClr val="1E293B"/>
                 </a:solidFill>
@@ -2346,7 +1988,7 @@
               </a:rPr>
               <a:t>ユーザーマニュアル</a:t>
             </a:r>
-            <a:endParaRPr lang="en-US" sz="1800" dirty="0"/>
+            <a:endParaRPr lang="ja-JP" sz="1800" noProof="0" dirty="0"/>
           </a:p>
         </p:txBody>
       </p:sp>
@@ -2371,18 +2013,34 @@
           <a:bodyPr wrap="square" rtlCol="0" anchor="ctr"/>
           <a:lstStyle/>
           <a:p>
-            <a:pPr indent="0" marL="0">
-              <a:buNone/>
-            </a:pPr>
-            <a:r>
-              <a:rPr lang="en-US" sz="1200" b="1" dirty="0">
+            <a:pPr marL="0" indent="0">
+              <a:buNone/>
+            </a:pPr>
+            <a:r>
+              <a:rPr lang="ja-JP" sz="1200" b="1" noProof="0" dirty="0">
                 <a:solidFill>
                   <a:srgbClr val="1E293B"/>
                 </a:solidFill>
               </a:rPr>
-              <a:t>対応バージョン  v1.0.0</a:t>
-            </a:r>
-            <a:endParaRPr lang="en-US" sz="1200" dirty="0"/>
+              <a:t>対応バージョン  v1.</a:t>
+            </a:r>
+            <a:r>
+              <a:rPr lang="en-US" altLang="ja-JP" sz="1200" b="1" noProof="0" dirty="0">
+                <a:solidFill>
+                  <a:srgbClr val="1E293B"/>
+                </a:solidFill>
+              </a:rPr>
+              <a:t>1</a:t>
+            </a:r>
+            <a:r>
+              <a:rPr lang="ja-JP" sz="1200" b="1" noProof="0" dirty="0">
+                <a:solidFill>
+                  <a:srgbClr val="1E293B"/>
+                </a:solidFill>
+              </a:rPr>
+              <a:t>.0</a:t>
+            </a:r>
+            <a:endParaRPr lang="ja-JP" sz="1200" noProof="0" dirty="0"/>
           </a:p>
         </p:txBody>
       </p:sp>
@@ -2407,18 +2065,18 @@
           <a:bodyPr wrap="square" rtlCol="0" anchor="ctr"/>
           <a:lstStyle/>
           <a:p>
-            <a:pPr indent="0" marL="0">
-              <a:buNone/>
-            </a:pPr>
-            <a:r>
-              <a:rPr lang="en-US" sz="1100" dirty="0">
+            <a:pPr marL="0" indent="0">
+              <a:buNone/>
+            </a:pPr>
+            <a:r>
+              <a:rPr lang="ja-JP" sz="1100" noProof="0" dirty="0">
                 <a:solidFill>
                   <a:srgbClr val="64748B"/>
                 </a:solidFill>
               </a:rPr>
               <a:t>Python 3.12 + PySide6　Windows / macOS</a:t>
             </a:r>
-            <a:endParaRPr lang="en-US" sz="1100" dirty="0"/>
+            <a:endParaRPr lang="ja-JP" sz="1100" noProof="0" dirty="0"/>
           </a:p>
         </p:txBody>
       </p:sp>
@@ -2441,6 +2099,13 @@
           </a:solidFill>
           <a:ln/>
         </p:spPr>
+        <p:txBody>
+          <a:bodyPr/>
+          <a:lstStyle/>
+          <a:p>
+            <a:endParaRPr lang="ja-JP" noProof="0" dirty="0"/>
+          </a:p>
+        </p:txBody>
       </p:sp>
       <p:sp>
         <p:nvSpPr>
@@ -2463,18 +2128,34 @@
           <a:bodyPr wrap="square" rtlCol="0" anchor="ctr"/>
           <a:lstStyle/>
           <a:p>
-            <a:pPr algn="ctr" indent="0" marL="0">
-              <a:buNone/>
-            </a:pPr>
-            <a:r>
-              <a:rPr lang="en-US" sz="1400" b="1" dirty="0">
+            <a:pPr marL="0" indent="0" algn="ctr">
+              <a:buNone/>
+            </a:pPr>
+            <a:r>
+              <a:rPr lang="ja-JP" sz="1400" b="1" noProof="0" dirty="0">
                 <a:solidFill>
                   <a:srgbClr val="1E40AF"/>
                 </a:solidFill>
               </a:rPr>
-              <a:t>麗澤大学　2026年度</a:t>
-            </a:r>
-            <a:endParaRPr lang="en-US" sz="1400" dirty="0"/>
+              <a:t>麗澤大学　2026年</a:t>
+            </a:r>
+            <a:r>
+              <a:rPr lang="en-US" altLang="ja-JP" sz="1400" b="1" noProof="0" dirty="0">
+                <a:solidFill>
+                  <a:srgbClr val="1E40AF"/>
+                </a:solidFill>
+              </a:rPr>
+              <a:t>8</a:t>
+            </a:r>
+            <a:r>
+              <a:rPr lang="ja-JP" altLang="en-US" sz="1400" b="1" noProof="0" dirty="0">
+                <a:solidFill>
+                  <a:srgbClr val="1E40AF"/>
+                </a:solidFill>
+              </a:rPr>
+              <a:t>月</a:t>
+            </a:r>
+            <a:endParaRPr lang="ja-JP" sz="1400" noProof="0" dirty="0"/>
           </a:p>
         </p:txBody>
       </p:sp>
@@ -2497,6 +2178,70 @@
           </a:solidFill>
           <a:ln/>
         </p:spPr>
+        <p:txBody>
+          <a:bodyPr/>
+          <a:lstStyle/>
+          <a:p>
+            <a:endParaRPr lang="ja-JP" noProof="0" dirty="0"/>
+          </a:p>
+        </p:txBody>
+      </p:sp>
+      <p:sp>
+        <p:nvSpPr>
+          <p:cNvPr id="21" name="矩形: 圆角 20">
+            <a:extLst>
+              <a:ext uri="{FF2B5EF4-FFF2-40B4-BE49-F238E27FC236}">
+                <a16:creationId xmlns:a16="http://schemas.microsoft.com/office/drawing/2014/main" id="{190458EA-CB52-A980-E94F-49CD3DAA39EF}"/>
+              </a:ext>
+            </a:extLst>
+          </p:cNvPr>
+          <p:cNvSpPr/>
+          <p:nvPr/>
+        </p:nvSpPr>
+        <p:spPr>
+          <a:xfrm>
+            <a:off x="769620" y="1571625"/>
+            <a:ext cx="3032760" cy="1291590"/>
+          </a:xfrm>
+          <a:prstGeom prst="roundRect">
+            <a:avLst>
+              <a:gd name="adj" fmla="val 24929"/>
+            </a:avLst>
+          </a:prstGeom>
+          <a:blipFill>
+            <a:blip r:embed="rId3"/>
+            <a:stretch>
+              <a:fillRect/>
+            </a:stretch>
+          </a:blipFill>
+          <a:ln>
+            <a:noFill/>
+          </a:ln>
+        </p:spPr>
+        <p:style>
+          <a:lnRef idx="2">
+            <a:schemeClr val="accent1">
+              <a:shade val="15000"/>
+            </a:schemeClr>
+          </a:lnRef>
+          <a:fillRef idx="1">
+            <a:schemeClr val="accent1"/>
+          </a:fillRef>
+          <a:effectRef idx="0">
+            <a:schemeClr val="accent1"/>
+          </a:effectRef>
+          <a:fontRef idx="minor">
+            <a:schemeClr val="lt1"/>
+          </a:fontRef>
+        </p:style>
+        <p:txBody>
+          <a:bodyPr rtlCol="0" anchor="ctr"/>
+          <a:lstStyle/>
+          <a:p>
+            <a:pPr algn="ctr"/>
+            <a:endParaRPr lang="ja-JP" noProof="0" dirty="0"/>
+          </a:p>
+        </p:txBody>
       </p:sp>
     </p:spTree>
   </p:cSld>
@@ -2514,6 +2259,7 @@
         <a:solidFill>
           <a:srgbClr val="FFFFFF"/>
         </a:solidFill>
+        <a:effectLst/>
       </p:bgPr>
     </p:bg>
     <p:spTree>
@@ -2549,6 +2295,13 @@
           </a:solidFill>
           <a:ln/>
         </p:spPr>
+        <p:txBody>
+          <a:bodyPr/>
+          <a:lstStyle/>
+          <a:p>
+            <a:endParaRPr lang="ja-JP" noProof="0" dirty="0"/>
+          </a:p>
+        </p:txBody>
       </p:sp>
       <p:sp>
         <p:nvSpPr>
@@ -2571,11 +2324,11 @@
           <a:bodyPr wrap="square" rtlCol="0" anchor="ctr"/>
           <a:lstStyle/>
           <a:p>
-            <a:pPr indent="0" marL="0">
-              <a:buNone/>
-            </a:pPr>
-            <a:r>
-              <a:rPr lang="en-US" sz="2300" b="1" dirty="0">
+            <a:pPr marL="0" indent="0">
+              <a:buNone/>
+            </a:pPr>
+            <a:r>
+              <a:rPr lang="ja-JP" sz="2300" b="1" noProof="0" dirty="0">
                 <a:solidFill>
                   <a:srgbClr val="FFFFFF"/>
                 </a:solidFill>
@@ -2585,7 +2338,7 @@
               </a:rPr>
               <a:t>05  授業の振替（調整）</a:t>
             </a:r>
-            <a:endParaRPr lang="en-US" sz="2300" dirty="0"/>
+            <a:endParaRPr lang="ja-JP" sz="2300" noProof="0" dirty="0"/>
           </a:p>
         </p:txBody>
       </p:sp>
@@ -2610,18 +2363,18 @@
           <a:bodyPr wrap="square" rtlCol="0" anchor="ctr"/>
           <a:lstStyle/>
           <a:p>
-            <a:pPr indent="0" marL="0">
-              <a:buNone/>
-            </a:pPr>
-            <a:r>
-              <a:rPr lang="en-US" sz="1250" dirty="0">
+            <a:pPr marL="0" indent="0">
+              <a:buNone/>
+            </a:pPr>
+            <a:r>
+              <a:rPr lang="ja-JP" sz="1250" noProof="0" dirty="0">
                 <a:solidFill>
                   <a:srgbClr val="1E293B"/>
                 </a:solidFill>
               </a:rPr>
               <a:t>授業の日程変更が発生した場合、「振替（Reschedule）」機能で対応できます。</a:t>
             </a:r>
-            <a:endParaRPr lang="en-US" sz="1250" dirty="0"/>
+            <a:endParaRPr lang="ja-JP" sz="1250" noProof="0" dirty="0"/>
           </a:p>
         </p:txBody>
       </p:sp>
@@ -2644,13 +2397,20 @@
           </a:solidFill>
           <a:ln/>
           <a:effectLst>
-            <a:outerShdw sx="100000" sy="100000" kx="0" ky="0" algn="bl" rotWithShape="0" blurRad="76200" dist="38100" dir="8100000">
+            <a:outerShdw blurRad="76200" dist="38100" dir="8100000" algn="bl" rotWithShape="0">
               <a:srgbClr val="1E40AF">
                 <a:alpha val="10000"/>
               </a:srgbClr>
             </a:outerShdw>
           </a:effectLst>
         </p:spPr>
+        <p:txBody>
+          <a:bodyPr/>
+          <a:lstStyle/>
+          <a:p>
+            <a:endParaRPr lang="ja-JP" noProof="0" dirty="0"/>
+          </a:p>
+        </p:txBody>
       </p:sp>
       <p:sp>
         <p:nvSpPr>
@@ -2671,6 +2431,13 @@
           </a:solidFill>
           <a:ln/>
         </p:spPr>
+        <p:txBody>
+          <a:bodyPr/>
+          <a:lstStyle/>
+          <a:p>
+            <a:endParaRPr lang="ja-JP" noProof="0" dirty="0"/>
+          </a:p>
+        </p:txBody>
       </p:sp>
       <p:sp>
         <p:nvSpPr>
@@ -2691,6 +2458,13 @@
           </a:solidFill>
           <a:ln/>
         </p:spPr>
+        <p:txBody>
+          <a:bodyPr/>
+          <a:lstStyle/>
+          <a:p>
+            <a:endParaRPr lang="ja-JP" noProof="0" dirty="0"/>
+          </a:p>
+        </p:txBody>
       </p:sp>
       <p:sp>
         <p:nvSpPr>
@@ -2713,18 +2487,18 @@
           <a:bodyPr wrap="square" rtlCol="0" anchor="ctr"/>
           <a:lstStyle/>
           <a:p>
-            <a:pPr algn="ctr" indent="0" marL="0">
-              <a:buNone/>
-            </a:pPr>
-            <a:r>
-              <a:rPr lang="en-US" sz="2600" dirty="0">
+            <a:pPr marL="0" indent="0" algn="ctr">
+              <a:buNone/>
+            </a:pPr>
+            <a:r>
+              <a:rPr lang="ja-JP" sz="2600" noProof="0" dirty="0">
                 <a:solidFill>
                   <a:srgbClr val="000000"/>
                 </a:solidFill>
               </a:rPr>
               <a:t>🔄</a:t>
             </a:r>
-            <a:endParaRPr lang="en-US" sz="2600" dirty="0"/>
+            <a:endParaRPr lang="ja-JP" sz="2600" noProof="0" dirty="0"/>
           </a:p>
         </p:txBody>
       </p:sp>
@@ -2749,18 +2523,18 @@
           <a:bodyPr wrap="square" rtlCol="0" anchor="t"/>
           <a:lstStyle/>
           <a:p>
-            <a:pPr algn="ctr" indent="0" marL="0">
-              <a:buNone/>
-            </a:pPr>
-            <a:r>
-              <a:rPr lang="en-US" sz="1400" b="1" dirty="0">
+            <a:pPr marL="0" indent="0" algn="ctr">
+              <a:buNone/>
+            </a:pPr>
+            <a:r>
+              <a:rPr lang="ja-JP" sz="1400" b="1" noProof="0" dirty="0">
                 <a:solidFill>
                   <a:srgbClr val="FFFFFF"/>
                 </a:solidFill>
               </a:rPr>
               <a:t>振替</a:t>
             </a:r>
-            <a:endParaRPr lang="en-US" sz="1400" dirty="0"/>
+            <a:endParaRPr lang="ja-JP" sz="1400" noProof="0" dirty="0"/>
           </a:p>
         </p:txBody>
       </p:sp>
@@ -2785,18 +2559,18 @@
           <a:bodyPr wrap="square" rtlCol="0" anchor="ctr"/>
           <a:lstStyle/>
           <a:p>
-            <a:pPr algn="ctr" indent="0" marL="0">
-              <a:buNone/>
-            </a:pPr>
-            <a:r>
-              <a:rPr lang="en-US" sz="950" dirty="0">
+            <a:pPr marL="0" indent="0" algn="ctr">
+              <a:buNone/>
+            </a:pPr>
+            <a:r>
+              <a:rPr lang="ja-JP" sz="950" noProof="0" dirty="0">
                 <a:solidFill>
                   <a:srgbClr val="BFDBFE"/>
                 </a:solidFill>
               </a:rPr>
               <a:t>Reschedule</a:t>
             </a:r>
-            <a:endParaRPr lang="en-US" sz="950" dirty="0"/>
+            <a:endParaRPr lang="ja-JP" sz="950" noProof="0" dirty="0"/>
           </a:p>
         </p:txBody>
       </p:sp>
@@ -2821,18 +2595,18 @@
           <a:bodyPr wrap="square" rtlCol="0" anchor="ctr"/>
           <a:lstStyle/>
           <a:p>
-            <a:pPr indent="0" marL="0">
-              <a:buNone/>
-            </a:pPr>
-            <a:r>
-              <a:rPr lang="en-US" sz="1100" b="1" dirty="0">
+            <a:pPr marL="0" indent="0">
+              <a:buNone/>
+            </a:pPr>
+            <a:r>
+              <a:rPr lang="ja-JP" sz="1100" b="1" noProof="0" dirty="0">
                 <a:solidFill>
                   <a:srgbClr val="64748B"/>
                 </a:solidFill>
               </a:rPr>
               <a:t>内容</a:t>
             </a:r>
-            <a:endParaRPr lang="en-US" sz="1100" dirty="0"/>
+            <a:endParaRPr lang="ja-JP" sz="1100" noProof="0" dirty="0"/>
           </a:p>
         </p:txBody>
       </p:sp>
@@ -2857,32 +2631,32 @@
           <a:bodyPr wrap="square" rtlCol="0" anchor="ctr"/>
           <a:lstStyle/>
           <a:p>
-            <a:pPr indent="0" marL="0">
-              <a:buNone/>
-            </a:pPr>
-            <a:r>
-              <a:rPr lang="en-US" sz="1200" dirty="0">
+            <a:pPr marL="0" indent="0">
+              <a:buNone/>
+            </a:pPr>
+            <a:r>
+              <a:rPr lang="ja-JP" sz="1200" noProof="0" dirty="0">
                 <a:solidFill>
                   <a:srgbClr val="1E293B"/>
                 </a:solidFill>
               </a:rPr>
               <a:t>特定の授業回を元の日時から新しい日時に移動します。</a:t>
             </a:r>
-            <a:endParaRPr lang="en-US" sz="1200" dirty="0"/>
-          </a:p>
-          <a:p>
-            <a:pPr indent="0" marL="0">
-              <a:buNone/>
-            </a:pPr>
-            <a:r>
-              <a:rPr lang="en-US" sz="1200" dirty="0">
+            <a:endParaRPr lang="ja-JP" sz="1200" noProof="0" dirty="0"/>
+          </a:p>
+          <a:p>
+            <a:pPr marL="0" indent="0">
+              <a:buNone/>
+            </a:pPr>
+            <a:r>
+              <a:rPr lang="ja-JP" sz="1200" noProof="0" dirty="0">
                 <a:solidFill>
                   <a:srgbClr val="1E293B"/>
                 </a:solidFill>
               </a:rPr>
               <a:t>例：4月16日（木 1限）の授業 → 4月18日（土 2限）に振替。</a:t>
             </a:r>
-            <a:endParaRPr lang="en-US" sz="1200" dirty="0"/>
+            <a:endParaRPr lang="ja-JP" sz="1200" noProof="0" dirty="0"/>
           </a:p>
         </p:txBody>
       </p:sp>
@@ -2908,6 +2682,13 @@
             <a:prstDash val="solid"/>
           </a:ln>
         </p:spPr>
+        <p:txBody>
+          <a:bodyPr/>
+          <a:lstStyle/>
+          <a:p>
+            <a:endParaRPr lang="ja-JP" noProof="0" dirty="0"/>
+          </a:p>
+        </p:txBody>
       </p:sp>
       <p:sp>
         <p:nvSpPr>
@@ -2930,18 +2711,18 @@
           <a:bodyPr wrap="square" rtlCol="0" anchor="ctr"/>
           <a:lstStyle/>
           <a:p>
-            <a:pPr indent="0" marL="0">
-              <a:buNone/>
-            </a:pPr>
-            <a:r>
-              <a:rPr lang="en-US" sz="1100" b="1" dirty="0">
+            <a:pPr marL="0" indent="0">
+              <a:buNone/>
+            </a:pPr>
+            <a:r>
+              <a:rPr lang="ja-JP" sz="1100" b="1" noProof="0" dirty="0">
                 <a:solidFill>
                   <a:srgbClr val="64748B"/>
                 </a:solidFill>
               </a:rPr>
               <a:t>操作</a:t>
             </a:r>
-            <a:endParaRPr lang="en-US" sz="1100" dirty="0"/>
+            <a:endParaRPr lang="ja-JP" sz="1100" noProof="0" dirty="0"/>
           </a:p>
         </p:txBody>
       </p:sp>
@@ -2966,18 +2747,18 @@
           <a:bodyPr wrap="square" rtlCol="0" anchor="ctr"/>
           <a:lstStyle/>
           <a:p>
-            <a:pPr indent="0" marL="0">
-              <a:buNone/>
-            </a:pPr>
-            <a:r>
-              <a:rPr lang="en-US" sz="1150" dirty="0">
+            <a:pPr marL="0" indent="0">
+              <a:buNone/>
+            </a:pPr>
+            <a:r>
+              <a:rPr lang="ja-JP" sz="1150" noProof="0" dirty="0">
                 <a:solidFill>
                   <a:srgbClr val="1E40AF"/>
                 </a:solidFill>
               </a:rPr>
               <a:t>設定 →「調整」タブ →「調整を追加」→ 対象の授業・回次を選択 → 新しい日付・時限を設定 → OK</a:t>
             </a:r>
-            <a:endParaRPr lang="en-US" sz="1150" dirty="0"/>
+            <a:endParaRPr lang="ja-JP" sz="1150" noProof="0" dirty="0"/>
           </a:p>
         </p:txBody>
       </p:sp>
@@ -3002,18 +2783,18 @@
           <a:bodyPr wrap="square" rtlCol="0" anchor="ctr"/>
           <a:lstStyle/>
           <a:p>
-            <a:pPr indent="0" marL="0">
-              <a:buNone/>
-            </a:pPr>
-            <a:r>
-              <a:rPr lang="en-US" sz="1200" b="1" dirty="0">
+            <a:pPr marL="0" indent="0">
+              <a:buNone/>
+            </a:pPr>
+            <a:r>
+              <a:rPr lang="ja-JP" sz="1200" b="1" noProof="0" dirty="0">
                 <a:solidFill>
                   <a:srgbClr val="1E40AF"/>
                 </a:solidFill>
               </a:rPr>
               <a:t>詳細手順</a:t>
             </a:r>
-            <a:endParaRPr lang="en-US" sz="1200" dirty="0"/>
+            <a:endParaRPr lang="ja-JP" sz="1200" noProof="0" dirty="0"/>
           </a:p>
         </p:txBody>
       </p:sp>
@@ -3041,6 +2822,13 @@
             <a:prstDash val="solid"/>
           </a:ln>
         </p:spPr>
+        <p:txBody>
+          <a:bodyPr/>
+          <a:lstStyle/>
+          <a:p>
+            <a:endParaRPr lang="ja-JP" noProof="0" dirty="0"/>
+          </a:p>
+        </p:txBody>
       </p:sp>
       <p:sp>
         <p:nvSpPr>
@@ -3061,6 +2849,13 @@
           </a:solidFill>
           <a:ln/>
         </p:spPr>
+        <p:txBody>
+          <a:bodyPr/>
+          <a:lstStyle/>
+          <a:p>
+            <a:endParaRPr lang="ja-JP" noProof="0" dirty="0"/>
+          </a:p>
+        </p:txBody>
       </p:sp>
       <p:sp>
         <p:nvSpPr>
@@ -3083,18 +2878,18 @@
           <a:bodyPr wrap="square" rtlCol="0" anchor="ctr"/>
           <a:lstStyle/>
           <a:p>
-            <a:pPr algn="ctr" indent="0" marL="0">
-              <a:buNone/>
-            </a:pPr>
-            <a:r>
-              <a:rPr lang="en-US" sz="1000" b="1" dirty="0">
+            <a:pPr marL="0" indent="0" algn="ctr">
+              <a:buNone/>
+            </a:pPr>
+            <a:r>
+              <a:rPr lang="ja-JP" sz="1000" b="1" noProof="0" dirty="0">
                 <a:solidFill>
                   <a:srgbClr val="FFFFFF"/>
                 </a:solidFill>
               </a:rPr>
               <a:t>1</a:t>
             </a:r>
-            <a:endParaRPr lang="en-US" sz="1000" dirty="0"/>
+            <a:endParaRPr lang="ja-JP" sz="1000" noProof="0" dirty="0"/>
           </a:p>
         </p:txBody>
       </p:sp>
@@ -3119,18 +2914,18 @@
           <a:bodyPr wrap="square" rtlCol="0" anchor="ctr"/>
           <a:lstStyle/>
           <a:p>
-            <a:pPr indent="0" marL="0">
-              <a:buNone/>
-            </a:pPr>
-            <a:r>
-              <a:rPr lang="en-US" sz="1000" dirty="0">
+            <a:pPr marL="0" indent="0">
+              <a:buNone/>
+            </a:pPr>
+            <a:r>
+              <a:rPr lang="ja-JP" sz="1000" noProof="0" dirty="0">
                 <a:solidFill>
                   <a:srgbClr val="1E293B"/>
                 </a:solidFill>
               </a:rPr>
               <a:t>設定を開き「調整」タブを選択する</a:t>
             </a:r>
-            <a:endParaRPr lang="en-US" sz="1000" dirty="0"/>
+            <a:endParaRPr lang="ja-JP" sz="1000" noProof="0" dirty="0"/>
           </a:p>
         </p:txBody>
       </p:sp>
@@ -3158,6 +2953,13 @@
             <a:prstDash val="solid"/>
           </a:ln>
         </p:spPr>
+        <p:txBody>
+          <a:bodyPr/>
+          <a:lstStyle/>
+          <a:p>
+            <a:endParaRPr lang="ja-JP" noProof="0" dirty="0"/>
+          </a:p>
+        </p:txBody>
       </p:sp>
       <p:sp>
         <p:nvSpPr>
@@ -3178,6 +2980,13 @@
           </a:solidFill>
           <a:ln/>
         </p:spPr>
+        <p:txBody>
+          <a:bodyPr/>
+          <a:lstStyle/>
+          <a:p>
+            <a:endParaRPr lang="ja-JP" noProof="0" dirty="0"/>
+          </a:p>
+        </p:txBody>
       </p:sp>
       <p:sp>
         <p:nvSpPr>
@@ -3200,18 +3009,18 @@
           <a:bodyPr wrap="square" rtlCol="0" anchor="ctr"/>
           <a:lstStyle/>
           <a:p>
-            <a:pPr algn="ctr" indent="0" marL="0">
-              <a:buNone/>
-            </a:pPr>
-            <a:r>
-              <a:rPr lang="en-US" sz="1000" b="1" dirty="0">
+            <a:pPr marL="0" indent="0" algn="ctr">
+              <a:buNone/>
+            </a:pPr>
+            <a:r>
+              <a:rPr lang="ja-JP" sz="1000" b="1" noProof="0" dirty="0">
                 <a:solidFill>
                   <a:srgbClr val="FFFFFF"/>
                 </a:solidFill>
               </a:rPr>
               <a:t>2</a:t>
             </a:r>
-            <a:endParaRPr lang="en-US" sz="1000" dirty="0"/>
+            <a:endParaRPr lang="ja-JP" sz="1000" noProof="0" dirty="0"/>
           </a:p>
         </p:txBody>
       </p:sp>
@@ -3236,18 +3045,18 @@
           <a:bodyPr wrap="square" rtlCol="0" anchor="ctr"/>
           <a:lstStyle/>
           <a:p>
-            <a:pPr indent="0" marL="0">
-              <a:buNone/>
-            </a:pPr>
-            <a:r>
-              <a:rPr lang="en-US" sz="1000" dirty="0">
+            <a:pPr marL="0" indent="0">
+              <a:buNone/>
+            </a:pPr>
+            <a:r>
+              <a:rPr lang="ja-JP" sz="1000" noProof="0" dirty="0">
                 <a:solidFill>
                   <a:srgbClr val="1E293B"/>
                 </a:solidFill>
               </a:rPr>
               <a:t>「調整を追加」ボタンをクリックする</a:t>
             </a:r>
-            <a:endParaRPr lang="en-US" sz="1000" dirty="0"/>
+            <a:endParaRPr lang="ja-JP" sz="1000" noProof="0" dirty="0"/>
           </a:p>
         </p:txBody>
       </p:sp>
@@ -3275,6 +3084,13 @@
             <a:prstDash val="solid"/>
           </a:ln>
         </p:spPr>
+        <p:txBody>
+          <a:bodyPr/>
+          <a:lstStyle/>
+          <a:p>
+            <a:endParaRPr lang="ja-JP" noProof="0" dirty="0"/>
+          </a:p>
+        </p:txBody>
       </p:sp>
       <p:sp>
         <p:nvSpPr>
@@ -3295,6 +3111,13 @@
           </a:solidFill>
           <a:ln/>
         </p:spPr>
+        <p:txBody>
+          <a:bodyPr/>
+          <a:lstStyle/>
+          <a:p>
+            <a:endParaRPr lang="ja-JP" noProof="0" dirty="0"/>
+          </a:p>
+        </p:txBody>
       </p:sp>
       <p:sp>
         <p:nvSpPr>
@@ -3317,18 +3140,18 @@
           <a:bodyPr wrap="square" rtlCol="0" anchor="ctr"/>
           <a:lstStyle/>
           <a:p>
-            <a:pPr algn="ctr" indent="0" marL="0">
-              <a:buNone/>
-            </a:pPr>
-            <a:r>
-              <a:rPr lang="en-US" sz="1000" b="1" dirty="0">
+            <a:pPr marL="0" indent="0" algn="ctr">
+              <a:buNone/>
+            </a:pPr>
+            <a:r>
+              <a:rPr lang="ja-JP" sz="1000" b="1" noProof="0" dirty="0">
                 <a:solidFill>
                   <a:srgbClr val="FFFFFF"/>
                 </a:solidFill>
               </a:rPr>
               <a:t>3</a:t>
             </a:r>
-            <a:endParaRPr lang="en-US" sz="1000" dirty="0"/>
+            <a:endParaRPr lang="ja-JP" sz="1000" noProof="0" dirty="0"/>
           </a:p>
         </p:txBody>
       </p:sp>
@@ -3353,18 +3176,18 @@
           <a:bodyPr wrap="square" rtlCol="0" anchor="ctr"/>
           <a:lstStyle/>
           <a:p>
-            <a:pPr indent="0" marL="0">
-              <a:buNone/>
-            </a:pPr>
-            <a:r>
-              <a:rPr lang="en-US" sz="1000" dirty="0">
+            <a:pPr marL="0" indent="0">
+              <a:buNone/>
+            </a:pPr>
+            <a:r>
+              <a:rPr lang="ja-JP" sz="1000" noProof="0" dirty="0">
                 <a:solidFill>
                   <a:srgbClr val="1E293B"/>
                 </a:solidFill>
               </a:rPr>
               <a:t>振替対象の授業と回次（例：第03回）を選択する</a:t>
             </a:r>
-            <a:endParaRPr lang="en-US" sz="1000" dirty="0"/>
+            <a:endParaRPr lang="ja-JP" sz="1000" noProof="0" dirty="0"/>
           </a:p>
         </p:txBody>
       </p:sp>
@@ -3392,6 +3215,13 @@
             <a:prstDash val="solid"/>
           </a:ln>
         </p:spPr>
+        <p:txBody>
+          <a:bodyPr/>
+          <a:lstStyle/>
+          <a:p>
+            <a:endParaRPr lang="ja-JP" noProof="0" dirty="0"/>
+          </a:p>
+        </p:txBody>
       </p:sp>
       <p:sp>
         <p:nvSpPr>
@@ -3412,6 +3242,13 @@
           </a:solidFill>
           <a:ln/>
         </p:spPr>
+        <p:txBody>
+          <a:bodyPr/>
+          <a:lstStyle/>
+          <a:p>
+            <a:endParaRPr lang="ja-JP" noProof="0" dirty="0"/>
+          </a:p>
+        </p:txBody>
       </p:sp>
       <p:sp>
         <p:nvSpPr>
@@ -3434,18 +3271,18 @@
           <a:bodyPr wrap="square" rtlCol="0" anchor="ctr"/>
           <a:lstStyle/>
           <a:p>
-            <a:pPr algn="ctr" indent="0" marL="0">
-              <a:buNone/>
-            </a:pPr>
-            <a:r>
-              <a:rPr lang="en-US" sz="1000" b="1" dirty="0">
+            <a:pPr marL="0" indent="0" algn="ctr">
+              <a:buNone/>
+            </a:pPr>
+            <a:r>
+              <a:rPr lang="ja-JP" sz="1000" b="1" noProof="0" dirty="0">
                 <a:solidFill>
                   <a:srgbClr val="FFFFFF"/>
                 </a:solidFill>
               </a:rPr>
               <a:t>4</a:t>
             </a:r>
-            <a:endParaRPr lang="en-US" sz="1000" dirty="0"/>
+            <a:endParaRPr lang="ja-JP" sz="1000" noProof="0" dirty="0"/>
           </a:p>
         </p:txBody>
       </p:sp>
@@ -3470,18 +3307,18 @@
           <a:bodyPr wrap="square" rtlCol="0" anchor="ctr"/>
           <a:lstStyle/>
           <a:p>
-            <a:pPr indent="0" marL="0">
-              <a:buNone/>
-            </a:pPr>
-            <a:r>
-              <a:rPr lang="en-US" sz="1000" dirty="0">
+            <a:pPr marL="0" indent="0">
+              <a:buNone/>
+            </a:pPr>
+            <a:r>
+              <a:rPr lang="ja-JP" sz="1000" noProof="0" dirty="0">
                 <a:solidFill>
                   <a:srgbClr val="1E293B"/>
                 </a:solidFill>
               </a:rPr>
               <a:t>振替先の日付・曜日・時限を入力する</a:t>
             </a:r>
-            <a:endParaRPr lang="en-US" sz="1000" dirty="0"/>
+            <a:endParaRPr lang="ja-JP" sz="1000" noProof="0" dirty="0"/>
           </a:p>
         </p:txBody>
       </p:sp>
@@ -3509,6 +3346,13 @@
             <a:prstDash val="solid"/>
           </a:ln>
         </p:spPr>
+        <p:txBody>
+          <a:bodyPr/>
+          <a:lstStyle/>
+          <a:p>
+            <a:endParaRPr lang="ja-JP" noProof="0" dirty="0"/>
+          </a:p>
+        </p:txBody>
       </p:sp>
       <p:sp>
         <p:nvSpPr>
@@ -3529,6 +3373,13 @@
           </a:solidFill>
           <a:ln/>
         </p:spPr>
+        <p:txBody>
+          <a:bodyPr/>
+          <a:lstStyle/>
+          <a:p>
+            <a:endParaRPr lang="ja-JP" noProof="0" dirty="0"/>
+          </a:p>
+        </p:txBody>
       </p:sp>
       <p:sp>
         <p:nvSpPr>
@@ -3551,18 +3402,18 @@
           <a:bodyPr wrap="square" rtlCol="0" anchor="ctr"/>
           <a:lstStyle/>
           <a:p>
-            <a:pPr algn="ctr" indent="0" marL="0">
-              <a:buNone/>
-            </a:pPr>
-            <a:r>
-              <a:rPr lang="en-US" sz="1000" b="1" dirty="0">
+            <a:pPr marL="0" indent="0" algn="ctr">
+              <a:buNone/>
+            </a:pPr>
+            <a:r>
+              <a:rPr lang="ja-JP" sz="1000" b="1" noProof="0" dirty="0">
                 <a:solidFill>
                   <a:srgbClr val="FFFFFF"/>
                 </a:solidFill>
               </a:rPr>
               <a:t>5</a:t>
             </a:r>
-            <a:endParaRPr lang="en-US" sz="1000" dirty="0"/>
+            <a:endParaRPr lang="ja-JP" sz="1000" noProof="0" dirty="0"/>
           </a:p>
         </p:txBody>
       </p:sp>
@@ -3587,18 +3438,18 @@
           <a:bodyPr wrap="square" rtlCol="0" anchor="ctr"/>
           <a:lstStyle/>
           <a:p>
-            <a:pPr indent="0" marL="0">
-              <a:buNone/>
-            </a:pPr>
-            <a:r>
-              <a:rPr lang="en-US" sz="1000" dirty="0">
+            <a:pPr marL="0" indent="0">
+              <a:buNone/>
+            </a:pPr>
+            <a:r>
+              <a:rPr lang="ja-JP" sz="1000" noProof="0" dirty="0">
                 <a:solidFill>
                   <a:srgbClr val="1E293B"/>
                 </a:solidFill>
               </a:rPr>
               <a:t>OK で保存。「日程プレビュー」で結果を確認する</a:t>
             </a:r>
-            <a:endParaRPr lang="en-US" sz="1000" dirty="0"/>
+            <a:endParaRPr lang="ja-JP" sz="1000" noProof="0" dirty="0"/>
           </a:p>
         </p:txBody>
       </p:sp>
@@ -3621,6 +3472,13 @@
           </a:solidFill>
           <a:ln/>
         </p:spPr>
+        <p:txBody>
+          <a:bodyPr/>
+          <a:lstStyle/>
+          <a:p>
+            <a:endParaRPr lang="ja-JP" noProof="0" dirty="0"/>
+          </a:p>
+        </p:txBody>
       </p:sp>
       <p:sp>
         <p:nvSpPr>
@@ -3643,18 +3501,18 @@
           <a:bodyPr wrap="square" rtlCol="0" anchor="ctr"/>
           <a:lstStyle/>
           <a:p>
-            <a:pPr indent="0" marL="0">
-              <a:buNone/>
-            </a:pPr>
-            <a:r>
-              <a:rPr lang="en-US" sz="1050" dirty="0">
+            <a:pPr marL="0" indent="0">
+              <a:buNone/>
+            </a:pPr>
+            <a:r>
+              <a:rPr lang="ja-JP" sz="1050" noProof="0" dirty="0">
                 <a:solidFill>
                   <a:srgbClr val="92400E"/>
                 </a:solidFill>
               </a:rPr>
               <a:t>💡 振替後は回次番号が自動的に再計算されます。「日程プレビュー」タブで変更結果を必ず確認してください。</a:t>
             </a:r>
-            <a:endParaRPr lang="en-US" sz="1050" dirty="0"/>
+            <a:endParaRPr lang="ja-JP" sz="1050" noProof="0" dirty="0"/>
           </a:p>
         </p:txBody>
       </p:sp>
@@ -3677,6 +3535,13 @@
           </a:solidFill>
           <a:ln/>
         </p:spPr>
+        <p:txBody>
+          <a:bodyPr/>
+          <a:lstStyle/>
+          <a:p>
+            <a:endParaRPr lang="ja-JP" noProof="0" dirty="0"/>
+          </a:p>
+        </p:txBody>
       </p:sp>
       <p:sp>
         <p:nvSpPr>
@@ -3699,18 +3564,18 @@
           <a:bodyPr wrap="square" rtlCol="0" anchor="ctr"/>
           <a:lstStyle/>
           <a:p>
-            <a:pPr indent="0" marL="0">
-              <a:buNone/>
-            </a:pPr>
-            <a:r>
-              <a:rPr lang="en-US" sz="900" dirty="0">
+            <a:pPr marL="0" indent="0">
+              <a:buNone/>
+            </a:pPr>
+            <a:r>
+              <a:rPr lang="ja-JP" sz="900" noProof="0" dirty="0">
                 <a:solidFill>
                   <a:srgbClr val="BFDBFE"/>
                 </a:solidFill>
               </a:rPr>
               <a:t>CodeWidget  ユーザーマニュアル</a:t>
             </a:r>
-            <a:endParaRPr lang="en-US" sz="900" dirty="0"/>
+            <a:endParaRPr lang="ja-JP" sz="900" noProof="0" dirty="0"/>
           </a:p>
         </p:txBody>
       </p:sp>
@@ -3735,18 +3600,18 @@
           <a:bodyPr wrap="square" rtlCol="0" anchor="ctr"/>
           <a:lstStyle/>
           <a:p>
-            <a:pPr algn="r" indent="0" marL="0">
-              <a:buNone/>
-            </a:pPr>
-            <a:r>
-              <a:rPr lang="en-US" sz="900" dirty="0">
+            <a:pPr marL="0" indent="0" algn="r">
+              <a:buNone/>
+            </a:pPr>
+            <a:r>
+              <a:rPr lang="ja-JP" sz="900" noProof="0" dirty="0">
                 <a:solidFill>
                   <a:srgbClr val="BFDBFE"/>
                 </a:solidFill>
               </a:rPr>
               <a:t>10</a:t>
             </a:r>
-            <a:endParaRPr lang="en-US" sz="900" dirty="0"/>
+            <a:endParaRPr lang="ja-JP" sz="900" noProof="0" dirty="0"/>
           </a:p>
         </p:txBody>
       </p:sp>
@@ -3766,6 +3631,7 @@
         <a:solidFill>
           <a:srgbClr val="FFFFFF"/>
         </a:solidFill>
+        <a:effectLst/>
       </p:bgPr>
     </p:bg>
     <p:spTree>
@@ -3801,6 +3667,13 @@
           </a:solidFill>
           <a:ln/>
         </p:spPr>
+        <p:txBody>
+          <a:bodyPr/>
+          <a:lstStyle/>
+          <a:p>
+            <a:endParaRPr lang="ja-JP" noProof="0" dirty="0"/>
+          </a:p>
+        </p:txBody>
       </p:sp>
       <p:sp>
         <p:nvSpPr>
@@ -3823,11 +3696,11 @@
           <a:bodyPr wrap="square" rtlCol="0" anchor="ctr"/>
           <a:lstStyle/>
           <a:p>
-            <a:pPr indent="0" marL="0">
-              <a:buNone/>
-            </a:pPr>
-            <a:r>
-              <a:rPr lang="en-US" sz="2300" b="1" dirty="0">
+            <a:pPr marL="0" indent="0">
+              <a:buNone/>
+            </a:pPr>
+            <a:r>
+              <a:rPr lang="ja-JP" sz="2300" b="1" noProof="0" dirty="0">
                 <a:solidFill>
                   <a:srgbClr val="FFFFFF"/>
                 </a:solidFill>
@@ -3837,20 +3710,20 @@
               </a:rPr>
               <a:t>06  外観設定</a:t>
             </a:r>
-            <a:endParaRPr lang="en-US" sz="2300" dirty="0"/>
+            <a:endParaRPr lang="ja-JP" sz="2300" noProof="0" dirty="0"/>
           </a:p>
         </p:txBody>
       </p:sp>
       <p:pic>
         <p:nvPicPr>
-          <p:cNvPr id="4" name="Image 0" descr="preencoded.png">    </p:cNvPr>
+          <p:cNvPr id="4" name="Image 0" descr="preencoded.png"/>
           <p:cNvPicPr>
             <a:picLocks noChangeAspect="1"/>
           </p:cNvPicPr>
           <p:nvPr/>
         </p:nvPicPr>
         <p:blipFill>
-          <a:blip r:embed="rId1"/>
+          <a:blip r:embed="rId3"/>
           <a:stretch>
             <a:fillRect/>
           </a:stretch>
@@ -3864,7 +3737,7 @@
             <a:avLst/>
           </a:prstGeom>
           <a:effectLst>
-            <a:outerShdw sx="100000" sy="100000" kx="0" ky="0" algn="bl" rotWithShape="0" blurRad="76200" dist="38100" dir="8100000">
+            <a:outerShdw blurRad="76200" dist="38100" dir="8100000" algn="bl" rotWithShape="0">
               <a:srgbClr val="1E40AF">
                 <a:alpha val="10000"/>
               </a:srgbClr>
@@ -3893,18 +3766,18 @@
           <a:bodyPr wrap="square" rtlCol="0" anchor="ctr"/>
           <a:lstStyle/>
           <a:p>
-            <a:pPr algn="ctr" indent="0" marL="0">
-              <a:buNone/>
-            </a:pPr>
-            <a:r>
-              <a:rPr lang="en-US" sz="950" i="1" dirty="0">
+            <a:pPr marL="0" indent="0" algn="ctr">
+              <a:buNone/>
+            </a:pPr>
+            <a:r>
+              <a:rPr lang="ja-JP" sz="950" i="1" noProof="0" dirty="0">
                 <a:solidFill>
                   <a:srgbClr val="64748B"/>
                 </a:solidFill>
               </a:rPr>
               <a:t>「外観」タブ — 実際の画面</a:t>
             </a:r>
-            <a:endParaRPr lang="en-US" sz="950" dirty="0"/>
+            <a:endParaRPr lang="ja-JP" sz="950" noProof="0" dirty="0"/>
           </a:p>
         </p:txBody>
       </p:sp>
@@ -3927,6 +3800,13 @@
           </a:solidFill>
           <a:ln/>
         </p:spPr>
+        <p:txBody>
+          <a:bodyPr/>
+          <a:lstStyle/>
+          <a:p>
+            <a:endParaRPr lang="ja-JP" noProof="0" dirty="0"/>
+          </a:p>
+        </p:txBody>
       </p:sp>
       <p:sp>
         <p:nvSpPr>
@@ -3949,18 +3829,18 @@
           <a:bodyPr wrap="square" rtlCol="0" anchor="ctr"/>
           <a:lstStyle/>
           <a:p>
-            <a:pPr algn="ctr" indent="0" marL="0">
-              <a:buNone/>
-            </a:pPr>
-            <a:r>
-              <a:rPr lang="en-US" sz="950" b="1" dirty="0">
+            <a:pPr marL="0" indent="0" algn="ctr">
+              <a:buNone/>
+            </a:pPr>
+            <a:r>
+              <a:rPr lang="ja-JP" sz="950" b="1" noProof="0" dirty="0">
                 <a:solidFill>
                   <a:srgbClr val="FFFFFF"/>
                 </a:solidFill>
               </a:rPr>
               <a:t>フォント</a:t>
             </a:r>
-            <a:endParaRPr lang="en-US" sz="950" dirty="0"/>
+            <a:endParaRPr lang="ja-JP" sz="950" noProof="0" dirty="0"/>
           </a:p>
         </p:txBody>
       </p:sp>
@@ -3985,18 +3865,18 @@
           <a:bodyPr wrap="square" rtlCol="0" anchor="ctr"/>
           <a:lstStyle/>
           <a:p>
-            <a:pPr indent="0" marL="0">
-              <a:buNone/>
-            </a:pPr>
-            <a:r>
-              <a:rPr lang="en-US" sz="1050" dirty="0">
+            <a:pPr marL="0" indent="0">
+              <a:buNone/>
+            </a:pPr>
+            <a:r>
+              <a:rPr lang="ja-JP" sz="1050" noProof="0" dirty="0">
                 <a:solidFill>
                   <a:srgbClr val="1E293B"/>
                 </a:solidFill>
               </a:rPr>
               <a:t>コード表示フォント（等幅推奨：Courier New）</a:t>
             </a:r>
-            <a:endParaRPr lang="en-US" sz="1050" dirty="0"/>
+            <a:endParaRPr lang="ja-JP" sz="1050" noProof="0" dirty="0"/>
           </a:p>
         </p:txBody>
       </p:sp>
@@ -4019,6 +3899,13 @@
           </a:solidFill>
           <a:ln/>
         </p:spPr>
+        <p:txBody>
+          <a:bodyPr/>
+          <a:lstStyle/>
+          <a:p>
+            <a:endParaRPr lang="ja-JP" noProof="0" dirty="0"/>
+          </a:p>
+        </p:txBody>
       </p:sp>
       <p:sp>
         <p:nvSpPr>
@@ -4041,18 +3928,18 @@
           <a:bodyPr wrap="square" rtlCol="0" anchor="ctr"/>
           <a:lstStyle/>
           <a:p>
-            <a:pPr algn="ctr" indent="0" marL="0">
-              <a:buNone/>
-            </a:pPr>
-            <a:r>
-              <a:rPr lang="en-US" sz="950" b="1" dirty="0">
+            <a:pPr marL="0" indent="0" algn="ctr">
+              <a:buNone/>
+            </a:pPr>
+            <a:r>
+              <a:rPr lang="ja-JP" sz="950" b="1" noProof="0" dirty="0">
                 <a:solidFill>
                   <a:srgbClr val="FFFFFF"/>
                 </a:solidFill>
               </a:rPr>
               <a:t>サイズ</a:t>
             </a:r>
-            <a:endParaRPr lang="en-US" sz="950" dirty="0"/>
+            <a:endParaRPr lang="ja-JP" sz="950" noProof="0" dirty="0"/>
           </a:p>
         </p:txBody>
       </p:sp>
@@ -4077,18 +3964,18 @@
           <a:bodyPr wrap="square" rtlCol="0" anchor="ctr"/>
           <a:lstStyle/>
           <a:p>
-            <a:pPr indent="0" marL="0">
-              <a:buNone/>
-            </a:pPr>
-            <a:r>
-              <a:rPr lang="en-US" sz="1050" dirty="0">
+            <a:pPr marL="0" indent="0">
+              <a:buNone/>
+            </a:pPr>
+            <a:r>
+              <a:rPr lang="ja-JP" sz="1050" noProof="0" dirty="0">
                 <a:solidFill>
                   <a:srgbClr val="1E293B"/>
                 </a:solidFill>
               </a:rPr>
               <a:t>文字サイズ（デフォルト 72pt）。投影時に明確に見えるよう調整</a:t>
             </a:r>
-            <a:endParaRPr lang="en-US" sz="1050" dirty="0"/>
+            <a:endParaRPr lang="ja-JP" sz="1050" noProof="0" dirty="0"/>
           </a:p>
         </p:txBody>
       </p:sp>
@@ -4111,6 +3998,13 @@
           </a:solidFill>
           <a:ln/>
         </p:spPr>
+        <p:txBody>
+          <a:bodyPr/>
+          <a:lstStyle/>
+          <a:p>
+            <a:endParaRPr lang="ja-JP" noProof="0" dirty="0"/>
+          </a:p>
+        </p:txBody>
       </p:sp>
       <p:sp>
         <p:nvSpPr>
@@ -4133,18 +4027,18 @@
           <a:bodyPr wrap="square" rtlCol="0" anchor="ctr"/>
           <a:lstStyle/>
           <a:p>
-            <a:pPr algn="ctr" indent="0" marL="0">
-              <a:buNone/>
-            </a:pPr>
-            <a:r>
-              <a:rPr lang="en-US" sz="950" b="1" dirty="0">
+            <a:pPr marL="0" indent="0" algn="ctr">
+              <a:buNone/>
+            </a:pPr>
+            <a:r>
+              <a:rPr lang="ja-JP" sz="950" b="1" noProof="0" dirty="0">
                 <a:solidFill>
                   <a:srgbClr val="FFFFFF"/>
                 </a:solidFill>
               </a:rPr>
               <a:t>文字色</a:t>
             </a:r>
-            <a:endParaRPr lang="en-US" sz="950" dirty="0"/>
+            <a:endParaRPr lang="ja-JP" sz="950" noProof="0" dirty="0"/>
           </a:p>
         </p:txBody>
       </p:sp>
@@ -4169,18 +4063,18 @@
           <a:bodyPr wrap="square" rtlCol="0" anchor="ctr"/>
           <a:lstStyle/>
           <a:p>
-            <a:pPr indent="0" marL="0">
-              <a:buNone/>
-            </a:pPr>
-            <a:r>
-              <a:rPr lang="en-US" sz="1050" dirty="0">
+            <a:pPr marL="0" indent="0">
+              <a:buNone/>
+            </a:pPr>
+            <a:r>
+              <a:rPr lang="ja-JP" sz="1050" noProof="0" dirty="0">
                 <a:solidFill>
                   <a:srgbClr val="1E293B"/>
                 </a:solidFill>
               </a:rPr>
               <a:t>コードの文字色（デフォルト：明緑 #00ff7f）</a:t>
             </a:r>
-            <a:endParaRPr lang="en-US" sz="1050" dirty="0"/>
+            <a:endParaRPr lang="ja-JP" sz="1050" noProof="0" dirty="0"/>
           </a:p>
         </p:txBody>
       </p:sp>
@@ -4203,6 +4097,13 @@
           </a:solidFill>
           <a:ln/>
         </p:spPr>
+        <p:txBody>
+          <a:bodyPr/>
+          <a:lstStyle/>
+          <a:p>
+            <a:endParaRPr lang="ja-JP" noProof="0" dirty="0"/>
+          </a:p>
+        </p:txBody>
       </p:sp>
       <p:sp>
         <p:nvSpPr>
@@ -4225,18 +4126,18 @@
           <a:bodyPr wrap="square" rtlCol="0" anchor="ctr"/>
           <a:lstStyle/>
           <a:p>
-            <a:pPr algn="ctr" indent="0" marL="0">
-              <a:buNone/>
-            </a:pPr>
-            <a:r>
-              <a:rPr lang="en-US" sz="950" b="1" dirty="0">
+            <a:pPr marL="0" indent="0" algn="ctr">
+              <a:buNone/>
+            </a:pPr>
+            <a:r>
+              <a:rPr lang="ja-JP" sz="950" b="1" noProof="0" dirty="0">
                 <a:solidFill>
                   <a:srgbClr val="FFFFFF"/>
                 </a:solidFill>
               </a:rPr>
               <a:t>背景色 / 枠色</a:t>
             </a:r>
-            <a:endParaRPr lang="en-US" sz="950" dirty="0"/>
+            <a:endParaRPr lang="ja-JP" sz="950" noProof="0" dirty="0"/>
           </a:p>
         </p:txBody>
       </p:sp>
@@ -4261,18 +4162,18 @@
           <a:bodyPr wrap="square" rtlCol="0" anchor="ctr"/>
           <a:lstStyle/>
           <a:p>
-            <a:pPr indent="0" marL="0">
-              <a:buNone/>
-            </a:pPr>
-            <a:r>
-              <a:rPr lang="en-US" sz="1050" dirty="0">
+            <a:pPr marL="0" indent="0">
+              <a:buNone/>
+            </a:pPr>
+            <a:r>
+              <a:rPr lang="ja-JP" sz="1050" noProof="0" dirty="0">
                 <a:solidFill>
                   <a:srgbClr val="1E293B"/>
                 </a:solidFill>
               </a:rPr>
               <a:t>ウィンドウの背景・枠線の色を変更できます</a:t>
             </a:r>
-            <a:endParaRPr lang="en-US" sz="1050" dirty="0"/>
+            <a:endParaRPr lang="ja-JP" sz="1050" noProof="0" dirty="0"/>
           </a:p>
         </p:txBody>
       </p:sp>
@@ -4295,6 +4196,13 @@
           </a:solidFill>
           <a:ln/>
         </p:spPr>
+        <p:txBody>
+          <a:bodyPr/>
+          <a:lstStyle/>
+          <a:p>
+            <a:endParaRPr lang="ja-JP" noProof="0" dirty="0"/>
+          </a:p>
+        </p:txBody>
       </p:sp>
       <p:sp>
         <p:nvSpPr>
@@ -4317,18 +4225,18 @@
           <a:bodyPr wrap="square" rtlCol="0" anchor="ctr"/>
           <a:lstStyle/>
           <a:p>
-            <a:pPr algn="ctr" indent="0" marL="0">
-              <a:buNone/>
-            </a:pPr>
-            <a:r>
-              <a:rPr lang="en-US" sz="950" b="1" dirty="0">
+            <a:pPr marL="0" indent="0" algn="ctr">
+              <a:buNone/>
+            </a:pPr>
+            <a:r>
+              <a:rPr lang="ja-JP" sz="950" b="1" noProof="0" dirty="0">
                 <a:solidFill>
                   <a:srgbClr val="FFFFFF"/>
                 </a:solidFill>
               </a:rPr>
               <a:t>科目名フォント</a:t>
             </a:r>
-            <a:endParaRPr lang="en-US" sz="950" dirty="0"/>
+            <a:endParaRPr lang="ja-JP" sz="950" noProof="0" dirty="0"/>
           </a:p>
         </p:txBody>
       </p:sp>
@@ -4353,18 +4261,18 @@
           <a:bodyPr wrap="square" rtlCol="0" anchor="ctr"/>
           <a:lstStyle/>
           <a:p>
-            <a:pPr indent="0" marL="0">
-              <a:buNone/>
-            </a:pPr>
-            <a:r>
-              <a:rPr lang="en-US" sz="1050" dirty="0">
+            <a:pPr marL="0" indent="0">
+              <a:buNone/>
+            </a:pPr>
+            <a:r>
+              <a:rPr lang="ja-JP" sz="1050" noProof="0" dirty="0">
                 <a:solidFill>
                   <a:srgbClr val="1E293B"/>
                 </a:solidFill>
               </a:rPr>
               <a:t>授業名の表示フォントとサイズ（デフォルト 11pt）</a:t>
             </a:r>
-            <a:endParaRPr lang="en-US" sz="1050" dirty="0"/>
+            <a:endParaRPr lang="ja-JP" sz="1050" noProof="0" dirty="0"/>
           </a:p>
         </p:txBody>
       </p:sp>
@@ -4387,6 +4295,13 @@
           </a:solidFill>
           <a:ln/>
         </p:spPr>
+        <p:txBody>
+          <a:bodyPr/>
+          <a:lstStyle/>
+          <a:p>
+            <a:endParaRPr lang="ja-JP" noProof="0" dirty="0"/>
+          </a:p>
+        </p:txBody>
       </p:sp>
       <p:sp>
         <p:nvSpPr>
@@ -4409,18 +4324,18 @@
           <a:bodyPr wrap="square" rtlCol="0" anchor="ctr"/>
           <a:lstStyle/>
           <a:p>
-            <a:pPr algn="ctr" indent="0" marL="0">
-              <a:buNone/>
-            </a:pPr>
-            <a:r>
-              <a:rPr lang="en-US" sz="950" b="1" dirty="0">
+            <a:pPr marL="0" indent="0" algn="ctr">
+              <a:buNone/>
+            </a:pPr>
+            <a:r>
+              <a:rPr lang="ja-JP" sz="950" b="1" noProof="0" dirty="0">
                 <a:solidFill>
                   <a:srgbClr val="FFFFFF"/>
                 </a:solidFill>
               </a:rPr>
               <a:t>スケール</a:t>
             </a:r>
-            <a:endParaRPr lang="en-US" sz="950" dirty="0"/>
+            <a:endParaRPr lang="ja-JP" sz="950" noProof="0" dirty="0"/>
           </a:p>
         </p:txBody>
       </p:sp>
@@ -4445,18 +4360,18 @@
           <a:bodyPr wrap="square" rtlCol="0" anchor="ctr"/>
           <a:lstStyle/>
           <a:p>
-            <a:pPr indent="0" marL="0">
-              <a:buNone/>
-            </a:pPr>
-            <a:r>
-              <a:rPr lang="en-US" sz="1050" dirty="0">
+            <a:pPr marL="0" indent="0">
+              <a:buNone/>
+            </a:pPr>
+            <a:r>
+              <a:rPr lang="ja-JP" sz="1050" noProof="0" dirty="0">
                 <a:solidFill>
                   <a:srgbClr val="1E293B"/>
                 </a:solidFill>
               </a:rPr>
               <a:t>ウィンドウ全体の拡大縮小（30%〜300%、デフォルト 100%）</a:t>
             </a:r>
-            <a:endParaRPr lang="en-US" sz="1050" dirty="0"/>
+            <a:endParaRPr lang="ja-JP" sz="1050" noProof="0" dirty="0"/>
           </a:p>
         </p:txBody>
       </p:sp>
@@ -4479,6 +4394,13 @@
           </a:solidFill>
           <a:ln/>
         </p:spPr>
+        <p:txBody>
+          <a:bodyPr/>
+          <a:lstStyle/>
+          <a:p>
+            <a:endParaRPr lang="ja-JP" noProof="0" dirty="0"/>
+          </a:p>
+        </p:txBody>
       </p:sp>
       <p:sp>
         <p:nvSpPr>
@@ -4501,18 +4423,18 @@
           <a:bodyPr wrap="square" rtlCol="0" anchor="ctr"/>
           <a:lstStyle/>
           <a:p>
-            <a:pPr indent="0" marL="0">
-              <a:buNone/>
-            </a:pPr>
-            <a:r>
-              <a:rPr lang="en-US" sz="900" dirty="0">
+            <a:pPr marL="0" indent="0">
+              <a:buNone/>
+            </a:pPr>
+            <a:r>
+              <a:rPr lang="ja-JP" sz="900" noProof="0" dirty="0">
                 <a:solidFill>
                   <a:srgbClr val="BFDBFE"/>
                 </a:solidFill>
               </a:rPr>
               <a:t>CodeWidget  ユーザーマニュアル</a:t>
             </a:r>
-            <a:endParaRPr lang="en-US" sz="900" dirty="0"/>
+            <a:endParaRPr lang="ja-JP" sz="900" noProof="0" dirty="0"/>
           </a:p>
         </p:txBody>
       </p:sp>
@@ -4537,18 +4459,18 @@
           <a:bodyPr wrap="square" rtlCol="0" anchor="ctr"/>
           <a:lstStyle/>
           <a:p>
-            <a:pPr algn="r" indent="0" marL="0">
-              <a:buNone/>
-            </a:pPr>
-            <a:r>
-              <a:rPr lang="en-US" sz="900" dirty="0">
+            <a:pPr marL="0" indent="0" algn="r">
+              <a:buNone/>
+            </a:pPr>
+            <a:r>
+              <a:rPr lang="ja-JP" sz="900" noProof="0" dirty="0">
                 <a:solidFill>
                   <a:srgbClr val="BFDBFE"/>
                 </a:solidFill>
               </a:rPr>
               <a:t>11</a:t>
             </a:r>
-            <a:endParaRPr lang="en-US" sz="900" dirty="0"/>
+            <a:endParaRPr lang="ja-JP" sz="900" noProof="0" dirty="0"/>
           </a:p>
         </p:txBody>
       </p:sp>
@@ -4568,6 +4490,7 @@
         <a:solidFill>
           <a:srgbClr val="FFFFFF"/>
         </a:solidFill>
+        <a:effectLst/>
       </p:bgPr>
     </p:bg>
     <p:spTree>
@@ -4603,6 +4526,13 @@
           </a:solidFill>
           <a:ln/>
         </p:spPr>
+        <p:txBody>
+          <a:bodyPr/>
+          <a:lstStyle/>
+          <a:p>
+            <a:endParaRPr lang="ja-JP" noProof="0" dirty="0"/>
+          </a:p>
+        </p:txBody>
       </p:sp>
       <p:sp>
         <p:nvSpPr>
@@ -4625,11 +4555,11 @@
           <a:bodyPr wrap="square" rtlCol="0" anchor="ctr"/>
           <a:lstStyle/>
           <a:p>
-            <a:pPr indent="0" marL="0">
-              <a:buNone/>
-            </a:pPr>
-            <a:r>
-              <a:rPr lang="en-US" sz="2300" b="1" dirty="0">
+            <a:pPr marL="0" indent="0">
+              <a:buNone/>
+            </a:pPr>
+            <a:r>
+              <a:rPr lang="ja-JP" sz="2300" b="1" noProof="0" dirty="0">
                 <a:solidFill>
                   <a:srgbClr val="FFFFFF"/>
                 </a:solidFill>
@@ -4639,7 +4569,7 @@
               </a:rPr>
               <a:t>07  よくある質問（FAQ）</a:t>
             </a:r>
-            <a:endParaRPr lang="en-US" sz="2300" dirty="0"/>
+            <a:endParaRPr lang="ja-JP" sz="2300" noProof="0" dirty="0"/>
           </a:p>
         </p:txBody>
       </p:sp>
@@ -4662,13 +4592,20 @@
           </a:solidFill>
           <a:ln/>
           <a:effectLst>
-            <a:outerShdw sx="100000" sy="100000" kx="0" ky="0" algn="bl" rotWithShape="0" blurRad="76200" dist="38100" dir="8100000">
+            <a:outerShdw blurRad="76200" dist="38100" dir="8100000" algn="bl" rotWithShape="0">
               <a:srgbClr val="1E40AF">
                 <a:alpha val="10000"/>
               </a:srgbClr>
             </a:outerShdw>
           </a:effectLst>
         </p:spPr>
+        <p:txBody>
+          <a:bodyPr/>
+          <a:lstStyle/>
+          <a:p>
+            <a:endParaRPr lang="ja-JP" noProof="0" dirty="0"/>
+          </a:p>
+        </p:txBody>
       </p:sp>
       <p:sp>
         <p:nvSpPr>
@@ -4689,6 +4626,13 @@
           </a:solidFill>
           <a:ln/>
         </p:spPr>
+        <p:txBody>
+          <a:bodyPr/>
+          <a:lstStyle/>
+          <a:p>
+            <a:endParaRPr lang="ja-JP" noProof="0" dirty="0"/>
+          </a:p>
+        </p:txBody>
       </p:sp>
       <p:sp>
         <p:nvSpPr>
@@ -4711,18 +4655,18 @@
           <a:bodyPr wrap="square" rtlCol="0" anchor="ctr"/>
           <a:lstStyle/>
           <a:p>
-            <a:pPr indent="0" marL="0">
-              <a:buNone/>
-            </a:pPr>
-            <a:r>
-              <a:rPr lang="en-US" sz="1200" b="1" dirty="0">
+            <a:pPr marL="0" indent="0">
+              <a:buNone/>
+            </a:pPr>
+            <a:r>
+              <a:rPr lang="ja-JP" sz="1200" b="1" noProof="0" dirty="0">
                 <a:solidFill>
                   <a:srgbClr val="1E40AF"/>
                 </a:solidFill>
               </a:rPr>
               <a:t>Q：出席コードウィンドウが自動表示されません。</a:t>
             </a:r>
-            <a:endParaRPr lang="en-US" sz="1200" dirty="0"/>
+            <a:endParaRPr lang="ja-JP" sz="1200" noProof="0" dirty="0"/>
           </a:p>
         </p:txBody>
       </p:sp>
@@ -4747,18 +4691,18 @@
           <a:bodyPr wrap="square" rtlCol="0" anchor="ctr"/>
           <a:lstStyle/>
           <a:p>
-            <a:pPr indent="0" marL="0">
-              <a:buNone/>
-            </a:pPr>
-            <a:r>
-              <a:rPr lang="en-US" sz="1100" dirty="0">
+            <a:pPr marL="0" indent="0">
+              <a:buNone/>
+            </a:pPr>
+            <a:r>
+              <a:rPr lang="ja-JP" sz="1100" noProof="0" dirty="0">
                 <a:solidFill>
                   <a:srgbClr val="1E293B"/>
                 </a:solidFill>
               </a:rPr>
               <a:t>A：確認ポイント：① 現在時刻が表示ウィンドウ期間内か（授業開始 10 分前〜授業開始 30 分後）；② teacher_config.json の曜日・時限が正しいか；③ school_config.json に該当週の授業日が登録されているか。</a:t>
             </a:r>
-            <a:endParaRPr lang="en-US" sz="1100" dirty="0"/>
+            <a:endParaRPr lang="ja-JP" sz="1100" noProof="0" dirty="0"/>
           </a:p>
         </p:txBody>
       </p:sp>
@@ -4781,13 +4725,20 @@
           </a:solidFill>
           <a:ln/>
           <a:effectLst>
-            <a:outerShdw sx="100000" sy="100000" kx="0" ky="0" algn="bl" rotWithShape="0" blurRad="76200" dist="38100" dir="8100000">
+            <a:outerShdw blurRad="76200" dist="38100" dir="8100000" algn="bl" rotWithShape="0">
               <a:srgbClr val="1E40AF">
                 <a:alpha val="10000"/>
               </a:srgbClr>
             </a:outerShdw>
           </a:effectLst>
         </p:spPr>
+        <p:txBody>
+          <a:bodyPr/>
+          <a:lstStyle/>
+          <a:p>
+            <a:endParaRPr lang="ja-JP" noProof="0" dirty="0"/>
+          </a:p>
+        </p:txBody>
       </p:sp>
       <p:sp>
         <p:nvSpPr>
@@ -4808,6 +4759,13 @@
           </a:solidFill>
           <a:ln/>
         </p:spPr>
+        <p:txBody>
+          <a:bodyPr/>
+          <a:lstStyle/>
+          <a:p>
+            <a:endParaRPr lang="ja-JP" noProof="0" dirty="0"/>
+          </a:p>
+        </p:txBody>
       </p:sp>
       <p:sp>
         <p:nvSpPr>
@@ -4830,18 +4788,18 @@
           <a:bodyPr wrap="square" rtlCol="0" anchor="ctr"/>
           <a:lstStyle/>
           <a:p>
-            <a:pPr indent="0" marL="0">
-              <a:buNone/>
-            </a:pPr>
-            <a:r>
-              <a:rPr lang="en-US" sz="1200" b="1" dirty="0">
+            <a:pPr marL="0" indent="0">
+              <a:buNone/>
+            </a:pPr>
+            <a:r>
+              <a:rPr lang="ja-JP" sz="1200" b="1" noProof="0" dirty="0">
                 <a:solidFill>
                   <a:srgbClr val="1E40AF"/>
                 </a:solidFill>
               </a:rPr>
               <a:t>Q：起動したのにアプリが見当たりません。</a:t>
             </a:r>
-            <a:endParaRPr lang="en-US" sz="1200" dirty="0"/>
+            <a:endParaRPr lang="ja-JP" sz="1200" noProof="0" dirty="0"/>
           </a:p>
         </p:txBody>
       </p:sp>
@@ -4866,18 +4824,18 @@
           <a:bodyPr wrap="square" rtlCol="0" anchor="ctr"/>
           <a:lstStyle/>
           <a:p>
-            <a:pPr indent="0" marL="0">
-              <a:buNone/>
-            </a:pPr>
-            <a:r>
-              <a:rPr lang="en-US" sz="1100" dirty="0">
+            <a:pPr marL="0" indent="0">
+              <a:buNone/>
+            </a:pPr>
+            <a:r>
+              <a:rPr lang="ja-JP" sz="1100" noProof="0" dirty="0">
                 <a:solidFill>
                   <a:srgbClr val="1E293B"/>
                 </a:solidFill>
               </a:rPr>
               <a:t>A：アプリはトレイのみで動作します（メインウィンドウなし）。Windows はタスクバー右下の通知領域、macOS は画面右上のメニューバーにアイコンが表示されます。</a:t>
             </a:r>
-            <a:endParaRPr lang="en-US" sz="1100" dirty="0"/>
+            <a:endParaRPr lang="ja-JP" sz="1100" noProof="0" dirty="0"/>
           </a:p>
         </p:txBody>
       </p:sp>
@@ -4900,13 +4858,20 @@
           </a:solidFill>
           <a:ln/>
           <a:effectLst>
-            <a:outerShdw sx="100000" sy="100000" kx="0" ky="0" algn="bl" rotWithShape="0" blurRad="76200" dist="38100" dir="8100000">
+            <a:outerShdw blurRad="76200" dist="38100" dir="8100000" algn="bl" rotWithShape="0">
               <a:srgbClr val="1E40AF">
                 <a:alpha val="10000"/>
               </a:srgbClr>
             </a:outerShdw>
           </a:effectLst>
         </p:spPr>
+        <p:txBody>
+          <a:bodyPr/>
+          <a:lstStyle/>
+          <a:p>
+            <a:endParaRPr lang="ja-JP" noProof="0" dirty="0"/>
+          </a:p>
+        </p:txBody>
       </p:sp>
       <p:sp>
         <p:nvSpPr>
@@ -4927,6 +4892,13 @@
           </a:solidFill>
           <a:ln/>
         </p:spPr>
+        <p:txBody>
+          <a:bodyPr/>
+          <a:lstStyle/>
+          <a:p>
+            <a:endParaRPr lang="ja-JP" noProof="0" dirty="0"/>
+          </a:p>
+        </p:txBody>
       </p:sp>
       <p:sp>
         <p:nvSpPr>
@@ -4949,18 +4921,18 @@
           <a:bodyPr wrap="square" rtlCol="0" anchor="ctr"/>
           <a:lstStyle/>
           <a:p>
-            <a:pPr indent="0" marL="0">
-              <a:buNone/>
-            </a:pPr>
-            <a:r>
-              <a:rPr lang="en-US" sz="1200" b="1" dirty="0">
+            <a:pPr marL="0" indent="0">
+              <a:buNone/>
+            </a:pPr>
+            <a:r>
+              <a:rPr lang="ja-JP" sz="1200" b="1" noProof="0" dirty="0">
                 <a:solidFill>
                   <a:srgbClr val="1E40AF"/>
                 </a:solidFill>
               </a:rPr>
               <a:t>Q：別の教員の設定ファイルに切り替えるには？</a:t>
             </a:r>
-            <a:endParaRPr lang="en-US" sz="1200" dirty="0"/>
+            <a:endParaRPr lang="ja-JP" sz="1200" noProof="0" dirty="0"/>
           </a:p>
         </p:txBody>
       </p:sp>
@@ -4985,18 +4957,18 @@
           <a:bodyPr wrap="square" rtlCol="0" anchor="ctr"/>
           <a:lstStyle/>
           <a:p>
-            <a:pPr indent="0" marL="0">
-              <a:buNone/>
-            </a:pPr>
-            <a:r>
-              <a:rPr lang="en-US" sz="1100" dirty="0">
+            <a:pPr marL="0" indent="0">
+              <a:buNone/>
+            </a:pPr>
+            <a:r>
+              <a:rPr lang="ja-JP" sz="1100" noProof="0" dirty="0">
                 <a:solidFill>
                   <a:srgbClr val="1E293B"/>
                 </a:solidFill>
               </a:rPr>
               <a:t>A：設定 →「授業」タブ →「設定を読み込む」ボタン → 対象の JSON ファイルを選択して切り替えます。</a:t>
             </a:r>
-            <a:endParaRPr lang="en-US" sz="1100" dirty="0"/>
+            <a:endParaRPr lang="ja-JP" sz="1100" noProof="0" dirty="0"/>
           </a:p>
         </p:txBody>
       </p:sp>
@@ -5019,13 +4991,20 @@
           </a:solidFill>
           <a:ln/>
           <a:effectLst>
-            <a:outerShdw sx="100000" sy="100000" kx="0" ky="0" algn="bl" rotWithShape="0" blurRad="76200" dist="38100" dir="8100000">
+            <a:outerShdw blurRad="76200" dist="38100" dir="8100000" algn="bl" rotWithShape="0">
               <a:srgbClr val="1E40AF">
                 <a:alpha val="10000"/>
               </a:srgbClr>
             </a:outerShdw>
           </a:effectLst>
         </p:spPr>
+        <p:txBody>
+          <a:bodyPr/>
+          <a:lstStyle/>
+          <a:p>
+            <a:endParaRPr lang="ja-JP" noProof="0" dirty="0"/>
+          </a:p>
+        </p:txBody>
       </p:sp>
       <p:sp>
         <p:nvSpPr>
@@ -5046,6 +5025,13 @@
           </a:solidFill>
           <a:ln/>
         </p:spPr>
+        <p:txBody>
+          <a:bodyPr/>
+          <a:lstStyle/>
+          <a:p>
+            <a:endParaRPr lang="ja-JP" noProof="0" dirty="0"/>
+          </a:p>
+        </p:txBody>
       </p:sp>
       <p:sp>
         <p:nvSpPr>
@@ -5068,18 +5054,18 @@
           <a:bodyPr wrap="square" rtlCol="0" anchor="ctr"/>
           <a:lstStyle/>
           <a:p>
-            <a:pPr indent="0" marL="0">
-              <a:buNone/>
-            </a:pPr>
-            <a:r>
-              <a:rPr lang="en-US" sz="1200" b="1" dirty="0">
+            <a:pPr marL="0" indent="0">
+              <a:buNone/>
+            </a:pPr>
+            <a:r>
+              <a:rPr lang="ja-JP" sz="1200" b="1" noProof="0" dirty="0">
                 <a:solidFill>
                   <a:srgbClr val="1E40AF"/>
                 </a:solidFill>
               </a:rPr>
               <a:t>Q：振替後に出席コードがずれませんか？</a:t>
             </a:r>
-            <a:endParaRPr lang="en-US" sz="1200" dirty="0"/>
+            <a:endParaRPr lang="ja-JP" sz="1200" noProof="0" dirty="0"/>
           </a:p>
         </p:txBody>
       </p:sp>
@@ -5104,18 +5090,18 @@
           <a:bodyPr wrap="square" rtlCol="0" anchor="ctr"/>
           <a:lstStyle/>
           <a:p>
-            <a:pPr indent="0" marL="0">
-              <a:buNone/>
-            </a:pPr>
-            <a:r>
-              <a:rPr lang="en-US" sz="1100" dirty="0">
+            <a:pPr marL="0" indent="0">
+              <a:buNone/>
+            </a:pPr>
+            <a:r>
+              <a:rPr lang="ja-JP" sz="1100" noProof="0" dirty="0">
                 <a:solidFill>
                   <a:srgbClr val="1E293B"/>
                 </a:solidFill>
               </a:rPr>
               <a:t>A：コードは回次番号で管理されています。振替後は回次番号が自動再計算されますので、「日程プレビュー」で内容を確認してから運用してください。</a:t>
             </a:r>
-            <a:endParaRPr lang="en-US" sz="1100" dirty="0"/>
+            <a:endParaRPr lang="ja-JP" sz="1100" noProof="0" dirty="0"/>
           </a:p>
         </p:txBody>
       </p:sp>
@@ -5138,6 +5124,13 @@
           </a:solidFill>
           <a:ln/>
         </p:spPr>
+        <p:txBody>
+          <a:bodyPr/>
+          <a:lstStyle/>
+          <a:p>
+            <a:endParaRPr lang="ja-JP" noProof="0" dirty="0"/>
+          </a:p>
+        </p:txBody>
       </p:sp>
       <p:sp>
         <p:nvSpPr>
@@ -5160,18 +5153,18 @@
           <a:bodyPr wrap="square" rtlCol="0" anchor="ctr"/>
           <a:lstStyle/>
           <a:p>
-            <a:pPr indent="0" marL="0">
-              <a:buNone/>
-            </a:pPr>
-            <a:r>
-              <a:rPr lang="en-US" sz="900" dirty="0">
+            <a:pPr marL="0" indent="0">
+              <a:buNone/>
+            </a:pPr>
+            <a:r>
+              <a:rPr lang="ja-JP" sz="900" noProof="0" dirty="0">
                 <a:solidFill>
                   <a:srgbClr val="BFDBFE"/>
                 </a:solidFill>
               </a:rPr>
               <a:t>CodeWidget  ユーザーマニュアル</a:t>
             </a:r>
-            <a:endParaRPr lang="en-US" sz="900" dirty="0"/>
+            <a:endParaRPr lang="ja-JP" sz="900" noProof="0" dirty="0"/>
           </a:p>
         </p:txBody>
       </p:sp>
@@ -5196,18 +5189,18 @@
           <a:bodyPr wrap="square" rtlCol="0" anchor="ctr"/>
           <a:lstStyle/>
           <a:p>
-            <a:pPr algn="r" indent="0" marL="0">
-              <a:buNone/>
-            </a:pPr>
-            <a:r>
-              <a:rPr lang="en-US" sz="900" dirty="0">
+            <a:pPr marL="0" indent="0" algn="r">
+              <a:buNone/>
+            </a:pPr>
+            <a:r>
+              <a:rPr lang="ja-JP" sz="900" noProof="0" dirty="0">
                 <a:solidFill>
                   <a:srgbClr val="BFDBFE"/>
                 </a:solidFill>
               </a:rPr>
               <a:t>12</a:t>
             </a:r>
-            <a:endParaRPr lang="en-US" sz="900" dirty="0"/>
+            <a:endParaRPr lang="ja-JP" sz="900" noProof="0" dirty="0"/>
           </a:p>
         </p:txBody>
       </p:sp>
@@ -5227,6 +5220,7 @@
         <a:solidFill>
           <a:srgbClr val="F0F7FF"/>
         </a:solidFill>
+        <a:effectLst/>
       </p:bgPr>
     </p:bg>
     <p:spTree>
@@ -5262,6 +5256,13 @@
           </a:solidFill>
           <a:ln/>
         </p:spPr>
+        <p:txBody>
+          <a:bodyPr/>
+          <a:lstStyle/>
+          <a:p>
+            <a:endParaRPr lang="ja-JP" noProof="0" dirty="0"/>
+          </a:p>
+        </p:txBody>
       </p:sp>
       <p:sp>
         <p:nvSpPr>
@@ -5282,13 +5283,20 @@
           </a:solidFill>
           <a:ln/>
           <a:effectLst>
-            <a:outerShdw sx="100000" sy="100000" kx="0" ky="0" algn="bl" rotWithShape="0" blurRad="76200" dist="38100" dir="8100000">
+            <a:outerShdw blurRad="76200" dist="38100" dir="8100000" algn="bl" rotWithShape="0">
               <a:srgbClr val="1E40AF">
                 <a:alpha val="10000"/>
               </a:srgbClr>
             </a:outerShdw>
           </a:effectLst>
         </p:spPr>
+        <p:txBody>
+          <a:bodyPr/>
+          <a:lstStyle/>
+          <a:p>
+            <a:endParaRPr lang="ja-JP" noProof="0" dirty="0"/>
+          </a:p>
+        </p:txBody>
       </p:sp>
       <p:sp>
         <p:nvSpPr>
@@ -5309,6 +5317,13 @@
           </a:solidFill>
           <a:ln/>
         </p:spPr>
+        <p:txBody>
+          <a:bodyPr/>
+          <a:lstStyle/>
+          <a:p>
+            <a:endParaRPr lang="ja-JP" noProof="0" dirty="0"/>
+          </a:p>
+        </p:txBody>
       </p:sp>
       <p:sp>
         <p:nvSpPr>
@@ -5331,18 +5346,18 @@
           <a:bodyPr wrap="square" rtlCol="0" anchor="ctr"/>
           <a:lstStyle/>
           <a:p>
-            <a:pPr indent="0" marL="0">
-              <a:buNone/>
-            </a:pPr>
-            <a:r>
-              <a:rPr lang="en-US" sz="1400" b="1" dirty="0">
+            <a:pPr marL="0" indent="0">
+              <a:buNone/>
+            </a:pPr>
+            <a:r>
+              <a:rPr lang="ja-JP" sz="1400" b="1" noProof="0" dirty="0">
                 <a:solidFill>
                   <a:srgbClr val="FFFFFF"/>
                 </a:solidFill>
               </a:rPr>
               <a:t>クイックリファレンス</a:t>
             </a:r>
-            <a:endParaRPr lang="en-US" sz="1400" dirty="0"/>
+            <a:endParaRPr lang="ja-JP" sz="1400" noProof="0" dirty="0"/>
           </a:p>
         </p:txBody>
       </p:sp>
@@ -5368,6 +5383,13 @@
             <a:prstDash val="solid"/>
           </a:ln>
         </p:spPr>
+        <p:txBody>
+          <a:bodyPr/>
+          <a:lstStyle/>
+          <a:p>
+            <a:endParaRPr lang="ja-JP" noProof="0" dirty="0"/>
+          </a:p>
+        </p:txBody>
       </p:sp>
       <p:sp>
         <p:nvSpPr>
@@ -5390,18 +5412,13 @@
           <a:bodyPr wrap="square" rtlCol="0" anchor="ctr"/>
           <a:lstStyle/>
           <a:p>
-            <a:pPr indent="0" marL="0">
-              <a:buNone/>
-            </a:pPr>
-            <a:r>
-              <a:rPr lang="en-US" sz="1100" dirty="0">
-                <a:solidFill>
-                  <a:srgbClr val="64748B"/>
-                </a:solidFill>
-              </a:rPr>
+            <a:pPr marL="0" indent="0">
+              <a:buNone/>
+            </a:pPr>
+            <a:r>
+              <a:rPr lang="ja-JP" sz="1200" noProof="0" dirty="0"/>
               <a:t>ウィンドウ表示</a:t>
             </a:r>
-            <a:endParaRPr lang="en-US" sz="1100" dirty="0"/>
           </a:p>
         </p:txBody>
       </p:sp>
@@ -5413,31 +5430,31 @@
         </p:nvSpPr>
         <p:spPr>
           <a:xfrm>
-            <a:off x="2331720" y="923544"/>
-            <a:ext cx="1645920" cy="347472"/>
-          </a:xfrm>
-          <a:prstGeom prst="rect">
-            <a:avLst/>
-          </a:prstGeom>
-          <a:noFill/>
-          <a:ln/>
-        </p:spPr>
-        <p:txBody>
-          <a:bodyPr wrap="square" rtlCol="0" anchor="ctr"/>
-          <a:lstStyle/>
-          <a:p>
-            <a:pPr indent="0" marL="0">
-              <a:buNone/>
-            </a:pPr>
-            <a:r>
-              <a:rPr lang="en-US" sz="1100" b="1" dirty="0">
+            <a:off x="2255520" y="923544"/>
+            <a:ext cx="1892808" cy="347472"/>
+          </a:xfrm>
+          <a:prstGeom prst="rect">
+            <a:avLst/>
+          </a:prstGeom>
+          <a:noFill/>
+          <a:ln/>
+        </p:spPr>
+        <p:txBody>
+          <a:bodyPr wrap="square" rtlCol="0" anchor="ctr"/>
+          <a:lstStyle/>
+          <a:p>
+            <a:pPr marL="0" indent="0">
+              <a:buNone/>
+            </a:pPr>
+            <a:r>
+              <a:rPr lang="ja-JP" sz="1100" b="1" noProof="0" dirty="0">
                 <a:solidFill>
                   <a:srgbClr val="1E40AF"/>
                 </a:solidFill>
               </a:rPr>
               <a:t>授業開始 10 分前〜30 分後</a:t>
             </a:r>
-            <a:endParaRPr lang="en-US" sz="1100" dirty="0"/>
+            <a:endParaRPr lang="ja-JP" sz="1100" noProof="0" dirty="0"/>
           </a:p>
         </p:txBody>
       </p:sp>
@@ -5463,6 +5480,13 @@
             <a:prstDash val="solid"/>
           </a:ln>
         </p:spPr>
+        <p:txBody>
+          <a:bodyPr/>
+          <a:lstStyle/>
+          <a:p>
+            <a:endParaRPr lang="ja-JP" noProof="0" dirty="0"/>
+          </a:p>
+        </p:txBody>
       </p:sp>
       <p:sp>
         <p:nvSpPr>
@@ -5485,18 +5509,13 @@
           <a:bodyPr wrap="square" rtlCol="0" anchor="ctr"/>
           <a:lstStyle/>
           <a:p>
-            <a:pPr indent="0" marL="0">
-              <a:buNone/>
-            </a:pPr>
-            <a:r>
-              <a:rPr lang="en-US" sz="1100" dirty="0">
-                <a:solidFill>
-                  <a:srgbClr val="64748B"/>
-                </a:solidFill>
-              </a:rPr>
+            <a:pPr marL="0" indent="0">
+              <a:buNone/>
+            </a:pPr>
+            <a:r>
+              <a:rPr lang="ja-JP" sz="1200" noProof="0" dirty="0"/>
               <a:t>一時コード有効期限</a:t>
             </a:r>
-            <a:endParaRPr lang="en-US" sz="1100" dirty="0"/>
           </a:p>
         </p:txBody>
       </p:sp>
@@ -5508,7 +5527,7 @@
         </p:nvSpPr>
         <p:spPr>
           <a:xfrm>
-            <a:off x="2331720" y="1426464"/>
+            <a:off x="2255520" y="1426464"/>
             <a:ext cx="1645920" cy="347472"/>
           </a:xfrm>
           <a:prstGeom prst="rect">
@@ -5521,18 +5540,18 @@
           <a:bodyPr wrap="square" rtlCol="0" anchor="ctr"/>
           <a:lstStyle/>
           <a:p>
-            <a:pPr indent="0" marL="0">
-              <a:buNone/>
-            </a:pPr>
-            <a:r>
-              <a:rPr lang="en-US" sz="1100" b="1" dirty="0">
+            <a:pPr marL="0" indent="0">
+              <a:buNone/>
+            </a:pPr>
+            <a:r>
+              <a:rPr lang="ja-JP" sz="1100" b="1" noProof="0" dirty="0">
                 <a:solidFill>
                   <a:srgbClr val="1E40AF"/>
                 </a:solidFill>
               </a:rPr>
               <a:t>30 分</a:t>
             </a:r>
-            <a:endParaRPr lang="en-US" sz="1100" dirty="0"/>
+            <a:endParaRPr lang="ja-JP" sz="1100" noProof="0" dirty="0"/>
           </a:p>
         </p:txBody>
       </p:sp>
@@ -5558,6 +5577,13 @@
             <a:prstDash val="solid"/>
           </a:ln>
         </p:spPr>
+        <p:txBody>
+          <a:bodyPr/>
+          <a:lstStyle/>
+          <a:p>
+            <a:endParaRPr lang="ja-JP" noProof="0" dirty="0"/>
+          </a:p>
+        </p:txBody>
       </p:sp>
       <p:sp>
         <p:nvSpPr>
@@ -5580,18 +5606,13 @@
           <a:bodyPr wrap="square" rtlCol="0" anchor="ctr"/>
           <a:lstStyle/>
           <a:p>
-            <a:pPr indent="0" marL="0">
-              <a:buNone/>
-            </a:pPr>
-            <a:r>
-              <a:rPr lang="en-US" sz="1100" dirty="0">
-                <a:solidFill>
-                  <a:srgbClr val="64748B"/>
-                </a:solidFill>
-              </a:rPr>
+            <a:pPr marL="0" indent="0">
+              <a:buNone/>
+            </a:pPr>
+            <a:r>
+              <a:rPr lang="ja-JP" sz="1200" noProof="0" dirty="0"/>
               <a:t>コード形式</a:t>
             </a:r>
-            <a:endParaRPr lang="en-US" sz="1100" dirty="0"/>
           </a:p>
         </p:txBody>
       </p:sp>
@@ -5603,7 +5624,7 @@
         </p:nvSpPr>
         <p:spPr>
           <a:xfrm>
-            <a:off x="2331720" y="1929384"/>
+            <a:off x="2255520" y="1929384"/>
             <a:ext cx="1645920" cy="347472"/>
           </a:xfrm>
           <a:prstGeom prst="rect">
@@ -5616,18 +5637,18 @@
           <a:bodyPr wrap="square" rtlCol="0" anchor="ctr"/>
           <a:lstStyle/>
           <a:p>
-            <a:pPr indent="0" marL="0">
-              <a:buNone/>
-            </a:pPr>
-            <a:r>
-              <a:rPr lang="en-US" sz="1100" b="1" dirty="0">
+            <a:pPr marL="0" indent="0">
+              <a:buNone/>
+            </a:pPr>
+            <a:r>
+              <a:rPr lang="ja-JP" sz="1100" b="1" noProof="0" dirty="0">
                 <a:solidFill>
                   <a:srgbClr val="1E40AF"/>
                 </a:solidFill>
               </a:rPr>
               <a:t>4 桁の数字</a:t>
             </a:r>
-            <a:endParaRPr lang="en-US" sz="1100" dirty="0"/>
+            <a:endParaRPr lang="ja-JP" sz="1100" noProof="0" dirty="0"/>
           </a:p>
         </p:txBody>
       </p:sp>
@@ -5653,6 +5674,13 @@
             <a:prstDash val="solid"/>
           </a:ln>
         </p:spPr>
+        <p:txBody>
+          <a:bodyPr/>
+          <a:lstStyle/>
+          <a:p>
+            <a:endParaRPr lang="ja-JP" noProof="0" dirty="0"/>
+          </a:p>
+        </p:txBody>
       </p:sp>
       <p:sp>
         <p:nvSpPr>
@@ -5675,18 +5703,13 @@
           <a:bodyPr wrap="square" rtlCol="0" anchor="ctr"/>
           <a:lstStyle/>
           <a:p>
-            <a:pPr indent="0" marL="0">
-              <a:buNone/>
-            </a:pPr>
-            <a:r>
-              <a:rPr lang="en-US" sz="1100" dirty="0">
-                <a:solidFill>
-                  <a:srgbClr val="64748B"/>
-                </a:solidFill>
-              </a:rPr>
+            <a:pPr marL="0" indent="0">
+              <a:buNone/>
+            </a:pPr>
+            <a:r>
+              <a:rPr lang="ja-JP" sz="1200" noProof="0" dirty="0"/>
               <a:t>授業回数</a:t>
             </a:r>
-            <a:endParaRPr lang="en-US" sz="1100" dirty="0"/>
           </a:p>
         </p:txBody>
       </p:sp>
@@ -5698,7 +5721,7 @@
         </p:nvSpPr>
         <p:spPr>
           <a:xfrm>
-            <a:off x="2331720" y="2432304"/>
+            <a:off x="2255520" y="2432304"/>
             <a:ext cx="1645920" cy="347472"/>
           </a:xfrm>
           <a:prstGeom prst="rect">
@@ -5711,18 +5734,18 @@
           <a:bodyPr wrap="square" rtlCol="0" anchor="ctr"/>
           <a:lstStyle/>
           <a:p>
-            <a:pPr indent="0" marL="0">
-              <a:buNone/>
-            </a:pPr>
-            <a:r>
-              <a:rPr lang="en-US" sz="1100" b="1" dirty="0">
+            <a:pPr marL="0" indent="0">
+              <a:buNone/>
+            </a:pPr>
+            <a:r>
+              <a:rPr lang="ja-JP" sz="1100" b="1" noProof="0" dirty="0">
                 <a:solidFill>
                   <a:srgbClr val="1E40AF"/>
                 </a:solidFill>
               </a:rPr>
               <a:t>14 回</a:t>
             </a:r>
-            <a:endParaRPr lang="en-US" sz="1100" dirty="0"/>
+            <a:endParaRPr lang="ja-JP" sz="1100" noProof="0" dirty="0"/>
           </a:p>
         </p:txBody>
       </p:sp>
@@ -5748,6 +5771,13 @@
             <a:prstDash val="solid"/>
           </a:ln>
         </p:spPr>
+        <p:txBody>
+          <a:bodyPr/>
+          <a:lstStyle/>
+          <a:p>
+            <a:endParaRPr lang="ja-JP" noProof="0" dirty="0"/>
+          </a:p>
+        </p:txBody>
       </p:sp>
       <p:sp>
         <p:nvSpPr>
@@ -5770,18 +5800,13 @@
           <a:bodyPr wrap="square" rtlCol="0" anchor="ctr"/>
           <a:lstStyle/>
           <a:p>
-            <a:pPr indent="0" marL="0">
-              <a:buNone/>
-            </a:pPr>
-            <a:r>
-              <a:rPr lang="en-US" sz="1100" dirty="0">
-                <a:solidFill>
-                  <a:srgbClr val="64748B"/>
-                </a:solidFill>
-              </a:rPr>
+            <a:pPr marL="0" indent="0">
+              <a:buNone/>
+            </a:pPr>
+            <a:r>
+              <a:rPr lang="ja-JP" sz="1200" noProof="0" dirty="0"/>
               <a:t>ポーリング間隔</a:t>
             </a:r>
-            <a:endParaRPr lang="en-US" sz="1100" dirty="0"/>
           </a:p>
         </p:txBody>
       </p:sp>
@@ -5793,7 +5818,7 @@
         </p:nvSpPr>
         <p:spPr>
           <a:xfrm>
-            <a:off x="2331720" y="2935224"/>
+            <a:off x="2255520" y="2935224"/>
             <a:ext cx="1645920" cy="347472"/>
           </a:xfrm>
           <a:prstGeom prst="rect">
@@ -5806,18 +5831,18 @@
           <a:bodyPr wrap="square" rtlCol="0" anchor="ctr"/>
           <a:lstStyle/>
           <a:p>
-            <a:pPr indent="0" marL="0">
-              <a:buNone/>
-            </a:pPr>
-            <a:r>
-              <a:rPr lang="en-US" sz="1100" b="1" dirty="0">
+            <a:pPr marL="0" indent="0">
+              <a:buNone/>
+            </a:pPr>
+            <a:r>
+              <a:rPr lang="ja-JP" sz="1100" b="1" noProof="0" dirty="0">
                 <a:solidFill>
                   <a:srgbClr val="1E40AF"/>
                 </a:solidFill>
               </a:rPr>
               <a:t>30 秒</a:t>
             </a:r>
-            <a:endParaRPr lang="en-US" sz="1100" dirty="0"/>
+            <a:endParaRPr lang="ja-JP" sz="1100" noProof="0" dirty="0"/>
           </a:p>
         </p:txBody>
       </p:sp>
@@ -5843,6 +5868,13 @@
             <a:prstDash val="solid"/>
           </a:ln>
         </p:spPr>
+        <p:txBody>
+          <a:bodyPr/>
+          <a:lstStyle/>
+          <a:p>
+            <a:endParaRPr lang="ja-JP" noProof="0" dirty="0"/>
+          </a:p>
+        </p:txBody>
       </p:sp>
       <p:sp>
         <p:nvSpPr>
@@ -5865,18 +5897,13 @@
           <a:bodyPr wrap="square" rtlCol="0" anchor="ctr"/>
           <a:lstStyle/>
           <a:p>
-            <a:pPr indent="0" marL="0">
-              <a:buNone/>
-            </a:pPr>
-            <a:r>
-              <a:rPr lang="en-US" sz="1100" dirty="0">
-                <a:solidFill>
-                  <a:srgbClr val="64748B"/>
-                </a:solidFill>
-              </a:rPr>
+            <a:pPr marL="0" indent="0">
+              <a:buNone/>
+            </a:pPr>
+            <a:r>
+              <a:rPr lang="ja-JP" sz="1200" noProof="0" dirty="0"/>
               <a:t>対応プラットフォーム</a:t>
             </a:r>
-            <a:endParaRPr lang="en-US" sz="1100" dirty="0"/>
           </a:p>
         </p:txBody>
       </p:sp>
@@ -5888,7 +5915,7 @@
         </p:nvSpPr>
         <p:spPr>
           <a:xfrm>
-            <a:off x="2331720" y="3438144"/>
+            <a:off x="2255520" y="3438144"/>
             <a:ext cx="1645920" cy="347472"/>
           </a:xfrm>
           <a:prstGeom prst="rect">
@@ -5901,18 +5928,18 @@
           <a:bodyPr wrap="square" rtlCol="0" anchor="ctr"/>
           <a:lstStyle/>
           <a:p>
-            <a:pPr indent="0" marL="0">
-              <a:buNone/>
-            </a:pPr>
-            <a:r>
-              <a:rPr lang="en-US" sz="1100" b="1" dirty="0">
+            <a:pPr marL="0" indent="0">
+              <a:buNone/>
+            </a:pPr>
+            <a:r>
+              <a:rPr lang="ja-JP" sz="1100" b="1" noProof="0" dirty="0">
                 <a:solidFill>
                   <a:srgbClr val="1E40AF"/>
                 </a:solidFill>
               </a:rPr>
               <a:t>Windows 10/11 · macOS</a:t>
             </a:r>
-            <a:endParaRPr lang="en-US" sz="1100" dirty="0"/>
+            <a:endParaRPr lang="ja-JP" sz="1100" noProof="0" dirty="0"/>
           </a:p>
         </p:txBody>
       </p:sp>
@@ -5938,6 +5965,13 @@
             <a:prstDash val="solid"/>
           </a:ln>
         </p:spPr>
+        <p:txBody>
+          <a:bodyPr/>
+          <a:lstStyle/>
+          <a:p>
+            <a:endParaRPr lang="ja-JP" noProof="0" dirty="0"/>
+          </a:p>
+        </p:txBody>
       </p:sp>
       <p:sp>
         <p:nvSpPr>
@@ -5960,18 +5994,13 @@
           <a:bodyPr wrap="square" rtlCol="0" anchor="ctr"/>
           <a:lstStyle/>
           <a:p>
-            <a:pPr indent="0" marL="0">
-              <a:buNone/>
-            </a:pPr>
-            <a:r>
-              <a:rPr lang="en-US" sz="1100" dirty="0">
-                <a:solidFill>
-                  <a:srgbClr val="64748B"/>
-                </a:solidFill>
-              </a:rPr>
+            <a:pPr marL="0" indent="0">
+              <a:buNone/>
+            </a:pPr>
+            <a:r>
+              <a:rPr lang="ja-JP" sz="1200" noProof="0" dirty="0"/>
               <a:t>設定ファイル形式</a:t>
             </a:r>
-            <a:endParaRPr lang="en-US" sz="1100" dirty="0"/>
           </a:p>
         </p:txBody>
       </p:sp>
@@ -5983,7 +6012,7 @@
         </p:nvSpPr>
         <p:spPr>
           <a:xfrm>
-            <a:off x="2331720" y="3941064"/>
+            <a:off x="2255520" y="3941064"/>
             <a:ext cx="1645920" cy="347472"/>
           </a:xfrm>
           <a:prstGeom prst="rect">
@@ -5996,18 +6025,18 @@
           <a:bodyPr wrap="square" rtlCol="0" anchor="ctr"/>
           <a:lstStyle/>
           <a:p>
-            <a:pPr indent="0" marL="0">
-              <a:buNone/>
-            </a:pPr>
-            <a:r>
-              <a:rPr lang="en-US" sz="1100" b="1" dirty="0">
+            <a:pPr marL="0" indent="0">
+              <a:buNone/>
+            </a:pPr>
+            <a:r>
+              <a:rPr lang="ja-JP" sz="1100" b="1" noProof="0" dirty="0">
                 <a:solidFill>
                   <a:srgbClr val="1E40AF"/>
                 </a:solidFill>
               </a:rPr>
-              <a:t>JSON（config/ フォルダ）</a:t>
-            </a:r>
-            <a:endParaRPr lang="en-US" sz="1100" dirty="0"/>
+              <a:t>JSON</a:t>
+            </a:r>
+            <a:endParaRPr lang="ja-JP" sz="1100" noProof="0" dirty="0"/>
           </a:p>
         </p:txBody>
       </p:sp>
@@ -6032,11 +6061,11 @@
           <a:bodyPr wrap="square" rtlCol="0" anchor="ctr"/>
           <a:lstStyle/>
           <a:p>
-            <a:pPr algn="ctr" indent="0" marL="0">
-              <a:buNone/>
-            </a:pPr>
-            <a:r>
-              <a:rPr lang="en-US" sz="2600" b="1" dirty="0">
+            <a:pPr marL="0" indent="0" algn="ctr">
+              <a:buNone/>
+            </a:pPr>
+            <a:r>
+              <a:rPr lang="ja-JP" sz="2600" b="1" noProof="0" dirty="0">
                 <a:solidFill>
                   <a:srgbClr val="1E40AF"/>
                 </a:solidFill>
@@ -6046,7 +6075,7 @@
               </a:rPr>
               <a:t>ご利用ありがとう</a:t>
             </a:r>
-            <a:endParaRPr lang="en-US" sz="2600" dirty="0"/>
+            <a:endParaRPr lang="ja-JP" sz="2600" noProof="0" dirty="0"/>
           </a:p>
         </p:txBody>
       </p:sp>
@@ -6071,11 +6100,11 @@
           <a:bodyPr wrap="square" rtlCol="0" anchor="ctr"/>
           <a:lstStyle/>
           <a:p>
-            <a:pPr algn="ctr" indent="0" marL="0">
-              <a:buNone/>
-            </a:pPr>
-            <a:r>
-              <a:rPr lang="en-US" sz="2200" b="1" dirty="0">
+            <a:pPr marL="0" indent="0" algn="ctr">
+              <a:buNone/>
+            </a:pPr>
+            <a:r>
+              <a:rPr lang="ja-JP" sz="2200" b="1" noProof="0" dirty="0">
                 <a:solidFill>
                   <a:srgbClr val="2563EB"/>
                 </a:solidFill>
@@ -6085,7 +6114,7 @@
               </a:rPr>
               <a:t>ございます</a:t>
             </a:r>
-            <a:endParaRPr lang="en-US" sz="2200" dirty="0"/>
+            <a:endParaRPr lang="ja-JP" sz="2200" noProof="0" dirty="0"/>
           </a:p>
         </p:txBody>
       </p:sp>
@@ -6108,6 +6137,13 @@
           </a:solidFill>
           <a:ln/>
         </p:spPr>
+        <p:txBody>
+          <a:bodyPr/>
+          <a:lstStyle/>
+          <a:p>
+            <a:endParaRPr lang="ja-JP" noProof="0" dirty="0"/>
+          </a:p>
+        </p:txBody>
       </p:sp>
       <p:sp>
         <p:nvSpPr>
@@ -6130,31 +6166,31 @@
           <a:bodyPr wrap="square" rtlCol="0" anchor="ctr"/>
           <a:lstStyle/>
           <a:p>
-            <a:pPr algn="ctr" indent="0" marL="0">
-              <a:buNone/>
-            </a:pPr>
-            <a:r>
-              <a:rPr lang="en-US" sz="1300" dirty="0">
+            <a:pPr marL="0" indent="0" algn="ctr">
+              <a:buNone/>
+            </a:pPr>
+            <a:r>
+              <a:rPr lang="ja-JP" sz="1300" noProof="0" dirty="0">
                 <a:solidFill>
                   <a:srgbClr val="64748B"/>
                 </a:solidFill>
               </a:rPr>
               <a:t>CodeWidget  出席コード展示ツール</a:t>
             </a:r>
-            <a:endParaRPr lang="en-US" sz="1300" dirty="0"/>
+            <a:endParaRPr lang="ja-JP" sz="1300" noProof="0" dirty="0"/>
           </a:p>
         </p:txBody>
       </p:sp>
       <p:pic>
         <p:nvPicPr>
-          <p:cNvPr id="31" name="Image 0" descr="preencoded.png">    </p:cNvPr>
+          <p:cNvPr id="31" name="Image 0" descr="preencoded.png"/>
           <p:cNvPicPr>
             <a:picLocks noChangeAspect="1"/>
           </p:cNvPicPr>
           <p:nvPr/>
         </p:nvPicPr>
         <p:blipFill>
-          <a:blip r:embed="rId1"/>
+          <a:blip r:embed="rId3"/>
           <a:stretch>
             <a:fillRect/>
           </a:stretch>
@@ -6168,7 +6204,7 @@
             <a:avLst/>
           </a:prstGeom>
           <a:effectLst>
-            <a:outerShdw sx="100000" sy="100000" kx="0" ky="0" algn="bl" rotWithShape="0" blurRad="76200" dist="38100" dir="8100000">
+            <a:outerShdw blurRad="76200" dist="38100" dir="8100000" algn="bl" rotWithShape="0">
               <a:srgbClr val="1E40AF">
                 <a:alpha val="10000"/>
               </a:srgbClr>
@@ -6178,42 +6214,6 @@
       </p:pic>
       <p:sp>
         <p:nvSpPr>
-          <p:cNvPr id="32" name="Text 29"/>
-          <p:cNvSpPr/>
-          <p:nvPr/>
-        </p:nvSpPr>
-        <p:spPr>
-          <a:xfrm>
-            <a:off x="4389120" y="4005072"/>
-            <a:ext cx="4434840" cy="320040"/>
-          </a:xfrm>
-          <a:prstGeom prst="rect">
-            <a:avLst/>
-          </a:prstGeom>
-          <a:noFill/>
-          <a:ln/>
-        </p:spPr>
-        <p:txBody>
-          <a:bodyPr wrap="square" rtlCol="0" anchor="ctr"/>
-          <a:lstStyle/>
-          <a:p>
-            <a:pPr algn="ctr" indent="0" marL="0">
-              <a:buNone/>
-            </a:pPr>
-            <a:r>
-              <a:rPr lang="en-US" sz="1050" i="1" dirty="0">
-                <a:solidFill>
-                  <a:srgbClr val="64748B"/>
-                </a:solidFill>
-              </a:rPr>
-              <a:t>ご不明な点は各学部事務局までお問い合わせください</a:t>
-            </a:r>
-            <a:endParaRPr lang="en-US" sz="1050" dirty="0"/>
-          </a:p>
-        </p:txBody>
-      </p:sp>
-      <p:sp>
-        <p:nvSpPr>
           <p:cNvPr id="33" name="Shape 30"/>
           <p:cNvSpPr/>
           <p:nvPr/>
@@ -6231,6 +6231,13 @@
           </a:solidFill>
           <a:ln/>
         </p:spPr>
+        <p:txBody>
+          <a:bodyPr/>
+          <a:lstStyle/>
+          <a:p>
+            <a:endParaRPr lang="ja-JP" noProof="0" dirty="0"/>
+          </a:p>
+        </p:txBody>
       </p:sp>
       <p:sp>
         <p:nvSpPr>
@@ -6253,18 +6260,18 @@
           <a:bodyPr wrap="square" rtlCol="0" anchor="ctr"/>
           <a:lstStyle/>
           <a:p>
-            <a:pPr algn="ctr" indent="0" marL="0">
-              <a:buNone/>
-            </a:pPr>
-            <a:r>
-              <a:rPr lang="en-US" sz="1100" b="1" dirty="0">
+            <a:pPr marL="0" indent="0" algn="ctr">
+              <a:buNone/>
+            </a:pPr>
+            <a:r>
+              <a:rPr lang="ja-JP" sz="1100" b="1" noProof="0" dirty="0">
                 <a:solidFill>
                   <a:srgbClr val="FFFFFF"/>
                 </a:solidFill>
               </a:rPr>
               <a:t>v1.0.0　　Python 3.12 + PySide6　　麗澤大学　2026年度</a:t>
             </a:r>
-            <a:endParaRPr lang="en-US" sz="1100" dirty="0"/>
+            <a:endParaRPr lang="ja-JP" sz="1100" noProof="0" dirty="0"/>
           </a:p>
         </p:txBody>
       </p:sp>
@@ -6284,6 +6291,7 @@
         <a:solidFill>
           <a:srgbClr val="F8FAFF"/>
         </a:solidFill>
+        <a:effectLst/>
       </p:bgPr>
     </p:bg>
     <p:spTree>
@@ -6319,6 +6327,13 @@
           </a:solidFill>
           <a:ln/>
         </p:spPr>
+        <p:txBody>
+          <a:bodyPr/>
+          <a:lstStyle/>
+          <a:p>
+            <a:endParaRPr lang="ja-JP" noProof="0" dirty="0"/>
+          </a:p>
+        </p:txBody>
       </p:sp>
       <p:sp>
         <p:nvSpPr>
@@ -6341,11 +6356,11 @@
           <a:bodyPr wrap="square" rtlCol="0" anchor="ctr"/>
           <a:lstStyle/>
           <a:p>
-            <a:pPr indent="0" marL="0">
-              <a:buNone/>
-            </a:pPr>
-            <a:r>
-              <a:rPr lang="en-US" sz="2300" b="1" dirty="0">
+            <a:pPr marL="0" indent="0">
+              <a:buNone/>
+            </a:pPr>
+            <a:r>
+              <a:rPr lang="ja-JP" sz="2300" b="1" noProof="0" dirty="0">
                 <a:solidFill>
                   <a:srgbClr val="FFFFFF"/>
                 </a:solidFill>
@@ -6355,7 +6370,7 @@
               </a:rPr>
               <a:t>目　次</a:t>
             </a:r>
-            <a:endParaRPr lang="en-US" sz="2300" dirty="0"/>
+            <a:endParaRPr lang="ja-JP" sz="2300" noProof="0" dirty="0"/>
           </a:p>
         </p:txBody>
       </p:sp>
@@ -6378,13 +6393,20 @@
           </a:solidFill>
           <a:ln/>
           <a:effectLst>
-            <a:outerShdw sx="100000" sy="100000" kx="0" ky="0" algn="bl" rotWithShape="0" blurRad="76200" dist="38100" dir="8100000">
+            <a:outerShdw blurRad="76200" dist="38100" dir="8100000" algn="bl" rotWithShape="0">
               <a:srgbClr val="1E40AF">
                 <a:alpha val="10000"/>
               </a:srgbClr>
             </a:outerShdw>
           </a:effectLst>
         </p:spPr>
+        <p:txBody>
+          <a:bodyPr/>
+          <a:lstStyle/>
+          <a:p>
+            <a:endParaRPr lang="ja-JP" noProof="0" dirty="0"/>
+          </a:p>
+        </p:txBody>
       </p:sp>
       <p:sp>
         <p:nvSpPr>
@@ -6405,6 +6427,13 @@
           </a:solidFill>
           <a:ln/>
         </p:spPr>
+        <p:txBody>
+          <a:bodyPr/>
+          <a:lstStyle/>
+          <a:p>
+            <a:endParaRPr lang="ja-JP" noProof="0" dirty="0"/>
+          </a:p>
+        </p:txBody>
       </p:sp>
       <p:sp>
         <p:nvSpPr>
@@ -6427,18 +6456,18 @@
           <a:bodyPr wrap="square" rtlCol="0" anchor="ctr"/>
           <a:lstStyle/>
           <a:p>
-            <a:pPr algn="ctr" indent="0" marL="0">
-              <a:buNone/>
-            </a:pPr>
-            <a:r>
-              <a:rPr lang="en-US" sz="1400" b="1" dirty="0">
+            <a:pPr marL="0" indent="0" algn="ctr">
+              <a:buNone/>
+            </a:pPr>
+            <a:r>
+              <a:rPr lang="ja-JP" sz="1400" b="1" noProof="0" dirty="0">
                 <a:solidFill>
                   <a:srgbClr val="FFFFFF"/>
                 </a:solidFill>
               </a:rPr>
               <a:t>01</a:t>
             </a:r>
-            <a:endParaRPr lang="en-US" sz="1400" dirty="0"/>
+            <a:endParaRPr lang="ja-JP" sz="1400" noProof="0" dirty="0"/>
           </a:p>
         </p:txBody>
       </p:sp>
@@ -6463,18 +6492,18 @@
           <a:bodyPr wrap="square" rtlCol="0" anchor="ctr"/>
           <a:lstStyle/>
           <a:p>
-            <a:pPr indent="0" marL="0">
-              <a:buNone/>
-            </a:pPr>
-            <a:r>
-              <a:rPr lang="en-US" sz="1300" b="1" dirty="0">
+            <a:pPr marL="0" indent="0">
+              <a:buNone/>
+            </a:pPr>
+            <a:r>
+              <a:rPr lang="ja-JP" sz="1300" b="1" noProof="0" dirty="0">
                 <a:solidFill>
                   <a:srgbClr val="1E40AF"/>
                 </a:solidFill>
               </a:rPr>
               <a:t>CodeWidget とは？</a:t>
             </a:r>
-            <a:endParaRPr lang="en-US" sz="1300" dirty="0"/>
+            <a:endParaRPr lang="ja-JP" sz="1300" noProof="0" dirty="0"/>
           </a:p>
         </p:txBody>
       </p:sp>
@@ -6499,18 +6528,18 @@
           <a:bodyPr wrap="square" rtlCol="0" anchor="ctr"/>
           <a:lstStyle/>
           <a:p>
-            <a:pPr indent="0" marL="0">
-              <a:buNone/>
-            </a:pPr>
-            <a:r>
-              <a:rPr lang="en-US" sz="1000" dirty="0">
+            <a:pPr marL="0" indent="0">
+              <a:buNone/>
+            </a:pPr>
+            <a:r>
+              <a:rPr lang="ja-JP" sz="1200" b="1" noProof="0" dirty="0">
                 <a:solidFill>
                   <a:srgbClr val="64748B"/>
                 </a:solidFill>
               </a:rPr>
               <a:t>機能概要と導入背景</a:t>
             </a:r>
-            <a:endParaRPr lang="en-US" sz="1000" dirty="0"/>
+            <a:endParaRPr lang="ja-JP" sz="1200" b="1" noProof="0" dirty="0"/>
           </a:p>
         </p:txBody>
       </p:sp>
@@ -6533,13 +6562,20 @@
           </a:solidFill>
           <a:ln/>
           <a:effectLst>
-            <a:outerShdw sx="100000" sy="100000" kx="0" ky="0" algn="bl" rotWithShape="0" blurRad="76200" dist="38100" dir="8100000">
+            <a:outerShdw blurRad="76200" dist="38100" dir="8100000" algn="bl" rotWithShape="0">
               <a:srgbClr val="1E40AF">
                 <a:alpha val="10000"/>
               </a:srgbClr>
             </a:outerShdw>
           </a:effectLst>
         </p:spPr>
+        <p:txBody>
+          <a:bodyPr/>
+          <a:lstStyle/>
+          <a:p>
+            <a:endParaRPr lang="ja-JP" noProof="0" dirty="0"/>
+          </a:p>
+        </p:txBody>
       </p:sp>
       <p:sp>
         <p:nvSpPr>
@@ -6560,6 +6596,13 @@
           </a:solidFill>
           <a:ln/>
         </p:spPr>
+        <p:txBody>
+          <a:bodyPr/>
+          <a:lstStyle/>
+          <a:p>
+            <a:endParaRPr lang="ja-JP" noProof="0" dirty="0"/>
+          </a:p>
+        </p:txBody>
       </p:sp>
       <p:sp>
         <p:nvSpPr>
@@ -6582,18 +6625,18 @@
           <a:bodyPr wrap="square" rtlCol="0" anchor="ctr"/>
           <a:lstStyle/>
           <a:p>
-            <a:pPr algn="ctr" indent="0" marL="0">
-              <a:buNone/>
-            </a:pPr>
-            <a:r>
-              <a:rPr lang="en-US" sz="1400" b="1" dirty="0">
+            <a:pPr marL="0" indent="0" algn="ctr">
+              <a:buNone/>
+            </a:pPr>
+            <a:r>
+              <a:rPr lang="ja-JP" sz="1400" b="1" noProof="0" dirty="0">
                 <a:solidFill>
                   <a:srgbClr val="FFFFFF"/>
                 </a:solidFill>
               </a:rPr>
               <a:t>02</a:t>
             </a:r>
-            <a:endParaRPr lang="en-US" sz="1400" dirty="0"/>
+            <a:endParaRPr lang="ja-JP" sz="1400" noProof="0" dirty="0"/>
           </a:p>
         </p:txBody>
       </p:sp>
@@ -6618,18 +6661,18 @@
           <a:bodyPr wrap="square" rtlCol="0" anchor="ctr"/>
           <a:lstStyle/>
           <a:p>
-            <a:pPr indent="0" marL="0">
-              <a:buNone/>
-            </a:pPr>
-            <a:r>
-              <a:rPr lang="en-US" sz="1300" b="1" dirty="0">
+            <a:pPr marL="0" indent="0">
+              <a:buNone/>
+            </a:pPr>
+            <a:r>
+              <a:rPr lang="ja-JP" sz="1300" b="1" noProof="0" dirty="0">
                 <a:solidFill>
                   <a:srgbClr val="1E40AF"/>
                 </a:solidFill>
               </a:rPr>
               <a:t>クイックスタート</a:t>
             </a:r>
-            <a:endParaRPr lang="en-US" sz="1300" dirty="0"/>
+            <a:endParaRPr lang="ja-JP" sz="1300" noProof="0" dirty="0"/>
           </a:p>
         </p:txBody>
       </p:sp>
@@ -6654,18 +6697,18 @@
           <a:bodyPr wrap="square" rtlCol="0" anchor="ctr"/>
           <a:lstStyle/>
           <a:p>
-            <a:pPr indent="0" marL="0">
-              <a:buNone/>
-            </a:pPr>
-            <a:r>
-              <a:rPr lang="en-US" sz="1000" dirty="0">
+            <a:pPr marL="0" indent="0">
+              <a:buNone/>
+            </a:pPr>
+            <a:r>
+              <a:rPr lang="ja-JP" sz="1200" b="1" noProof="0" dirty="0">
                 <a:solidFill>
                   <a:srgbClr val="64748B"/>
                 </a:solidFill>
               </a:rPr>
               <a:t>初回起動と基本設定</a:t>
             </a:r>
-            <a:endParaRPr lang="en-US" sz="1000" dirty="0"/>
+            <a:endParaRPr lang="ja-JP" sz="1200" b="1" noProof="0" dirty="0"/>
           </a:p>
         </p:txBody>
       </p:sp>
@@ -6688,13 +6731,20 @@
           </a:solidFill>
           <a:ln/>
           <a:effectLst>
-            <a:outerShdw sx="100000" sy="100000" kx="0" ky="0" algn="bl" rotWithShape="0" blurRad="76200" dist="38100" dir="8100000">
+            <a:outerShdw blurRad="76200" dist="38100" dir="8100000" algn="bl" rotWithShape="0">
               <a:srgbClr val="1E40AF">
                 <a:alpha val="10000"/>
               </a:srgbClr>
             </a:outerShdw>
           </a:effectLst>
         </p:spPr>
+        <p:txBody>
+          <a:bodyPr/>
+          <a:lstStyle/>
+          <a:p>
+            <a:endParaRPr lang="ja-JP" noProof="0" dirty="0"/>
+          </a:p>
+        </p:txBody>
       </p:sp>
       <p:sp>
         <p:nvSpPr>
@@ -6715,6 +6765,13 @@
           </a:solidFill>
           <a:ln/>
         </p:spPr>
+        <p:txBody>
+          <a:bodyPr/>
+          <a:lstStyle/>
+          <a:p>
+            <a:endParaRPr lang="ja-JP" noProof="0" dirty="0"/>
+          </a:p>
+        </p:txBody>
       </p:sp>
       <p:sp>
         <p:nvSpPr>
@@ -6737,18 +6794,18 @@
           <a:bodyPr wrap="square" rtlCol="0" anchor="ctr"/>
           <a:lstStyle/>
           <a:p>
-            <a:pPr algn="ctr" indent="0" marL="0">
-              <a:buNone/>
-            </a:pPr>
-            <a:r>
-              <a:rPr lang="en-US" sz="1400" b="1" dirty="0">
+            <a:pPr marL="0" indent="0" algn="ctr">
+              <a:buNone/>
+            </a:pPr>
+            <a:r>
+              <a:rPr lang="ja-JP" sz="1400" b="1" noProof="0" dirty="0">
                 <a:solidFill>
                   <a:srgbClr val="FFFFFF"/>
                 </a:solidFill>
               </a:rPr>
               <a:t>03</a:t>
             </a:r>
-            <a:endParaRPr lang="en-US" sz="1400" dirty="0"/>
+            <a:endParaRPr lang="ja-JP" sz="1400" noProof="0" dirty="0"/>
           </a:p>
         </p:txBody>
       </p:sp>
@@ -6773,18 +6830,18 @@
           <a:bodyPr wrap="square" rtlCol="0" anchor="ctr"/>
           <a:lstStyle/>
           <a:p>
-            <a:pPr indent="0" marL="0">
-              <a:buNone/>
-            </a:pPr>
-            <a:r>
-              <a:rPr lang="en-US" sz="1300" b="1" dirty="0">
+            <a:pPr marL="0" indent="0">
+              <a:buNone/>
+            </a:pPr>
+            <a:r>
+              <a:rPr lang="ja-JP" sz="1300" b="1" noProof="0" dirty="0">
                 <a:solidFill>
                   <a:srgbClr val="1E40AF"/>
                 </a:solidFill>
               </a:rPr>
               <a:t>授業の管理</a:t>
             </a:r>
-            <a:endParaRPr lang="en-US" sz="1300" dirty="0"/>
+            <a:endParaRPr lang="ja-JP" sz="1300" noProof="0" dirty="0"/>
           </a:p>
         </p:txBody>
       </p:sp>
@@ -6809,18 +6866,18 @@
           <a:bodyPr wrap="square" rtlCol="0" anchor="ctr"/>
           <a:lstStyle/>
           <a:p>
-            <a:pPr indent="0" marL="0">
-              <a:buNone/>
-            </a:pPr>
-            <a:r>
-              <a:rPr lang="en-US" sz="1000" dirty="0">
+            <a:pPr marL="0" indent="0">
+              <a:buNone/>
+            </a:pPr>
+            <a:r>
+              <a:rPr lang="ja-JP" sz="1200" b="1" noProof="0" dirty="0">
                 <a:solidFill>
                   <a:srgbClr val="64748B"/>
                 </a:solidFill>
               </a:rPr>
               <a:t>授業の追加・編集・削除</a:t>
             </a:r>
-            <a:endParaRPr lang="en-US" sz="1000" dirty="0"/>
+            <a:endParaRPr lang="ja-JP" sz="1200" b="1" noProof="0" dirty="0"/>
           </a:p>
         </p:txBody>
       </p:sp>
@@ -6843,13 +6900,20 @@
           </a:solidFill>
           <a:ln/>
           <a:effectLst>
-            <a:outerShdw sx="100000" sy="100000" kx="0" ky="0" algn="bl" rotWithShape="0" blurRad="76200" dist="38100" dir="8100000">
+            <a:outerShdw blurRad="76200" dist="38100" dir="8100000" algn="bl" rotWithShape="0">
               <a:srgbClr val="1E40AF">
                 <a:alpha val="10000"/>
               </a:srgbClr>
             </a:outerShdw>
           </a:effectLst>
         </p:spPr>
+        <p:txBody>
+          <a:bodyPr/>
+          <a:lstStyle/>
+          <a:p>
+            <a:endParaRPr lang="ja-JP" noProof="0" dirty="0"/>
+          </a:p>
+        </p:txBody>
       </p:sp>
       <p:sp>
         <p:nvSpPr>
@@ -6870,6 +6934,13 @@
           </a:solidFill>
           <a:ln/>
         </p:spPr>
+        <p:txBody>
+          <a:bodyPr/>
+          <a:lstStyle/>
+          <a:p>
+            <a:endParaRPr lang="ja-JP" noProof="0" dirty="0"/>
+          </a:p>
+        </p:txBody>
       </p:sp>
       <p:sp>
         <p:nvSpPr>
@@ -6892,18 +6963,18 @@
           <a:bodyPr wrap="square" rtlCol="0" anchor="ctr"/>
           <a:lstStyle/>
           <a:p>
-            <a:pPr algn="ctr" indent="0" marL="0">
-              <a:buNone/>
-            </a:pPr>
-            <a:r>
-              <a:rPr lang="en-US" sz="1400" b="1" dirty="0">
+            <a:pPr marL="0" indent="0" algn="ctr">
+              <a:buNone/>
+            </a:pPr>
+            <a:r>
+              <a:rPr lang="ja-JP" sz="1400" b="1" noProof="0" dirty="0">
                 <a:solidFill>
                   <a:srgbClr val="FFFFFF"/>
                 </a:solidFill>
               </a:rPr>
               <a:t>04</a:t>
             </a:r>
-            <a:endParaRPr lang="en-US" sz="1400" dirty="0"/>
+            <a:endParaRPr lang="ja-JP" sz="1400" noProof="0" dirty="0"/>
           </a:p>
         </p:txBody>
       </p:sp>
@@ -6928,18 +6999,18 @@
           <a:bodyPr wrap="square" rtlCol="0" anchor="ctr"/>
           <a:lstStyle/>
           <a:p>
-            <a:pPr indent="0" marL="0">
-              <a:buNone/>
-            </a:pPr>
-            <a:r>
-              <a:rPr lang="en-US" sz="1300" b="1" dirty="0">
+            <a:pPr marL="0" indent="0">
+              <a:buNone/>
+            </a:pPr>
+            <a:r>
+              <a:rPr lang="ja-JP" sz="1300" b="1" noProof="0" dirty="0">
                 <a:solidFill>
                   <a:srgbClr val="1E40AF"/>
                 </a:solidFill>
               </a:rPr>
               <a:t>出席コードの操作</a:t>
             </a:r>
-            <a:endParaRPr lang="en-US" sz="1300" dirty="0"/>
+            <a:endParaRPr lang="ja-JP" sz="1300" noProof="0" dirty="0"/>
           </a:p>
         </p:txBody>
       </p:sp>
@@ -6964,18 +7035,18 @@
           <a:bodyPr wrap="square" rtlCol="0" anchor="ctr"/>
           <a:lstStyle/>
           <a:p>
-            <a:pPr indent="0" marL="0">
-              <a:buNone/>
-            </a:pPr>
-            <a:r>
-              <a:rPr lang="en-US" sz="1000" dirty="0">
+            <a:pPr marL="0" indent="0">
+              <a:buNone/>
+            </a:pPr>
+            <a:r>
+              <a:rPr lang="ja-JP" sz="1200" b="1" noProof="0" dirty="0">
                 <a:solidFill>
                   <a:srgbClr val="64748B"/>
                 </a:solidFill>
               </a:rPr>
               <a:t>表示・入力・管理</a:t>
             </a:r>
-            <a:endParaRPr lang="en-US" sz="1000" dirty="0"/>
+            <a:endParaRPr lang="ja-JP" sz="1200" b="1" noProof="0" dirty="0"/>
           </a:p>
         </p:txBody>
       </p:sp>
@@ -6998,13 +7069,20 @@
           </a:solidFill>
           <a:ln/>
           <a:effectLst>
-            <a:outerShdw sx="100000" sy="100000" kx="0" ky="0" algn="bl" rotWithShape="0" blurRad="76200" dist="38100" dir="8100000">
+            <a:outerShdw blurRad="76200" dist="38100" dir="8100000" algn="bl" rotWithShape="0">
               <a:srgbClr val="1E40AF">
                 <a:alpha val="10000"/>
               </a:srgbClr>
             </a:outerShdw>
           </a:effectLst>
         </p:spPr>
+        <p:txBody>
+          <a:bodyPr/>
+          <a:lstStyle/>
+          <a:p>
+            <a:endParaRPr lang="ja-JP" noProof="0" dirty="0"/>
+          </a:p>
+        </p:txBody>
       </p:sp>
       <p:sp>
         <p:nvSpPr>
@@ -7025,6 +7103,13 @@
           </a:solidFill>
           <a:ln/>
         </p:spPr>
+        <p:txBody>
+          <a:bodyPr/>
+          <a:lstStyle/>
+          <a:p>
+            <a:endParaRPr lang="ja-JP" noProof="0" dirty="0"/>
+          </a:p>
+        </p:txBody>
       </p:sp>
       <p:sp>
         <p:nvSpPr>
@@ -7047,18 +7132,18 @@
           <a:bodyPr wrap="square" rtlCol="0" anchor="ctr"/>
           <a:lstStyle/>
           <a:p>
-            <a:pPr algn="ctr" indent="0" marL="0">
-              <a:buNone/>
-            </a:pPr>
-            <a:r>
-              <a:rPr lang="en-US" sz="1400" b="1" dirty="0">
+            <a:pPr marL="0" indent="0" algn="ctr">
+              <a:buNone/>
+            </a:pPr>
+            <a:r>
+              <a:rPr lang="ja-JP" sz="1400" b="1" noProof="0" dirty="0">
                 <a:solidFill>
                   <a:srgbClr val="FFFFFF"/>
                 </a:solidFill>
               </a:rPr>
               <a:t>05</a:t>
             </a:r>
-            <a:endParaRPr lang="en-US" sz="1400" dirty="0"/>
+            <a:endParaRPr lang="ja-JP" sz="1400" noProof="0" dirty="0"/>
           </a:p>
         </p:txBody>
       </p:sp>
@@ -7083,18 +7168,18 @@
           <a:bodyPr wrap="square" rtlCol="0" anchor="ctr"/>
           <a:lstStyle/>
           <a:p>
-            <a:pPr indent="0" marL="0">
-              <a:buNone/>
-            </a:pPr>
-            <a:r>
-              <a:rPr lang="en-US" sz="1300" b="1" dirty="0">
+            <a:pPr marL="0" indent="0">
+              <a:buNone/>
+            </a:pPr>
+            <a:r>
+              <a:rPr lang="ja-JP" sz="1300" b="1" noProof="0" dirty="0">
                 <a:solidFill>
                   <a:srgbClr val="1E40AF"/>
                 </a:solidFill>
               </a:rPr>
               <a:t>授業の振替（調整）</a:t>
             </a:r>
-            <a:endParaRPr lang="en-US" sz="1300" dirty="0"/>
+            <a:endParaRPr lang="ja-JP" sz="1300" noProof="0" dirty="0"/>
           </a:p>
         </p:txBody>
       </p:sp>
@@ -7119,18 +7204,18 @@
           <a:bodyPr wrap="square" rtlCol="0" anchor="ctr"/>
           <a:lstStyle/>
           <a:p>
-            <a:pPr indent="0" marL="0">
-              <a:buNone/>
-            </a:pPr>
-            <a:r>
-              <a:rPr lang="en-US" sz="1000" dirty="0">
+            <a:pPr marL="0" indent="0">
+              <a:buNone/>
+            </a:pPr>
+            <a:r>
+              <a:rPr lang="ja-JP" sz="1200" b="1" noProof="0" dirty="0">
                 <a:solidFill>
                   <a:srgbClr val="64748B"/>
                 </a:solidFill>
               </a:rPr>
               <a:t>振替授業の登録方法</a:t>
             </a:r>
-            <a:endParaRPr lang="en-US" sz="1000" dirty="0"/>
+            <a:endParaRPr lang="ja-JP" sz="1200" b="1" noProof="0" dirty="0"/>
           </a:p>
         </p:txBody>
       </p:sp>
@@ -7153,13 +7238,20 @@
           </a:solidFill>
           <a:ln/>
           <a:effectLst>
-            <a:outerShdw sx="100000" sy="100000" kx="0" ky="0" algn="bl" rotWithShape="0" blurRad="76200" dist="38100" dir="8100000">
+            <a:outerShdw blurRad="76200" dist="38100" dir="8100000" algn="bl" rotWithShape="0">
               <a:srgbClr val="1E40AF">
                 <a:alpha val="10000"/>
               </a:srgbClr>
             </a:outerShdw>
           </a:effectLst>
         </p:spPr>
+        <p:txBody>
+          <a:bodyPr/>
+          <a:lstStyle/>
+          <a:p>
+            <a:endParaRPr lang="ja-JP" noProof="0" dirty="0"/>
+          </a:p>
+        </p:txBody>
       </p:sp>
       <p:sp>
         <p:nvSpPr>
@@ -7180,6 +7272,13 @@
           </a:solidFill>
           <a:ln/>
         </p:spPr>
+        <p:txBody>
+          <a:bodyPr/>
+          <a:lstStyle/>
+          <a:p>
+            <a:endParaRPr lang="ja-JP" noProof="0" dirty="0"/>
+          </a:p>
+        </p:txBody>
       </p:sp>
       <p:sp>
         <p:nvSpPr>
@@ -7202,18 +7301,18 @@
           <a:bodyPr wrap="square" rtlCol="0" anchor="ctr"/>
           <a:lstStyle/>
           <a:p>
-            <a:pPr algn="ctr" indent="0" marL="0">
-              <a:buNone/>
-            </a:pPr>
-            <a:r>
-              <a:rPr lang="en-US" sz="1400" b="1" dirty="0">
+            <a:pPr marL="0" indent="0" algn="ctr">
+              <a:buNone/>
+            </a:pPr>
+            <a:r>
+              <a:rPr lang="ja-JP" sz="1400" b="1" noProof="0" dirty="0">
                 <a:solidFill>
                   <a:srgbClr val="FFFFFF"/>
                 </a:solidFill>
               </a:rPr>
               <a:t>06</a:t>
             </a:r>
-            <a:endParaRPr lang="en-US" sz="1400" dirty="0"/>
+            <a:endParaRPr lang="ja-JP" sz="1400" noProof="0" dirty="0"/>
           </a:p>
         </p:txBody>
       </p:sp>
@@ -7238,18 +7337,18 @@
           <a:bodyPr wrap="square" rtlCol="0" anchor="ctr"/>
           <a:lstStyle/>
           <a:p>
-            <a:pPr indent="0" marL="0">
-              <a:buNone/>
-            </a:pPr>
-            <a:r>
-              <a:rPr lang="en-US" sz="1300" b="1" dirty="0">
+            <a:pPr marL="0" indent="0">
+              <a:buNone/>
+            </a:pPr>
+            <a:r>
+              <a:rPr lang="ja-JP" sz="1300" b="1" noProof="0" dirty="0">
                 <a:solidFill>
                   <a:srgbClr val="1E40AF"/>
                 </a:solidFill>
               </a:rPr>
               <a:t>外観設定</a:t>
             </a:r>
-            <a:endParaRPr lang="en-US" sz="1300" dirty="0"/>
+            <a:endParaRPr lang="ja-JP" sz="1300" noProof="0" dirty="0"/>
           </a:p>
         </p:txBody>
       </p:sp>
@@ -7274,18 +7373,18 @@
           <a:bodyPr wrap="square" rtlCol="0" anchor="ctr"/>
           <a:lstStyle/>
           <a:p>
-            <a:pPr indent="0" marL="0">
-              <a:buNone/>
-            </a:pPr>
-            <a:r>
-              <a:rPr lang="en-US" sz="1000" dirty="0">
+            <a:pPr marL="0" indent="0">
+              <a:buNone/>
+            </a:pPr>
+            <a:r>
+              <a:rPr lang="ja-JP" sz="1200" b="1" noProof="0" dirty="0">
                 <a:solidFill>
                   <a:srgbClr val="64748B"/>
                 </a:solidFill>
               </a:rPr>
               <a:t>フォント・色・ウィンドウサイズ</a:t>
             </a:r>
-            <a:endParaRPr lang="en-US" sz="1000" dirty="0"/>
+            <a:endParaRPr lang="ja-JP" sz="1200" b="1" noProof="0" dirty="0"/>
           </a:p>
         </p:txBody>
       </p:sp>
@@ -7308,13 +7407,20 @@
           </a:solidFill>
           <a:ln/>
           <a:effectLst>
-            <a:outerShdw sx="100000" sy="100000" kx="0" ky="0" algn="bl" rotWithShape="0" blurRad="76200" dist="38100" dir="8100000">
+            <a:outerShdw blurRad="76200" dist="38100" dir="8100000" algn="bl" rotWithShape="0">
               <a:srgbClr val="1E40AF">
                 <a:alpha val="10000"/>
               </a:srgbClr>
             </a:outerShdw>
           </a:effectLst>
         </p:spPr>
+        <p:txBody>
+          <a:bodyPr/>
+          <a:lstStyle/>
+          <a:p>
+            <a:endParaRPr lang="ja-JP" noProof="0" dirty="0"/>
+          </a:p>
+        </p:txBody>
       </p:sp>
       <p:sp>
         <p:nvSpPr>
@@ -7335,6 +7441,13 @@
           </a:solidFill>
           <a:ln/>
         </p:spPr>
+        <p:txBody>
+          <a:bodyPr/>
+          <a:lstStyle/>
+          <a:p>
+            <a:endParaRPr lang="ja-JP" noProof="0" dirty="0"/>
+          </a:p>
+        </p:txBody>
       </p:sp>
       <p:sp>
         <p:nvSpPr>
@@ -7357,18 +7470,18 @@
           <a:bodyPr wrap="square" rtlCol="0" anchor="ctr"/>
           <a:lstStyle/>
           <a:p>
-            <a:pPr algn="ctr" indent="0" marL="0">
-              <a:buNone/>
-            </a:pPr>
-            <a:r>
-              <a:rPr lang="en-US" sz="1400" b="1" dirty="0">
+            <a:pPr marL="0" indent="0" algn="ctr">
+              <a:buNone/>
+            </a:pPr>
+            <a:r>
+              <a:rPr lang="ja-JP" sz="1400" b="1" noProof="0" dirty="0">
                 <a:solidFill>
                   <a:srgbClr val="FFFFFF"/>
                 </a:solidFill>
               </a:rPr>
               <a:t>07</a:t>
             </a:r>
-            <a:endParaRPr lang="en-US" sz="1400" dirty="0"/>
+            <a:endParaRPr lang="ja-JP" sz="1400" noProof="0" dirty="0"/>
           </a:p>
         </p:txBody>
       </p:sp>
@@ -7393,18 +7506,18 @@
           <a:bodyPr wrap="square" rtlCol="0" anchor="ctr"/>
           <a:lstStyle/>
           <a:p>
-            <a:pPr indent="0" marL="0">
-              <a:buNone/>
-            </a:pPr>
-            <a:r>
-              <a:rPr lang="en-US" sz="1300" b="1" dirty="0">
+            <a:pPr marL="0" indent="0">
+              <a:buNone/>
+            </a:pPr>
+            <a:r>
+              <a:rPr lang="ja-JP" sz="1300" b="1" noProof="0" dirty="0">
                 <a:solidFill>
                   <a:srgbClr val="1E40AF"/>
                 </a:solidFill>
               </a:rPr>
               <a:t>よくある質問</a:t>
             </a:r>
-            <a:endParaRPr lang="en-US" sz="1300" dirty="0"/>
+            <a:endParaRPr lang="ja-JP" sz="1300" noProof="0" dirty="0"/>
           </a:p>
         </p:txBody>
       </p:sp>
@@ -7429,18 +7542,18 @@
           <a:bodyPr wrap="square" rtlCol="0" anchor="ctr"/>
           <a:lstStyle/>
           <a:p>
-            <a:pPr indent="0" marL="0">
-              <a:buNone/>
-            </a:pPr>
-            <a:r>
-              <a:rPr lang="en-US" sz="1000" dirty="0">
+            <a:pPr marL="0" indent="0">
+              <a:buNone/>
+            </a:pPr>
+            <a:r>
+              <a:rPr lang="ja-JP" sz="1200" b="1" noProof="0" dirty="0">
                 <a:solidFill>
                   <a:srgbClr val="64748B"/>
                 </a:solidFill>
               </a:rPr>
               <a:t>FAQ とトラブルシューティング</a:t>
             </a:r>
-            <a:endParaRPr lang="en-US" sz="1000" dirty="0"/>
+            <a:endParaRPr lang="ja-JP" sz="1200" b="1" noProof="0" dirty="0"/>
           </a:p>
         </p:txBody>
       </p:sp>
@@ -7463,6 +7576,13 @@
           </a:solidFill>
           <a:ln/>
         </p:spPr>
+        <p:txBody>
+          <a:bodyPr/>
+          <a:lstStyle/>
+          <a:p>
+            <a:endParaRPr lang="ja-JP" noProof="0" dirty="0"/>
+          </a:p>
+        </p:txBody>
       </p:sp>
       <p:sp>
         <p:nvSpPr>
@@ -7485,18 +7605,18 @@
           <a:bodyPr wrap="square" rtlCol="0" anchor="ctr"/>
           <a:lstStyle/>
           <a:p>
-            <a:pPr indent="0" marL="0">
-              <a:buNone/>
-            </a:pPr>
-            <a:r>
-              <a:rPr lang="en-US" sz="900" dirty="0">
+            <a:pPr marL="0" indent="0">
+              <a:buNone/>
+            </a:pPr>
+            <a:r>
+              <a:rPr lang="ja-JP" sz="900" noProof="0" dirty="0">
                 <a:solidFill>
                   <a:srgbClr val="BFDBFE"/>
                 </a:solidFill>
               </a:rPr>
               <a:t>CodeWidget  ユーザーマニュアル</a:t>
             </a:r>
-            <a:endParaRPr lang="en-US" sz="900" dirty="0"/>
+            <a:endParaRPr lang="ja-JP" sz="900" noProof="0" dirty="0"/>
           </a:p>
         </p:txBody>
       </p:sp>
@@ -7516,6 +7636,7 @@
         <a:solidFill>
           <a:srgbClr val="FFFFFF"/>
         </a:solidFill>
+        <a:effectLst/>
       </p:bgPr>
     </p:bg>
     <p:spTree>
@@ -7551,6 +7672,13 @@
           </a:solidFill>
           <a:ln/>
         </p:spPr>
+        <p:txBody>
+          <a:bodyPr/>
+          <a:lstStyle/>
+          <a:p>
+            <a:endParaRPr lang="ja-JP" noProof="0" dirty="0"/>
+          </a:p>
+        </p:txBody>
       </p:sp>
       <p:sp>
         <p:nvSpPr>
@@ -7573,11 +7701,11 @@
           <a:bodyPr wrap="square" rtlCol="0" anchor="ctr"/>
           <a:lstStyle/>
           <a:p>
-            <a:pPr indent="0" marL="0">
-              <a:buNone/>
-            </a:pPr>
-            <a:r>
-              <a:rPr lang="en-US" sz="2300" b="1" dirty="0">
+            <a:pPr marL="0" indent="0">
+              <a:buNone/>
+            </a:pPr>
+            <a:r>
+              <a:rPr lang="ja-JP" sz="2300" b="1" noProof="0" dirty="0">
                 <a:solidFill>
                   <a:srgbClr val="FFFFFF"/>
                 </a:solidFill>
@@ -7587,20 +7715,20 @@
               </a:rPr>
               <a:t>01  CodeWidget とは？</a:t>
             </a:r>
-            <a:endParaRPr lang="en-US" sz="2300" dirty="0"/>
+            <a:endParaRPr lang="ja-JP" sz="2300" noProof="0" dirty="0"/>
           </a:p>
         </p:txBody>
       </p:sp>
       <p:pic>
         <p:nvPicPr>
-          <p:cNvPr id="4" name="Image 0" descr="preencoded.png">    </p:cNvPr>
+          <p:cNvPr id="4" name="Image 0" descr="preencoded.png"/>
           <p:cNvPicPr>
             <a:picLocks noChangeAspect="1"/>
           </p:cNvPicPr>
           <p:nvPr/>
         </p:nvPicPr>
         <p:blipFill>
-          <a:blip r:embed="rId1"/>
+          <a:blip r:embed="rId3"/>
           <a:stretch>
             <a:fillRect/>
           </a:stretch>
@@ -7614,7 +7742,7 @@
             <a:avLst/>
           </a:prstGeom>
           <a:effectLst>
-            <a:outerShdw sx="100000" sy="100000" kx="0" ky="0" algn="bl" rotWithShape="0" blurRad="76200" dist="38100" dir="8100000">
+            <a:outerShdw blurRad="76200" dist="38100" dir="8100000" algn="bl" rotWithShape="0">
               <a:srgbClr val="1E40AF">
                 <a:alpha val="10000"/>
               </a:srgbClr>
@@ -7643,18 +7771,18 @@
           <a:bodyPr wrap="square" rtlCol="0" anchor="ctr"/>
           <a:lstStyle/>
           <a:p>
-            <a:pPr algn="ctr" indent="0" marL="0">
-              <a:buNone/>
-            </a:pPr>
-            <a:r>
-              <a:rPr lang="en-US" sz="950" i="1" dirty="0">
+            <a:pPr marL="0" indent="0" algn="ctr">
+              <a:buNone/>
+            </a:pPr>
+            <a:r>
+              <a:rPr lang="ja-JP" sz="950" i="1" noProof="0" dirty="0">
                 <a:solidFill>
                   <a:srgbClr val="64748B"/>
                 </a:solidFill>
               </a:rPr>
               <a:t>実際の表示画面</a:t>
             </a:r>
-            <a:endParaRPr lang="en-US" sz="950" dirty="0"/>
+            <a:endParaRPr lang="ja-JP" sz="950" noProof="0" dirty="0"/>
           </a:p>
         </p:txBody>
       </p:sp>
@@ -7677,13 +7805,20 @@
           </a:solidFill>
           <a:ln/>
           <a:effectLst>
-            <a:outerShdw sx="100000" sy="100000" kx="0" ky="0" algn="bl" rotWithShape="0" blurRad="76200" dist="38100" dir="8100000">
+            <a:outerShdw blurRad="76200" dist="38100" dir="8100000" algn="bl" rotWithShape="0">
               <a:srgbClr val="1E40AF">
                 <a:alpha val="10000"/>
               </a:srgbClr>
             </a:outerShdw>
           </a:effectLst>
         </p:spPr>
+        <p:txBody>
+          <a:bodyPr/>
+          <a:lstStyle/>
+          <a:p>
+            <a:endParaRPr lang="ja-JP" noProof="0" dirty="0"/>
+          </a:p>
+        </p:txBody>
       </p:sp>
       <p:sp>
         <p:nvSpPr>
@@ -7704,6 +7839,13 @@
           </a:solidFill>
           <a:ln/>
         </p:spPr>
+        <p:txBody>
+          <a:bodyPr/>
+          <a:lstStyle/>
+          <a:p>
+            <a:endParaRPr lang="ja-JP" noProof="0" dirty="0"/>
+          </a:p>
+        </p:txBody>
       </p:sp>
       <p:sp>
         <p:nvSpPr>
@@ -7726,18 +7868,18 @@
           <a:bodyPr wrap="square" rtlCol="0" anchor="ctr"/>
           <a:lstStyle/>
           <a:p>
-            <a:pPr indent="0" marL="0">
-              <a:buNone/>
-            </a:pPr>
-            <a:r>
-              <a:rPr lang="en-US" sz="1300" b="1" dirty="0">
+            <a:pPr marL="0" indent="0">
+              <a:buNone/>
+            </a:pPr>
+            <a:r>
+              <a:rPr lang="ja-JP" sz="1300" b="1" noProof="0" dirty="0">
                 <a:solidFill>
                   <a:srgbClr val="1E40AF"/>
                 </a:solidFill>
               </a:rPr>
               <a:t>現状の課題</a:t>
             </a:r>
-            <a:endParaRPr lang="en-US" sz="1300" dirty="0"/>
+            <a:endParaRPr lang="ja-JP" sz="1300" noProof="0" dirty="0"/>
           </a:p>
         </p:txBody>
       </p:sp>
@@ -7762,46 +7904,46 @@
           <a:bodyPr wrap="square" rtlCol="0" anchor="ctr"/>
           <a:lstStyle/>
           <a:p>
-            <a:pPr indent="0" marL="0">
-              <a:buNone/>
-            </a:pPr>
-            <a:r>
-              <a:rPr lang="en-US" sz="1150" dirty="0">
+            <a:pPr marL="0" indent="0">
+              <a:buNone/>
+            </a:pPr>
+            <a:r>
+              <a:rPr lang="ja-JP" sz="1300" noProof="0" dirty="0">
                 <a:solidFill>
                   <a:srgbClr val="1E293B"/>
                 </a:solidFill>
               </a:rPr>
               <a:t>・手動での提示のため、表示忘れや操作ミスが発生しやすい</a:t>
             </a:r>
-            <a:endParaRPr lang="en-US" sz="1150" dirty="0"/>
-          </a:p>
-          <a:p>
-            <a:pPr indent="0" marL="0">
-              <a:buNone/>
-            </a:pPr>
-            <a:r>
-              <a:rPr lang="en-US" sz="1150" dirty="0">
+            <a:endParaRPr lang="ja-JP" sz="1300" noProof="0" dirty="0"/>
+          </a:p>
+          <a:p>
+            <a:pPr marL="0" indent="0">
+              <a:buNone/>
+            </a:pPr>
+            <a:r>
+              <a:rPr lang="ja-JP" sz="1300" noProof="0" dirty="0">
                 <a:solidFill>
                   <a:srgbClr val="1E293B"/>
                 </a:solidFill>
               </a:rPr>
               <a:t>・方法が教員によって異なり、統一されていない</a:t>
             </a:r>
-            <a:endParaRPr lang="en-US" sz="1150" dirty="0"/>
-          </a:p>
-          <a:p>
-            <a:pPr indent="0" marL="0">
-              <a:buNone/>
-            </a:pPr>
-            <a:r>
-              <a:rPr lang="en-US" sz="1150" dirty="0">
+            <a:endParaRPr lang="ja-JP" sz="1300" noProof="0" dirty="0"/>
+          </a:p>
+          <a:p>
+            <a:pPr marL="0" indent="0">
+              <a:buNone/>
+            </a:pPr>
+            <a:r>
+              <a:rPr lang="ja-JP" sz="1300" noProof="0" dirty="0">
                 <a:solidFill>
                   <a:srgbClr val="1E293B"/>
                 </a:solidFill>
               </a:rPr>
               <a:t>・通常のウィンドウは投影中に隠れてしまう場合がある</a:t>
             </a:r>
-            <a:endParaRPr lang="en-US" sz="1150" dirty="0"/>
+            <a:endParaRPr lang="ja-JP" sz="1300" noProof="0" dirty="0"/>
           </a:p>
         </p:txBody>
       </p:sp>
@@ -7824,13 +7966,20 @@
           </a:solidFill>
           <a:ln/>
           <a:effectLst>
-            <a:outerShdw sx="100000" sy="100000" kx="0" ky="0" algn="bl" rotWithShape="0" blurRad="76200" dist="38100" dir="8100000">
+            <a:outerShdw blurRad="76200" dist="38100" dir="8100000" algn="bl" rotWithShape="0">
               <a:srgbClr val="1E40AF">
                 <a:alpha val="10000"/>
               </a:srgbClr>
             </a:outerShdw>
           </a:effectLst>
         </p:spPr>
+        <p:txBody>
+          <a:bodyPr/>
+          <a:lstStyle/>
+          <a:p>
+            <a:endParaRPr lang="ja-JP" noProof="0" dirty="0"/>
+          </a:p>
+        </p:txBody>
       </p:sp>
       <p:sp>
         <p:nvSpPr>
@@ -7851,6 +8000,13 @@
           </a:solidFill>
           <a:ln/>
         </p:spPr>
+        <p:txBody>
+          <a:bodyPr/>
+          <a:lstStyle/>
+          <a:p>
+            <a:endParaRPr lang="ja-JP" noProof="0" dirty="0"/>
+          </a:p>
+        </p:txBody>
       </p:sp>
       <p:sp>
         <p:nvSpPr>
@@ -7873,18 +8029,18 @@
           <a:bodyPr wrap="square" rtlCol="0" anchor="ctr"/>
           <a:lstStyle/>
           <a:p>
-            <a:pPr indent="0" marL="0">
-              <a:buNone/>
-            </a:pPr>
-            <a:r>
-              <a:rPr lang="en-US" sz="1300" b="1" dirty="0">
+            <a:pPr marL="0" indent="0">
+              <a:buNone/>
+            </a:pPr>
+            <a:r>
+              <a:rPr lang="ja-JP" sz="1300" b="1" noProof="0" dirty="0">
                 <a:solidFill>
                   <a:srgbClr val="1E40AF"/>
                 </a:solidFill>
               </a:rPr>
               <a:t>✓  CodeWidget の解決策</a:t>
             </a:r>
-            <a:endParaRPr lang="en-US" sz="1300" dirty="0"/>
+            <a:endParaRPr lang="ja-JP" sz="1300" noProof="0" dirty="0"/>
           </a:p>
         </p:txBody>
       </p:sp>
@@ -7909,46 +8065,46 @@
           <a:bodyPr wrap="square" rtlCol="0" anchor="ctr"/>
           <a:lstStyle/>
           <a:p>
-            <a:pPr indent="0" marL="0">
-              <a:buNone/>
-            </a:pPr>
-            <a:r>
-              <a:rPr lang="en-US" sz="1150" dirty="0">
+            <a:pPr marL="0" indent="0">
+              <a:buNone/>
+            </a:pPr>
+            <a:r>
+              <a:rPr lang="ja-JP" sz="1300" noProof="0" dirty="0">
                 <a:solidFill>
                   <a:srgbClr val="1E293B"/>
                 </a:solidFill>
               </a:rPr>
               <a:t>・時間割に基づいて 自動的にポップアップ 表示</a:t>
             </a:r>
-            <a:endParaRPr lang="en-US" sz="1150" dirty="0"/>
-          </a:p>
-          <a:p>
-            <a:pPr indent="0" marL="0">
-              <a:buNone/>
-            </a:pPr>
-            <a:r>
-              <a:rPr lang="en-US" sz="1150" dirty="0">
+            <a:endParaRPr lang="ja-JP" sz="1300" noProof="0" dirty="0"/>
+          </a:p>
+          <a:p>
+            <a:pPr marL="0" indent="0">
+              <a:buNone/>
+            </a:pPr>
+            <a:r>
+              <a:rPr lang="ja-JP" sz="1300" noProof="0" dirty="0">
                 <a:solidFill>
                   <a:srgbClr val="1E293B"/>
                 </a:solidFill>
               </a:rPr>
               <a:t>・常に最前面、ドラッグ可能。投影画面に最適化</a:t>
             </a:r>
-            <a:endParaRPr lang="en-US" sz="1150" dirty="0"/>
-          </a:p>
-          <a:p>
-            <a:pPr indent="0" marL="0">
-              <a:buNone/>
-            </a:pPr>
-            <a:r>
-              <a:rPr lang="en-US" sz="1150" dirty="0">
+            <a:endParaRPr lang="ja-JP" sz="1300" noProof="0" dirty="0"/>
+          </a:p>
+          <a:p>
+            <a:pPr marL="0" indent="0">
+              <a:buNone/>
+            </a:pPr>
+            <a:r>
+              <a:rPr lang="ja-JP" sz="1300" noProof="0" dirty="0">
                 <a:solidFill>
                   <a:srgbClr val="1E293B"/>
                 </a:solidFill>
               </a:rPr>
               <a:t>・ワンクリックでコード生成、学期全体を一括管理</a:t>
             </a:r>
-            <a:endParaRPr lang="en-US" sz="1150" dirty="0"/>
+            <a:endParaRPr lang="ja-JP" sz="1300" noProof="0" dirty="0"/>
           </a:p>
         </p:txBody>
       </p:sp>
@@ -7971,13 +8127,20 @@
           </a:solidFill>
           <a:ln/>
           <a:effectLst>
-            <a:outerShdw sx="100000" sy="100000" kx="0" ky="0" algn="bl" rotWithShape="0" blurRad="76200" dist="38100" dir="8100000">
+            <a:outerShdw blurRad="76200" dist="38100" dir="8100000" algn="bl" rotWithShape="0">
               <a:srgbClr val="1E40AF">
                 <a:alpha val="10000"/>
               </a:srgbClr>
             </a:outerShdw>
           </a:effectLst>
         </p:spPr>
+        <p:txBody>
+          <a:bodyPr/>
+          <a:lstStyle/>
+          <a:p>
+            <a:endParaRPr lang="ja-JP" noProof="0" dirty="0"/>
+          </a:p>
+        </p:txBody>
       </p:sp>
       <p:sp>
         <p:nvSpPr>
@@ -8000,18 +8163,18 @@
           <a:bodyPr wrap="square" rtlCol="0" anchor="ctr"/>
           <a:lstStyle/>
           <a:p>
-            <a:pPr algn="ctr" indent="0" marL="0">
-              <a:buNone/>
-            </a:pPr>
-            <a:r>
-              <a:rPr lang="en-US" sz="1800" b="1" dirty="0">
+            <a:pPr marL="0" indent="0" algn="ctr">
+              <a:buNone/>
+            </a:pPr>
+            <a:r>
+              <a:rPr lang="ja-JP" sz="1800" b="1" noProof="0" dirty="0">
                 <a:solidFill>
                   <a:srgbClr val="1E40AF"/>
                 </a:solidFill>
               </a:rPr>
               <a:t>30 秒</a:t>
             </a:r>
-            <a:endParaRPr lang="en-US" sz="1800" dirty="0"/>
+            <a:endParaRPr lang="ja-JP" sz="1800" noProof="0" dirty="0"/>
           </a:p>
         </p:txBody>
       </p:sp>
@@ -8023,31 +8186,31 @@
         </p:nvSpPr>
         <p:spPr>
           <a:xfrm>
-            <a:off x="5806440" y="3154680"/>
-            <a:ext cx="960120" cy="274320"/>
-          </a:xfrm>
-          <a:prstGeom prst="rect">
-            <a:avLst/>
-          </a:prstGeom>
-          <a:noFill/>
-          <a:ln/>
-        </p:spPr>
-        <p:txBody>
-          <a:bodyPr wrap="square" rtlCol="0" anchor="ctr"/>
-          <a:lstStyle/>
-          <a:p>
-            <a:pPr algn="ctr" indent="0" marL="0">
-              <a:buNone/>
-            </a:pPr>
-            <a:r>
-              <a:rPr lang="en-US" sz="850" dirty="0">
+            <a:off x="5737860" y="3154680"/>
+            <a:ext cx="1092708" cy="274320"/>
+          </a:xfrm>
+          <a:prstGeom prst="rect">
+            <a:avLst/>
+          </a:prstGeom>
+          <a:noFill/>
+          <a:ln/>
+        </p:spPr>
+        <p:txBody>
+          <a:bodyPr wrap="square" rtlCol="0" anchor="ctr"/>
+          <a:lstStyle/>
+          <a:p>
+            <a:pPr marL="0" indent="0" algn="ctr">
+              <a:buNone/>
+            </a:pPr>
+            <a:r>
+              <a:rPr lang="ja-JP" sz="1000" noProof="0" dirty="0">
                 <a:solidFill>
                   <a:srgbClr val="64748B"/>
                 </a:solidFill>
               </a:rPr>
               <a:t>ポーリング間隔</a:t>
             </a:r>
-            <a:endParaRPr lang="en-US" sz="850" dirty="0"/>
+            <a:endParaRPr lang="ja-JP" sz="1000" noProof="0" dirty="0"/>
           </a:p>
         </p:txBody>
       </p:sp>
@@ -8070,13 +8233,20 @@
           </a:solidFill>
           <a:ln/>
           <a:effectLst>
-            <a:outerShdw sx="100000" sy="100000" kx="0" ky="0" algn="bl" rotWithShape="0" blurRad="76200" dist="38100" dir="8100000">
+            <a:outerShdw blurRad="76200" dist="38100" dir="8100000" algn="bl" rotWithShape="0">
               <a:srgbClr val="1E40AF">
                 <a:alpha val="10000"/>
               </a:srgbClr>
             </a:outerShdw>
           </a:effectLst>
         </p:spPr>
+        <p:txBody>
+          <a:bodyPr/>
+          <a:lstStyle/>
+          <a:p>
+            <a:endParaRPr lang="ja-JP" noProof="0" dirty="0"/>
+          </a:p>
+        </p:txBody>
       </p:sp>
       <p:sp>
         <p:nvSpPr>
@@ -8099,18 +8269,18 @@
           <a:bodyPr wrap="square" rtlCol="0" anchor="ctr"/>
           <a:lstStyle/>
           <a:p>
-            <a:pPr algn="ctr" indent="0" marL="0">
-              <a:buNone/>
-            </a:pPr>
-            <a:r>
-              <a:rPr lang="en-US" sz="1800" b="1" dirty="0">
+            <a:pPr marL="0" indent="0" algn="ctr">
+              <a:buNone/>
+            </a:pPr>
+            <a:r>
+              <a:rPr lang="ja-JP" sz="1800" b="1" noProof="0" dirty="0">
                 <a:solidFill>
                   <a:srgbClr val="1E40AF"/>
                 </a:solidFill>
               </a:rPr>
               <a:t>14 回</a:t>
             </a:r>
-            <a:endParaRPr lang="en-US" sz="1800" dirty="0"/>
+            <a:endParaRPr lang="ja-JP" sz="1800" noProof="0" dirty="0"/>
           </a:p>
         </p:txBody>
       </p:sp>
@@ -8135,18 +8305,18 @@
           <a:bodyPr wrap="square" rtlCol="0" anchor="ctr"/>
           <a:lstStyle/>
           <a:p>
-            <a:pPr algn="ctr" indent="0" marL="0">
-              <a:buNone/>
-            </a:pPr>
-            <a:r>
-              <a:rPr lang="en-US" sz="850" dirty="0">
+            <a:pPr marL="0" indent="0" algn="ctr">
+              <a:buNone/>
+            </a:pPr>
+            <a:r>
+              <a:rPr lang="ja-JP" sz="1000" noProof="0" dirty="0">
                 <a:solidFill>
                   <a:srgbClr val="64748B"/>
                 </a:solidFill>
               </a:rPr>
-              <a:t>授業回数（最大）</a:t>
-            </a:r>
-            <a:endParaRPr lang="en-US" sz="850" dirty="0"/>
+              <a:t>授業回数</a:t>
+            </a:r>
+            <a:endParaRPr lang="ja-JP" sz="1000" noProof="0" dirty="0"/>
           </a:p>
         </p:txBody>
       </p:sp>
@@ -8169,13 +8339,20 @@
           </a:solidFill>
           <a:ln/>
           <a:effectLst>
-            <a:outerShdw sx="100000" sy="100000" kx="0" ky="0" algn="bl" rotWithShape="0" blurRad="76200" dist="38100" dir="8100000">
+            <a:outerShdw blurRad="76200" dist="38100" dir="8100000" algn="bl" rotWithShape="0">
               <a:srgbClr val="1E40AF">
                 <a:alpha val="10000"/>
               </a:srgbClr>
             </a:outerShdw>
           </a:effectLst>
         </p:spPr>
+        <p:txBody>
+          <a:bodyPr/>
+          <a:lstStyle/>
+          <a:p>
+            <a:endParaRPr lang="ja-JP" noProof="0" dirty="0"/>
+          </a:p>
+        </p:txBody>
       </p:sp>
       <p:sp>
         <p:nvSpPr>
@@ -8198,18 +8375,18 @@
           <a:bodyPr wrap="square" rtlCol="0" anchor="ctr"/>
           <a:lstStyle/>
           <a:p>
-            <a:pPr algn="ctr" indent="0" marL="0">
-              <a:buNone/>
-            </a:pPr>
-            <a:r>
-              <a:rPr lang="en-US" sz="1800" b="1" dirty="0">
+            <a:pPr marL="0" indent="0" algn="ctr">
+              <a:buNone/>
+            </a:pPr>
+            <a:r>
+              <a:rPr lang="ja-JP" sz="1800" b="1" noProof="0" dirty="0">
                 <a:solidFill>
                   <a:srgbClr val="1E40AF"/>
                 </a:solidFill>
               </a:rPr>
               <a:t>4 桁</a:t>
             </a:r>
-            <a:endParaRPr lang="en-US" sz="1800" dirty="0"/>
+            <a:endParaRPr lang="ja-JP" sz="1800" noProof="0" dirty="0"/>
           </a:p>
         </p:txBody>
       </p:sp>
@@ -8234,18 +8411,18 @@
           <a:bodyPr wrap="square" rtlCol="0" anchor="ctr"/>
           <a:lstStyle/>
           <a:p>
-            <a:pPr algn="ctr" indent="0" marL="0">
-              <a:buNone/>
-            </a:pPr>
-            <a:r>
-              <a:rPr lang="en-US" sz="850" dirty="0">
+            <a:pPr marL="0" indent="0" algn="ctr">
+              <a:buNone/>
+            </a:pPr>
+            <a:r>
+              <a:rPr lang="ja-JP" sz="1000" noProof="0" dirty="0">
                 <a:solidFill>
                   <a:srgbClr val="64748B"/>
                 </a:solidFill>
               </a:rPr>
               <a:t>コード形式</a:t>
             </a:r>
-            <a:endParaRPr lang="en-US" sz="850" dirty="0"/>
+            <a:endParaRPr lang="ja-JP" sz="1000" noProof="0" dirty="0"/>
           </a:p>
         </p:txBody>
       </p:sp>
@@ -8268,6 +8445,13 @@
           </a:solidFill>
           <a:ln/>
         </p:spPr>
+        <p:txBody>
+          <a:bodyPr/>
+          <a:lstStyle/>
+          <a:p>
+            <a:endParaRPr lang="ja-JP" noProof="0" dirty="0"/>
+          </a:p>
+        </p:txBody>
       </p:sp>
       <p:sp>
         <p:nvSpPr>
@@ -8290,18 +8474,18 @@
           <a:bodyPr wrap="square" rtlCol="0" anchor="ctr"/>
           <a:lstStyle/>
           <a:p>
-            <a:pPr indent="0" marL="0">
-              <a:buNone/>
-            </a:pPr>
-            <a:r>
-              <a:rPr lang="en-US" sz="900" dirty="0">
+            <a:pPr marL="0" indent="0">
+              <a:buNone/>
+            </a:pPr>
+            <a:r>
+              <a:rPr lang="ja-JP" sz="900" noProof="0" dirty="0">
                 <a:solidFill>
                   <a:srgbClr val="BFDBFE"/>
                 </a:solidFill>
               </a:rPr>
               <a:t>CodeWidget  ユーザーマニュアル</a:t>
             </a:r>
-            <a:endParaRPr lang="en-US" sz="900" dirty="0"/>
+            <a:endParaRPr lang="ja-JP" sz="900" noProof="0" dirty="0"/>
           </a:p>
         </p:txBody>
       </p:sp>
@@ -8326,18 +8510,18 @@
           <a:bodyPr wrap="square" rtlCol="0" anchor="ctr"/>
           <a:lstStyle/>
           <a:p>
-            <a:pPr algn="r" indent="0" marL="0">
-              <a:buNone/>
-            </a:pPr>
-            <a:r>
-              <a:rPr lang="en-US" sz="900" dirty="0">
+            <a:pPr marL="0" indent="0" algn="r">
+              <a:buNone/>
+            </a:pPr>
+            <a:r>
+              <a:rPr lang="ja-JP" sz="900" noProof="0" dirty="0">
                 <a:solidFill>
                   <a:srgbClr val="BFDBFE"/>
                 </a:solidFill>
               </a:rPr>
               <a:t>3</a:t>
             </a:r>
-            <a:endParaRPr lang="en-US" sz="900" dirty="0"/>
+            <a:endParaRPr lang="ja-JP" sz="900" noProof="0" dirty="0"/>
           </a:p>
         </p:txBody>
       </p:sp>
@@ -8357,6 +8541,7 @@
         <a:solidFill>
           <a:srgbClr val="FFFFFF"/>
         </a:solidFill>
+        <a:effectLst/>
       </p:bgPr>
     </p:bg>
     <p:spTree>
@@ -8392,6 +8577,13 @@
           </a:solidFill>
           <a:ln/>
         </p:spPr>
+        <p:txBody>
+          <a:bodyPr/>
+          <a:lstStyle/>
+          <a:p>
+            <a:endParaRPr lang="ja-JP" noProof="0" dirty="0"/>
+          </a:p>
+        </p:txBody>
       </p:sp>
       <p:sp>
         <p:nvSpPr>
@@ -8414,11 +8606,11 @@
           <a:bodyPr wrap="square" rtlCol="0" anchor="ctr"/>
           <a:lstStyle/>
           <a:p>
-            <a:pPr indent="0" marL="0">
-              <a:buNone/>
-            </a:pPr>
-            <a:r>
-              <a:rPr lang="en-US" sz="2300" b="1" dirty="0">
+            <a:pPr marL="0" indent="0">
+              <a:buNone/>
+            </a:pPr>
+            <a:r>
+              <a:rPr lang="ja-JP" sz="2300" b="1" noProof="0" dirty="0">
                 <a:solidFill>
                   <a:srgbClr val="FFFFFF"/>
                 </a:solidFill>
@@ -8428,7 +8620,7 @@
               </a:rPr>
               <a:t>02  クイックスタート</a:t>
             </a:r>
-            <a:endParaRPr lang="en-US" sz="2300" dirty="0"/>
+            <a:endParaRPr lang="ja-JP" sz="2300" noProof="0" dirty="0"/>
           </a:p>
         </p:txBody>
       </p:sp>
@@ -8441,7 +8633,7 @@
         <p:spPr>
           <a:xfrm>
             <a:off x="320040" y="960120"/>
-            <a:ext cx="4114800" cy="1627632"/>
+            <a:ext cx="4251960" cy="1627632"/>
           </a:xfrm>
           <a:prstGeom prst="rect">
             <a:avLst/>
@@ -8451,13 +8643,20 @@
           </a:solidFill>
           <a:ln/>
           <a:effectLst>
-            <a:outerShdw sx="100000" sy="100000" kx="0" ky="0" algn="bl" rotWithShape="0" blurRad="76200" dist="38100" dir="8100000">
+            <a:outerShdw blurRad="76200" dist="38100" dir="8100000" algn="bl" rotWithShape="0">
               <a:srgbClr val="1E40AF">
                 <a:alpha val="10000"/>
               </a:srgbClr>
             </a:outerShdw>
           </a:effectLst>
         </p:spPr>
+        <p:txBody>
+          <a:bodyPr/>
+          <a:lstStyle/>
+          <a:p>
+            <a:endParaRPr lang="ja-JP" noProof="0" dirty="0"/>
+          </a:p>
+        </p:txBody>
       </p:sp>
       <p:sp>
         <p:nvSpPr>
@@ -8478,6 +8677,13 @@
           </a:solidFill>
           <a:ln/>
         </p:spPr>
+        <p:txBody>
+          <a:bodyPr/>
+          <a:lstStyle/>
+          <a:p>
+            <a:endParaRPr lang="ja-JP" noProof="0" dirty="0"/>
+          </a:p>
+        </p:txBody>
       </p:sp>
       <p:sp>
         <p:nvSpPr>
@@ -8500,18 +8706,18 @@
           <a:bodyPr wrap="square" rtlCol="0" anchor="ctr"/>
           <a:lstStyle/>
           <a:p>
-            <a:pPr algn="ctr" indent="0" marL="0">
-              <a:buNone/>
-            </a:pPr>
-            <a:r>
-              <a:rPr lang="en-US" sz="1500" b="1" dirty="0">
+            <a:pPr marL="0" indent="0" algn="ctr">
+              <a:buNone/>
+            </a:pPr>
+            <a:r>
+              <a:rPr lang="ja-JP" sz="1500" b="1" noProof="0" dirty="0">
                 <a:solidFill>
                   <a:srgbClr val="FFFFFF"/>
                 </a:solidFill>
               </a:rPr>
               <a:t>1</a:t>
             </a:r>
-            <a:endParaRPr lang="en-US" sz="1500" dirty="0"/>
+            <a:endParaRPr lang="ja-JP" sz="1500" noProof="0" dirty="0"/>
           </a:p>
         </p:txBody>
       </p:sp>
@@ -8524,30 +8730,30 @@
         <p:spPr>
           <a:xfrm>
             <a:off x="1088136" y="1124712"/>
-            <a:ext cx="3218688" cy="411480"/>
-          </a:xfrm>
-          <a:prstGeom prst="rect">
-            <a:avLst/>
-          </a:prstGeom>
-          <a:noFill/>
-          <a:ln/>
-        </p:spPr>
-        <p:txBody>
-          <a:bodyPr wrap="square" rtlCol="0" anchor="ctr"/>
-          <a:lstStyle/>
-          <a:p>
-            <a:pPr indent="0" marL="0">
-              <a:buNone/>
-            </a:pPr>
-            <a:r>
-              <a:rPr lang="en-US" sz="1150" b="1" dirty="0">
+            <a:ext cx="3621026" cy="411480"/>
+          </a:xfrm>
+          <a:prstGeom prst="rect">
+            <a:avLst/>
+          </a:prstGeom>
+          <a:noFill/>
+          <a:ln/>
+        </p:spPr>
+        <p:txBody>
+          <a:bodyPr wrap="square" rtlCol="0" anchor="ctr"/>
+          <a:lstStyle/>
+          <a:p>
+            <a:pPr marL="0" indent="0">
+              <a:buNone/>
+            </a:pPr>
+            <a:r>
+              <a:rPr lang="ja-JP" sz="1250" b="1" noProof="0" dirty="0">
                 <a:solidFill>
                   <a:srgbClr val="1E40AF"/>
                 </a:solidFill>
               </a:rPr>
               <a:t>config フォルダをプログラムと同じ場所に置く</a:t>
             </a:r>
-            <a:endParaRPr lang="en-US" sz="1150" dirty="0"/>
+            <a:endParaRPr lang="ja-JP" sz="1250" noProof="0" dirty="0"/>
           </a:p>
         </p:txBody>
       </p:sp>
@@ -8572,18 +8778,18 @@
           <a:bodyPr wrap="square" rtlCol="0" anchor="ctr"/>
           <a:lstStyle/>
           <a:p>
-            <a:pPr indent="0" marL="0">
-              <a:buNone/>
-            </a:pPr>
-            <a:r>
-              <a:rPr lang="en-US" sz="1050" dirty="0">
+            <a:pPr marL="0" indent="0">
+              <a:buNone/>
+            </a:pPr>
+            <a:r>
+              <a:rPr lang="ja-JP" sz="1200" noProof="0" dirty="0">
                 <a:solidFill>
                   <a:srgbClr val="1E293B"/>
                 </a:solidFill>
               </a:rPr>
               <a:t>school_config.json（学校共通）と teacher_config.json（個人）が必要です。初回起動時に自動作成されます。</a:t>
             </a:r>
-            <a:endParaRPr lang="en-US" sz="1050" dirty="0"/>
+            <a:endParaRPr lang="ja-JP" sz="1200" noProof="0" dirty="0"/>
           </a:p>
         </p:txBody>
       </p:sp>
@@ -8596,7 +8802,7 @@
         <p:spPr>
           <a:xfrm>
             <a:off x="320040" y="2788920"/>
-            <a:ext cx="4114800" cy="1627632"/>
+            <a:ext cx="4251960" cy="1627632"/>
           </a:xfrm>
           <a:prstGeom prst="rect">
             <a:avLst/>
@@ -8606,13 +8812,20 @@
           </a:solidFill>
           <a:ln/>
           <a:effectLst>
-            <a:outerShdw sx="100000" sy="100000" kx="0" ky="0" algn="bl" rotWithShape="0" blurRad="76200" dist="38100" dir="8100000">
+            <a:outerShdw blurRad="76200" dist="38100" dir="8100000" algn="bl" rotWithShape="0">
               <a:srgbClr val="1E40AF">
                 <a:alpha val="10000"/>
               </a:srgbClr>
             </a:outerShdw>
           </a:effectLst>
         </p:spPr>
+        <p:txBody>
+          <a:bodyPr/>
+          <a:lstStyle/>
+          <a:p>
+            <a:endParaRPr lang="ja-JP" noProof="0" dirty="0"/>
+          </a:p>
+        </p:txBody>
       </p:sp>
       <p:sp>
         <p:nvSpPr>
@@ -8633,6 +8846,13 @@
           </a:solidFill>
           <a:ln/>
         </p:spPr>
+        <p:txBody>
+          <a:bodyPr/>
+          <a:lstStyle/>
+          <a:p>
+            <a:endParaRPr lang="ja-JP" noProof="0" dirty="0"/>
+          </a:p>
+        </p:txBody>
       </p:sp>
       <p:sp>
         <p:nvSpPr>
@@ -8655,18 +8875,18 @@
           <a:bodyPr wrap="square" rtlCol="0" anchor="ctr"/>
           <a:lstStyle/>
           <a:p>
-            <a:pPr algn="ctr" indent="0" marL="0">
-              <a:buNone/>
-            </a:pPr>
-            <a:r>
-              <a:rPr lang="en-US" sz="1500" b="1" dirty="0">
+            <a:pPr marL="0" indent="0" algn="ctr">
+              <a:buNone/>
+            </a:pPr>
+            <a:r>
+              <a:rPr lang="ja-JP" sz="1500" b="1" noProof="0" dirty="0">
                 <a:solidFill>
                   <a:srgbClr val="FFFFFF"/>
                 </a:solidFill>
               </a:rPr>
               <a:t>2</a:t>
             </a:r>
-            <a:endParaRPr lang="en-US" sz="1500" dirty="0"/>
+            <a:endParaRPr lang="ja-JP" sz="1500" noProof="0" dirty="0"/>
           </a:p>
         </p:txBody>
       </p:sp>
@@ -8691,18 +8911,18 @@
           <a:bodyPr wrap="square" rtlCol="0" anchor="ctr"/>
           <a:lstStyle/>
           <a:p>
-            <a:pPr indent="0" marL="0">
-              <a:buNone/>
-            </a:pPr>
-            <a:r>
-              <a:rPr lang="en-US" sz="1150" b="1" dirty="0">
+            <a:pPr marL="0" indent="0">
+              <a:buNone/>
+            </a:pPr>
+            <a:r>
+              <a:rPr lang="ja-JP" sz="1250" b="1" noProof="0" dirty="0">
                 <a:solidFill>
                   <a:srgbClr val="1E40AF"/>
                 </a:solidFill>
               </a:rPr>
               <a:t>プログラムをダブルクリックして起動</a:t>
             </a:r>
-            <a:endParaRPr lang="en-US" sz="1150" dirty="0"/>
+            <a:endParaRPr lang="ja-JP" sz="1250" noProof="0" dirty="0"/>
           </a:p>
         </p:txBody>
       </p:sp>
@@ -8715,44 +8935,57 @@
         <p:spPr>
           <a:xfrm>
             <a:off x="521208" y="3447288"/>
-            <a:ext cx="3749040" cy="841248"/>
-          </a:xfrm>
-          <a:prstGeom prst="rect">
-            <a:avLst/>
-          </a:prstGeom>
-          <a:noFill/>
-          <a:ln/>
-        </p:spPr>
-        <p:txBody>
-          <a:bodyPr wrap="square" rtlCol="0" anchor="ctr"/>
-          <a:lstStyle/>
-          <a:p>
-            <a:pPr indent="0" marL="0">
-              <a:buNone/>
-            </a:pPr>
-            <a:r>
-              <a:rPr lang="en-US" sz="1050" dirty="0">
+            <a:ext cx="2978991" cy="969264"/>
+          </a:xfrm>
+          <a:prstGeom prst="rect">
+            <a:avLst/>
+          </a:prstGeom>
+          <a:noFill/>
+          <a:ln/>
+        </p:spPr>
+        <p:txBody>
+          <a:bodyPr wrap="square" rtlCol="0" anchor="ctr"/>
+          <a:lstStyle/>
+          <a:p>
+            <a:pPr marL="0" indent="0">
+              <a:buNone/>
+            </a:pPr>
+            <a:r>
+              <a:rPr lang="ja-JP" sz="1200" noProof="0" dirty="0">
                 <a:solidFill>
                   <a:srgbClr val="1E293B"/>
                 </a:solidFill>
               </a:rPr>
-              <a:t>Windows: CodeWidget.exe  /  macOS: CodeWidget.app</a:t>
-            </a:r>
-            <a:endParaRPr lang="en-US" sz="1050" dirty="0"/>
-          </a:p>
-          <a:p>
-            <a:pPr indent="0" marL="0">
-              <a:buNone/>
-            </a:pPr>
-            <a:r>
-              <a:rPr lang="en-US" sz="1050" dirty="0">
+              <a:t>Windows: CodeWidget.exe  </a:t>
+            </a:r>
+          </a:p>
+          <a:p>
+            <a:pPr marL="0" indent="0">
+              <a:buNone/>
+            </a:pPr>
+            <a:r>
+              <a:rPr lang="ja-JP" sz="1200" noProof="0" dirty="0">
                 <a:solidFill>
                   <a:srgbClr val="1E293B"/>
                 </a:solidFill>
               </a:rPr>
+              <a:t>macOS: CodeWidget.app</a:t>
+            </a:r>
+            <a:endParaRPr lang="ja-JP" sz="1200" noProof="0" dirty="0"/>
+          </a:p>
+          <a:p>
+            <a:pPr marL="0" indent="0">
+              <a:buNone/>
+            </a:pPr>
+            <a:r>
+              <a:rPr lang="ja-JP" sz="1200" noProof="0" dirty="0">
+                <a:solidFill>
+                  <a:srgbClr val="1E293B"/>
+                </a:solidFill>
+              </a:rPr>
               <a:t>起動後、システムトレイ（タスクバー右下 / メニューバー）にアイコンが表示されます。</a:t>
             </a:r>
-            <a:endParaRPr lang="en-US" sz="1050" dirty="0"/>
+            <a:endParaRPr lang="ja-JP" sz="1200" noProof="0" dirty="0"/>
           </a:p>
         </p:txBody>
       </p:sp>
@@ -8775,13 +9008,20 @@
           </a:solidFill>
           <a:ln/>
           <a:effectLst>
-            <a:outerShdw sx="100000" sy="100000" kx="0" ky="0" algn="bl" rotWithShape="0" blurRad="76200" dist="38100" dir="8100000">
+            <a:outerShdw blurRad="76200" dist="38100" dir="8100000" algn="bl" rotWithShape="0">
               <a:srgbClr val="1E40AF">
                 <a:alpha val="10000"/>
               </a:srgbClr>
             </a:outerShdw>
           </a:effectLst>
         </p:spPr>
+        <p:txBody>
+          <a:bodyPr/>
+          <a:lstStyle/>
+          <a:p>
+            <a:endParaRPr lang="ja-JP" noProof="0" dirty="0"/>
+          </a:p>
+        </p:txBody>
       </p:sp>
       <p:sp>
         <p:nvSpPr>
@@ -8802,6 +9042,13 @@
           </a:solidFill>
           <a:ln/>
         </p:spPr>
+        <p:txBody>
+          <a:bodyPr/>
+          <a:lstStyle/>
+          <a:p>
+            <a:endParaRPr lang="ja-JP" noProof="0" dirty="0"/>
+          </a:p>
+        </p:txBody>
       </p:sp>
       <p:sp>
         <p:nvSpPr>
@@ -8824,18 +9071,18 @@
           <a:bodyPr wrap="square" rtlCol="0" anchor="ctr"/>
           <a:lstStyle/>
           <a:p>
-            <a:pPr algn="ctr" indent="0" marL="0">
-              <a:buNone/>
-            </a:pPr>
-            <a:r>
-              <a:rPr lang="en-US" sz="1500" b="1" dirty="0">
+            <a:pPr marL="0" indent="0" algn="ctr">
+              <a:buNone/>
+            </a:pPr>
+            <a:r>
+              <a:rPr lang="ja-JP" sz="1500" b="1" noProof="0" dirty="0">
                 <a:solidFill>
                   <a:srgbClr val="FFFFFF"/>
                 </a:solidFill>
               </a:rPr>
               <a:t>3</a:t>
             </a:r>
-            <a:endParaRPr lang="en-US" sz="1500" dirty="0"/>
+            <a:endParaRPr lang="ja-JP" sz="1500" noProof="0" dirty="0"/>
           </a:p>
         </p:txBody>
       </p:sp>
@@ -8860,18 +9107,18 @@
           <a:bodyPr wrap="square" rtlCol="0" anchor="ctr"/>
           <a:lstStyle/>
           <a:p>
-            <a:pPr indent="0" marL="0">
-              <a:buNone/>
-            </a:pPr>
-            <a:r>
-              <a:rPr lang="en-US" sz="1150" b="1" dirty="0">
+            <a:pPr marL="0" indent="0">
+              <a:buNone/>
+            </a:pPr>
+            <a:r>
+              <a:rPr lang="ja-JP" sz="1250" b="1" noProof="0" dirty="0">
                 <a:solidFill>
                   <a:srgbClr val="1E40AF"/>
                 </a:solidFill>
               </a:rPr>
               <a:t>トレイアイコンを右クリック → 「設定…」</a:t>
             </a:r>
-            <a:endParaRPr lang="en-US" sz="1150" dirty="0"/>
+            <a:endParaRPr lang="ja-JP" sz="1250" noProof="0" dirty="0"/>
           </a:p>
         </p:txBody>
       </p:sp>
@@ -8896,18 +9143,18 @@
           <a:bodyPr wrap="square" rtlCol="0" anchor="ctr"/>
           <a:lstStyle/>
           <a:p>
-            <a:pPr indent="0" marL="0">
-              <a:buNone/>
-            </a:pPr>
-            <a:r>
-              <a:rPr lang="en-US" sz="1050" dirty="0">
+            <a:pPr marL="0" indent="0">
+              <a:buNone/>
+            </a:pPr>
+            <a:r>
+              <a:rPr lang="ja-JP" sz="1200" noProof="0" dirty="0">
                 <a:solidFill>
                   <a:srgbClr val="1E293B"/>
                 </a:solidFill>
               </a:rPr>
               <a:t>「授業」タブで授業を追加してください。授業名・曜日・時限を設定します。</a:t>
             </a:r>
-            <a:endParaRPr lang="en-US" sz="1050" dirty="0"/>
+            <a:endParaRPr lang="ja-JP" sz="1200" noProof="0" dirty="0"/>
           </a:p>
         </p:txBody>
       </p:sp>
@@ -8930,13 +9177,20 @@
           </a:solidFill>
           <a:ln/>
           <a:effectLst>
-            <a:outerShdw sx="100000" sy="100000" kx="0" ky="0" algn="bl" rotWithShape="0" blurRad="76200" dist="38100" dir="8100000">
+            <a:outerShdw blurRad="76200" dist="38100" dir="8100000" algn="bl" rotWithShape="0">
               <a:srgbClr val="1E40AF">
                 <a:alpha val="10000"/>
               </a:srgbClr>
             </a:outerShdw>
           </a:effectLst>
         </p:spPr>
+        <p:txBody>
+          <a:bodyPr/>
+          <a:lstStyle/>
+          <a:p>
+            <a:endParaRPr lang="ja-JP" noProof="0" dirty="0"/>
+          </a:p>
+        </p:txBody>
       </p:sp>
       <p:sp>
         <p:nvSpPr>
@@ -8957,6 +9211,13 @@
           </a:solidFill>
           <a:ln/>
         </p:spPr>
+        <p:txBody>
+          <a:bodyPr/>
+          <a:lstStyle/>
+          <a:p>
+            <a:endParaRPr lang="ja-JP" noProof="0" dirty="0"/>
+          </a:p>
+        </p:txBody>
       </p:sp>
       <p:sp>
         <p:nvSpPr>
@@ -8979,18 +9240,18 @@
           <a:bodyPr wrap="square" rtlCol="0" anchor="ctr"/>
           <a:lstStyle/>
           <a:p>
-            <a:pPr algn="ctr" indent="0" marL="0">
-              <a:buNone/>
-            </a:pPr>
-            <a:r>
-              <a:rPr lang="en-US" sz="1500" b="1" dirty="0">
+            <a:pPr marL="0" indent="0" algn="ctr">
+              <a:buNone/>
+            </a:pPr>
+            <a:r>
+              <a:rPr lang="ja-JP" sz="1500" b="1" noProof="0" dirty="0">
                 <a:solidFill>
                   <a:srgbClr val="FFFFFF"/>
                 </a:solidFill>
               </a:rPr>
               <a:t>4</a:t>
             </a:r>
-            <a:endParaRPr lang="en-US" sz="1500" dirty="0"/>
+            <a:endParaRPr lang="ja-JP" sz="1500" noProof="0" dirty="0"/>
           </a:p>
         </p:txBody>
       </p:sp>
@@ -9015,18 +9276,18 @@
           <a:bodyPr wrap="square" rtlCol="0" anchor="ctr"/>
           <a:lstStyle/>
           <a:p>
-            <a:pPr indent="0" marL="0">
-              <a:buNone/>
-            </a:pPr>
-            <a:r>
-              <a:rPr lang="en-US" sz="1150" b="1" dirty="0">
+            <a:pPr marL="0" indent="0">
+              <a:buNone/>
+            </a:pPr>
+            <a:r>
+              <a:rPr lang="ja-JP" sz="1250" b="1" noProof="0" dirty="0">
                 <a:solidFill>
                   <a:srgbClr val="1E40AF"/>
                 </a:solidFill>
               </a:rPr>
               <a:t>授業時間になると自動でポップアップ表示</a:t>
             </a:r>
-            <a:endParaRPr lang="en-US" sz="1150" dirty="0"/>
+            <a:endParaRPr lang="ja-JP" sz="1250" noProof="0" dirty="0"/>
           </a:p>
         </p:txBody>
       </p:sp>
@@ -9051,144 +9312,150 @@
           <a:bodyPr wrap="square" rtlCol="0" anchor="ctr"/>
           <a:lstStyle/>
           <a:p>
-            <a:pPr indent="0" marL="0">
-              <a:buNone/>
-            </a:pPr>
-            <a:r>
-              <a:rPr lang="en-US" sz="1050" dirty="0">
+            <a:pPr marL="0" indent="0">
+              <a:buNone/>
+            </a:pPr>
+            <a:r>
+              <a:rPr lang="ja-JP" sz="1200" noProof="0" dirty="0">
                 <a:solidFill>
                   <a:srgbClr val="1E293B"/>
                 </a:solidFill>
               </a:rPr>
-              <a:t>授業開始 10 分前にウィンドウが自動表示されます。右クリック →「入力」で出席コードを貼り付けるだけです。</a:t>
-            </a:r>
-            <a:endParaRPr lang="en-US" sz="1050" dirty="0"/>
+              <a:t>授業開始の10分前に、ウィンドウが自動的に表示されます。</a:t>
+            </a:r>
+            <a:endParaRPr lang="ja-JP" sz="1200" noProof="0" dirty="0"/>
+          </a:p>
+        </p:txBody>
+      </p:sp>
+      <p:sp>
+        <p:nvSpPr>
+          <p:cNvPr id="25" name="Shape 22"/>
+          <p:cNvSpPr/>
+          <p:nvPr/>
+        </p:nvSpPr>
+        <p:spPr>
+          <a:xfrm>
+            <a:off x="0" y="4892040"/>
+            <a:ext cx="9144000" cy="251460"/>
+          </a:xfrm>
+          <a:prstGeom prst="rect">
+            <a:avLst/>
+          </a:prstGeom>
+          <a:solidFill>
+            <a:srgbClr val="2563EB"/>
+          </a:solidFill>
+          <a:ln/>
+        </p:spPr>
+        <p:txBody>
+          <a:bodyPr/>
+          <a:lstStyle/>
+          <a:p>
+            <a:endParaRPr lang="ja-JP" noProof="0" dirty="0"/>
+          </a:p>
+        </p:txBody>
+      </p:sp>
+      <p:sp>
+        <p:nvSpPr>
+          <p:cNvPr id="26" name="Text 23"/>
+          <p:cNvSpPr/>
+          <p:nvPr/>
+        </p:nvSpPr>
+        <p:spPr>
+          <a:xfrm>
+            <a:off x="365760" y="4892040"/>
+            <a:ext cx="6400800" cy="251460"/>
+          </a:xfrm>
+          <a:prstGeom prst="rect">
+            <a:avLst/>
+          </a:prstGeom>
+          <a:noFill/>
+          <a:ln/>
+        </p:spPr>
+        <p:txBody>
+          <a:bodyPr wrap="square" rtlCol="0" anchor="ctr"/>
+          <a:lstStyle/>
+          <a:p>
+            <a:pPr marL="0" indent="0">
+              <a:buNone/>
+            </a:pPr>
+            <a:r>
+              <a:rPr lang="ja-JP" sz="900" noProof="0" dirty="0">
+                <a:solidFill>
+                  <a:srgbClr val="BFDBFE"/>
+                </a:solidFill>
+              </a:rPr>
+              <a:t>CodeWidget  ユーザーマニュアル</a:t>
+            </a:r>
+            <a:endParaRPr lang="ja-JP" sz="900" noProof="0" dirty="0"/>
+          </a:p>
+        </p:txBody>
+      </p:sp>
+      <p:sp>
+        <p:nvSpPr>
+          <p:cNvPr id="27" name="Text 24"/>
+          <p:cNvSpPr/>
+          <p:nvPr/>
+        </p:nvSpPr>
+        <p:spPr>
+          <a:xfrm>
+            <a:off x="8412480" y="4892040"/>
+            <a:ext cx="548640" cy="251460"/>
+          </a:xfrm>
+          <a:prstGeom prst="rect">
+            <a:avLst/>
+          </a:prstGeom>
+          <a:noFill/>
+          <a:ln/>
+        </p:spPr>
+        <p:txBody>
+          <a:bodyPr wrap="square" rtlCol="0" anchor="ctr"/>
+          <a:lstStyle/>
+          <a:p>
+            <a:pPr marL="0" indent="0" algn="r">
+              <a:buNone/>
+            </a:pPr>
+            <a:r>
+              <a:rPr lang="ja-JP" sz="900" noProof="0" dirty="0">
+                <a:solidFill>
+                  <a:srgbClr val="BFDBFE"/>
+                </a:solidFill>
+              </a:rPr>
+              <a:t>4</a:t>
+            </a:r>
+            <a:endParaRPr lang="ja-JP" sz="900" noProof="0" dirty="0"/>
           </a:p>
         </p:txBody>
       </p:sp>
       <p:pic>
         <p:nvPicPr>
-          <p:cNvPr id="24" name="Image 0" descr="preencoded.png">    </p:cNvPr>
+          <p:cNvPr id="29" name="图片 28" descr="图标&#10;&#10;AI 生成的内容可能不正确。">
+            <a:extLst>
+              <a:ext uri="{FF2B5EF4-FFF2-40B4-BE49-F238E27FC236}">
+                <a16:creationId xmlns:a16="http://schemas.microsoft.com/office/drawing/2014/main" id="{3A031AC4-40F9-74A2-5F8C-3CC7A6D63419}"/>
+              </a:ext>
+            </a:extLst>
+          </p:cNvPr>
           <p:cNvPicPr>
             <a:picLocks noChangeAspect="1"/>
           </p:cNvPicPr>
           <p:nvPr/>
         </p:nvPicPr>
         <p:blipFill>
-          <a:blip r:embed="rId1"/>
+          <a:blip r:embed="rId3"/>
           <a:stretch>
             <a:fillRect/>
           </a:stretch>
         </p:blipFill>
         <p:spPr>
           <a:xfrm>
-            <a:off x="4754880" y="2834640"/>
-            <a:ext cx="4114800" cy="1499616"/>
-          </a:xfrm>
-          <a:prstGeom prst="rect">
-            <a:avLst/>
-          </a:prstGeom>
-          <a:effectLst>
-            <a:outerShdw sx="100000" sy="100000" kx="0" ky="0" algn="bl" rotWithShape="0" blurRad="76200" dist="38100" dir="8100000">
-              <a:srgbClr val="1E40AF">
-                <a:alpha val="10000"/>
-              </a:srgbClr>
-            </a:outerShdw>
-          </a:effectLst>
+            <a:off x="3735038" y="3639312"/>
+            <a:ext cx="464963" cy="464963"/>
+          </a:xfrm>
+          <a:prstGeom prst="rect">
+            <a:avLst/>
+          </a:prstGeom>
         </p:spPr>
       </p:pic>
-      <p:sp>
-        <p:nvSpPr>
-          <p:cNvPr id="25" name="Shape 22"/>
-          <p:cNvSpPr/>
-          <p:nvPr/>
-        </p:nvSpPr>
-        <p:spPr>
-          <a:xfrm>
-            <a:off x="0" y="4892040"/>
-            <a:ext cx="9144000" cy="251460"/>
-          </a:xfrm>
-          <a:prstGeom prst="rect">
-            <a:avLst/>
-          </a:prstGeom>
-          <a:solidFill>
-            <a:srgbClr val="2563EB"/>
-          </a:solidFill>
-          <a:ln/>
-        </p:spPr>
-      </p:sp>
-      <p:sp>
-        <p:nvSpPr>
-          <p:cNvPr id="26" name="Text 23"/>
-          <p:cNvSpPr/>
-          <p:nvPr/>
-        </p:nvSpPr>
-        <p:spPr>
-          <a:xfrm>
-            <a:off x="365760" y="4892040"/>
-            <a:ext cx="6400800" cy="251460"/>
-          </a:xfrm>
-          <a:prstGeom prst="rect">
-            <a:avLst/>
-          </a:prstGeom>
-          <a:noFill/>
-          <a:ln/>
-        </p:spPr>
-        <p:txBody>
-          <a:bodyPr wrap="square" rtlCol="0" anchor="ctr"/>
-          <a:lstStyle/>
-          <a:p>
-            <a:pPr indent="0" marL="0">
-              <a:buNone/>
-            </a:pPr>
-            <a:r>
-              <a:rPr lang="en-US" sz="900" dirty="0">
-                <a:solidFill>
-                  <a:srgbClr val="BFDBFE"/>
-                </a:solidFill>
-              </a:rPr>
-              <a:t>CodeWidget  ユーザーマニュアル</a:t>
-            </a:r>
-            <a:endParaRPr lang="en-US" sz="900" dirty="0"/>
-          </a:p>
-        </p:txBody>
-      </p:sp>
-      <p:sp>
-        <p:nvSpPr>
-          <p:cNvPr id="27" name="Text 24"/>
-          <p:cNvSpPr/>
-          <p:nvPr/>
-        </p:nvSpPr>
-        <p:spPr>
-          <a:xfrm>
-            <a:off x="8412480" y="4892040"/>
-            <a:ext cx="548640" cy="251460"/>
-          </a:xfrm>
-          <a:prstGeom prst="rect">
-            <a:avLst/>
-          </a:prstGeom>
-          <a:noFill/>
-          <a:ln/>
-        </p:spPr>
-        <p:txBody>
-          <a:bodyPr wrap="square" rtlCol="0" anchor="ctr"/>
-          <a:lstStyle/>
-          <a:p>
-            <a:pPr algn="r" indent="0" marL="0">
-              <a:buNone/>
-            </a:pPr>
-            <a:r>
-              <a:rPr lang="en-US" sz="900" dirty="0">
-                <a:solidFill>
-                  <a:srgbClr val="BFDBFE"/>
-                </a:solidFill>
-              </a:rPr>
-              <a:t>4</a:t>
-            </a:r>
-            <a:endParaRPr lang="en-US" sz="900" dirty="0"/>
-          </a:p>
-        </p:txBody>
-      </p:sp>
     </p:spTree>
   </p:cSld>
   <p:clrMapOvr>
@@ -9205,6 +9472,7 @@
         <a:solidFill>
           <a:srgbClr val="FFFFFF"/>
         </a:solidFill>
+        <a:effectLst/>
       </p:bgPr>
     </p:bg>
     <p:spTree>
@@ -9240,6 +9508,13 @@
           </a:solidFill>
           <a:ln/>
         </p:spPr>
+        <p:txBody>
+          <a:bodyPr/>
+          <a:lstStyle/>
+          <a:p>
+            <a:endParaRPr lang="ja-JP" noProof="0" dirty="0"/>
+          </a:p>
+        </p:txBody>
       </p:sp>
       <p:sp>
         <p:nvSpPr>
@@ -9262,11 +9537,11 @@
           <a:bodyPr wrap="square" rtlCol="0" anchor="ctr"/>
           <a:lstStyle/>
           <a:p>
-            <a:pPr indent="0" marL="0">
-              <a:buNone/>
-            </a:pPr>
-            <a:r>
-              <a:rPr lang="en-US" sz="2300" b="1" dirty="0">
+            <a:pPr marL="0" indent="0">
+              <a:buNone/>
+            </a:pPr>
+            <a:r>
+              <a:rPr lang="ja-JP" sz="2300" b="1" noProof="0" dirty="0">
                 <a:solidFill>
                   <a:srgbClr val="FFFFFF"/>
                 </a:solidFill>
@@ -9276,7 +9551,7 @@
               </a:rPr>
               <a:t>02  クイックスタート — 時限・時間割</a:t>
             </a:r>
-            <a:endParaRPr lang="en-US" sz="2300" dirty="0"/>
+            <a:endParaRPr lang="ja-JP" sz="2300" noProof="0" dirty="0"/>
           </a:p>
         </p:txBody>
       </p:sp>
@@ -9301,18 +9576,18 @@
           <a:bodyPr wrap="square" rtlCol="0" anchor="ctr"/>
           <a:lstStyle/>
           <a:p>
-            <a:pPr indent="0" marL="0">
-              <a:buNone/>
-            </a:pPr>
-            <a:r>
-              <a:rPr lang="en-US" sz="1250" dirty="0">
+            <a:pPr marL="0" indent="0">
+              <a:buNone/>
+            </a:pPr>
+            <a:r>
+              <a:rPr lang="ja-JP" sz="1250" noProof="0" dirty="0">
                 <a:solidFill>
                   <a:srgbClr val="1E293B"/>
                 </a:solidFill>
               </a:rPr>
               <a:t>1日 6 時限が固定されています。授業開始 10 分前にウィンドウが自動表示されます：</a:t>
             </a:r>
-            <a:endParaRPr lang="en-US" sz="1250" dirty="0"/>
+            <a:endParaRPr lang="ja-JP" sz="1250" noProof="0" dirty="0"/>
           </a:p>
         </p:txBody>
       </p:sp>
@@ -9335,6 +9610,13 @@
           </a:solidFill>
           <a:ln/>
         </p:spPr>
+        <p:txBody>
+          <a:bodyPr/>
+          <a:lstStyle/>
+          <a:p>
+            <a:endParaRPr lang="ja-JP" noProof="0" dirty="0"/>
+          </a:p>
+        </p:txBody>
       </p:sp>
       <p:sp>
         <p:nvSpPr>
@@ -9357,18 +9639,18 @@
           <a:bodyPr wrap="square" lIns="0" tIns="76200" rIns="76200" bIns="0" rtlCol="0" anchor="ctr"/>
           <a:lstStyle/>
           <a:p>
-            <a:pPr algn="ctr" indent="0" marL="0">
-              <a:buNone/>
-            </a:pPr>
-            <a:r>
-              <a:rPr lang="en-US" sz="1150" b="1" dirty="0">
+            <a:pPr marL="0" indent="0" algn="ctr">
+              <a:buNone/>
+            </a:pPr>
+            <a:r>
+              <a:rPr lang="ja-JP" sz="1150" b="1" noProof="0" dirty="0">
                 <a:solidFill>
                   <a:srgbClr val="FFFFFF"/>
                 </a:solidFill>
               </a:rPr>
               <a:t>時限</a:t>
             </a:r>
-            <a:endParaRPr lang="en-US" sz="1150" dirty="0"/>
+            <a:endParaRPr lang="ja-JP" sz="1150" noProof="0" dirty="0"/>
           </a:p>
         </p:txBody>
       </p:sp>
@@ -9391,6 +9673,13 @@
           </a:solidFill>
           <a:ln/>
         </p:spPr>
+        <p:txBody>
+          <a:bodyPr/>
+          <a:lstStyle/>
+          <a:p>
+            <a:endParaRPr lang="ja-JP" noProof="0" dirty="0"/>
+          </a:p>
+        </p:txBody>
       </p:sp>
       <p:sp>
         <p:nvSpPr>
@@ -9413,18 +9702,18 @@
           <a:bodyPr wrap="square" lIns="0" tIns="76200" rIns="76200" bIns="0" rtlCol="0" anchor="ctr"/>
           <a:lstStyle/>
           <a:p>
-            <a:pPr algn="ctr" indent="0" marL="0">
-              <a:buNone/>
-            </a:pPr>
-            <a:r>
-              <a:rPr lang="en-US" sz="1150" b="1" dirty="0">
+            <a:pPr marL="0" indent="0" algn="ctr">
+              <a:buNone/>
+            </a:pPr>
+            <a:r>
+              <a:rPr lang="ja-JP" sz="1150" b="1" noProof="0" dirty="0">
                 <a:solidFill>
                   <a:srgbClr val="FFFFFF"/>
                 </a:solidFill>
               </a:rPr>
               <a:t>開始</a:t>
             </a:r>
-            <a:endParaRPr lang="en-US" sz="1150" dirty="0"/>
+            <a:endParaRPr lang="ja-JP" sz="1150" noProof="0" dirty="0"/>
           </a:p>
         </p:txBody>
       </p:sp>
@@ -9447,6 +9736,13 @@
           </a:solidFill>
           <a:ln/>
         </p:spPr>
+        <p:txBody>
+          <a:bodyPr/>
+          <a:lstStyle/>
+          <a:p>
+            <a:endParaRPr lang="ja-JP" noProof="0" dirty="0"/>
+          </a:p>
+        </p:txBody>
       </p:sp>
       <p:sp>
         <p:nvSpPr>
@@ -9469,18 +9765,18 @@
           <a:bodyPr wrap="square" lIns="0" tIns="76200" rIns="76200" bIns="0" rtlCol="0" anchor="ctr"/>
           <a:lstStyle/>
           <a:p>
-            <a:pPr algn="ctr" indent="0" marL="0">
-              <a:buNone/>
-            </a:pPr>
-            <a:r>
-              <a:rPr lang="en-US" sz="1150" b="1" dirty="0">
+            <a:pPr marL="0" indent="0" algn="ctr">
+              <a:buNone/>
+            </a:pPr>
+            <a:r>
+              <a:rPr lang="ja-JP" sz="1150" b="1" noProof="0" dirty="0">
                 <a:solidFill>
                   <a:srgbClr val="FFFFFF"/>
                 </a:solidFill>
               </a:rPr>
               <a:t>終了</a:t>
             </a:r>
-            <a:endParaRPr lang="en-US" sz="1150" dirty="0"/>
+            <a:endParaRPr lang="ja-JP" sz="1150" noProof="0" dirty="0"/>
           </a:p>
         </p:txBody>
       </p:sp>
@@ -9503,6 +9799,13 @@
           </a:solidFill>
           <a:ln/>
         </p:spPr>
+        <p:txBody>
+          <a:bodyPr/>
+          <a:lstStyle/>
+          <a:p>
+            <a:endParaRPr lang="ja-JP" noProof="0" dirty="0"/>
+          </a:p>
+        </p:txBody>
       </p:sp>
       <p:sp>
         <p:nvSpPr>
@@ -9525,18 +9828,18 @@
           <a:bodyPr wrap="square" lIns="0" tIns="76200" rIns="76200" bIns="0" rtlCol="0" anchor="ctr"/>
           <a:lstStyle/>
           <a:p>
-            <a:pPr algn="l" indent="0" marL="0">
-              <a:buNone/>
-            </a:pPr>
-            <a:r>
-              <a:rPr lang="en-US" sz="1150" b="1" dirty="0">
+            <a:pPr marL="0" indent="0" algn="l">
+              <a:buNone/>
+            </a:pPr>
+            <a:r>
+              <a:rPr lang="ja-JP" sz="1150" b="1" noProof="0" dirty="0">
                 <a:solidFill>
                   <a:srgbClr val="FFFFFF"/>
                 </a:solidFill>
               </a:rPr>
               <a:t>表示ウィンドウ期間（デフォルト）</a:t>
             </a:r>
-            <a:endParaRPr lang="en-US" sz="1150" dirty="0"/>
+            <a:endParaRPr lang="ja-JP" sz="1150" noProof="0" dirty="0"/>
           </a:p>
         </p:txBody>
       </p:sp>
@@ -9559,6 +9862,13 @@
           </a:solidFill>
           <a:ln/>
         </p:spPr>
+        <p:txBody>
+          <a:bodyPr/>
+          <a:lstStyle/>
+          <a:p>
+            <a:endParaRPr lang="ja-JP" noProof="0" dirty="0"/>
+          </a:p>
+        </p:txBody>
       </p:sp>
       <p:sp>
         <p:nvSpPr>
@@ -9581,18 +9891,18 @@
           <a:bodyPr wrap="square" lIns="0" tIns="76200" rIns="76200" bIns="0" rtlCol="0" anchor="ctr"/>
           <a:lstStyle/>
           <a:p>
-            <a:pPr algn="ctr" indent="0" marL="0">
-              <a:buNone/>
-            </a:pPr>
-            <a:r>
-              <a:rPr lang="en-US" sz="1150" b="1" dirty="0">
+            <a:pPr marL="0" indent="0" algn="ctr">
+              <a:buNone/>
+            </a:pPr>
+            <a:r>
+              <a:rPr lang="ja-JP" sz="1150" b="1" noProof="0" dirty="0">
                 <a:solidFill>
                   <a:srgbClr val="1E293B"/>
                 </a:solidFill>
               </a:rPr>
               <a:t>1限</a:t>
             </a:r>
-            <a:endParaRPr lang="en-US" sz="1150" dirty="0"/>
+            <a:endParaRPr lang="ja-JP" sz="1150" noProof="0" dirty="0"/>
           </a:p>
         </p:txBody>
       </p:sp>
@@ -9615,6 +9925,13 @@
           </a:solidFill>
           <a:ln/>
         </p:spPr>
+        <p:txBody>
+          <a:bodyPr/>
+          <a:lstStyle/>
+          <a:p>
+            <a:endParaRPr lang="ja-JP" noProof="0" dirty="0"/>
+          </a:p>
+        </p:txBody>
       </p:sp>
       <p:sp>
         <p:nvSpPr>
@@ -9637,18 +9954,18 @@
           <a:bodyPr wrap="square" lIns="0" tIns="76200" rIns="76200" bIns="0" rtlCol="0" anchor="ctr"/>
           <a:lstStyle/>
           <a:p>
-            <a:pPr algn="l" indent="0" marL="0">
-              <a:buNone/>
-            </a:pPr>
-            <a:r>
-              <a:rPr lang="en-US" sz="1150" dirty="0">
+            <a:pPr marL="0" indent="0" algn="l">
+              <a:buNone/>
+            </a:pPr>
+            <a:r>
+              <a:rPr lang="ja-JP" sz="1150" noProof="0" dirty="0">
                 <a:solidFill>
                   <a:srgbClr val="1E293B"/>
                 </a:solidFill>
               </a:rPr>
               <a:t>08:50</a:t>
             </a:r>
-            <a:endParaRPr lang="en-US" sz="1150" dirty="0"/>
+            <a:endParaRPr lang="ja-JP" sz="1150" noProof="0" dirty="0"/>
           </a:p>
         </p:txBody>
       </p:sp>
@@ -9671,6 +9988,13 @@
           </a:solidFill>
           <a:ln/>
         </p:spPr>
+        <p:txBody>
+          <a:bodyPr/>
+          <a:lstStyle/>
+          <a:p>
+            <a:endParaRPr lang="ja-JP" noProof="0" dirty="0"/>
+          </a:p>
+        </p:txBody>
       </p:sp>
       <p:sp>
         <p:nvSpPr>
@@ -9693,18 +10017,18 @@
           <a:bodyPr wrap="square" lIns="0" tIns="76200" rIns="76200" bIns="0" rtlCol="0" anchor="ctr"/>
           <a:lstStyle/>
           <a:p>
-            <a:pPr algn="l" indent="0" marL="0">
-              <a:buNone/>
-            </a:pPr>
-            <a:r>
-              <a:rPr lang="en-US" sz="1150" dirty="0">
+            <a:pPr marL="0" indent="0" algn="l">
+              <a:buNone/>
+            </a:pPr>
+            <a:r>
+              <a:rPr lang="ja-JP" sz="1150" noProof="0" dirty="0">
                 <a:solidFill>
                   <a:srgbClr val="1E293B"/>
                 </a:solidFill>
               </a:rPr>
               <a:t>10:30</a:t>
             </a:r>
-            <a:endParaRPr lang="en-US" sz="1150" dirty="0"/>
+            <a:endParaRPr lang="ja-JP" sz="1150" noProof="0" dirty="0"/>
           </a:p>
         </p:txBody>
       </p:sp>
@@ -9727,6 +10051,13 @@
           </a:solidFill>
           <a:ln/>
         </p:spPr>
+        <p:txBody>
+          <a:bodyPr/>
+          <a:lstStyle/>
+          <a:p>
+            <a:endParaRPr lang="ja-JP" noProof="0" dirty="0"/>
+          </a:p>
+        </p:txBody>
       </p:sp>
       <p:sp>
         <p:nvSpPr>
@@ -9749,18 +10080,18 @@
           <a:bodyPr wrap="square" lIns="0" tIns="76200" rIns="76200" bIns="0" rtlCol="0" anchor="ctr"/>
           <a:lstStyle/>
           <a:p>
-            <a:pPr algn="l" indent="0" marL="0">
-              <a:buNone/>
-            </a:pPr>
-            <a:r>
-              <a:rPr lang="en-US" sz="1150" dirty="0">
+            <a:pPr marL="0" indent="0" algn="l">
+              <a:buNone/>
+            </a:pPr>
+            <a:r>
+              <a:rPr lang="ja-JP" sz="1150" noProof="0" dirty="0">
                 <a:solidFill>
                   <a:srgbClr val="3B82F6"/>
                 </a:solidFill>
               </a:rPr>
-              <a:t>08:40 〜 09:20 　ウィンドウ表示</a:t>
-            </a:r>
-            <a:endParaRPr lang="en-US" sz="1150" dirty="0"/>
+              <a:t>08:40 〜 09:20 　</a:t>
+            </a:r>
+            <a:endParaRPr lang="ja-JP" sz="1150" noProof="0" dirty="0"/>
           </a:p>
         </p:txBody>
       </p:sp>
@@ -9783,6 +10114,13 @@
           </a:solidFill>
           <a:ln/>
         </p:spPr>
+        <p:txBody>
+          <a:bodyPr/>
+          <a:lstStyle/>
+          <a:p>
+            <a:endParaRPr lang="ja-JP" noProof="0" dirty="0"/>
+          </a:p>
+        </p:txBody>
       </p:sp>
       <p:sp>
         <p:nvSpPr>
@@ -9805,18 +10143,18 @@
           <a:bodyPr wrap="square" lIns="0" tIns="76200" rIns="76200" bIns="0" rtlCol="0" anchor="ctr"/>
           <a:lstStyle/>
           <a:p>
-            <a:pPr algn="ctr" indent="0" marL="0">
-              <a:buNone/>
-            </a:pPr>
-            <a:r>
-              <a:rPr lang="en-US" sz="1150" b="1" dirty="0">
+            <a:pPr marL="0" indent="0" algn="ctr">
+              <a:buNone/>
+            </a:pPr>
+            <a:r>
+              <a:rPr lang="ja-JP" sz="1150" b="1" noProof="0" dirty="0">
                 <a:solidFill>
                   <a:srgbClr val="1E293B"/>
                 </a:solidFill>
               </a:rPr>
               <a:t>2限</a:t>
             </a:r>
-            <a:endParaRPr lang="en-US" sz="1150" dirty="0"/>
+            <a:endParaRPr lang="ja-JP" sz="1150" noProof="0" dirty="0"/>
           </a:p>
         </p:txBody>
       </p:sp>
@@ -9839,6 +10177,13 @@
           </a:solidFill>
           <a:ln/>
         </p:spPr>
+        <p:txBody>
+          <a:bodyPr/>
+          <a:lstStyle/>
+          <a:p>
+            <a:endParaRPr lang="ja-JP" noProof="0" dirty="0"/>
+          </a:p>
+        </p:txBody>
       </p:sp>
       <p:sp>
         <p:nvSpPr>
@@ -9861,18 +10206,18 @@
           <a:bodyPr wrap="square" lIns="0" tIns="76200" rIns="76200" bIns="0" rtlCol="0" anchor="ctr"/>
           <a:lstStyle/>
           <a:p>
-            <a:pPr algn="l" indent="0" marL="0">
-              <a:buNone/>
-            </a:pPr>
-            <a:r>
-              <a:rPr lang="en-US" sz="1150" dirty="0">
+            <a:pPr marL="0" indent="0" algn="l">
+              <a:buNone/>
+            </a:pPr>
+            <a:r>
+              <a:rPr lang="ja-JP" sz="1150" noProof="0" dirty="0">
                 <a:solidFill>
                   <a:srgbClr val="1E293B"/>
                 </a:solidFill>
               </a:rPr>
               <a:t>10:40</a:t>
             </a:r>
-            <a:endParaRPr lang="en-US" sz="1150" dirty="0"/>
+            <a:endParaRPr lang="ja-JP" sz="1150" noProof="0" dirty="0"/>
           </a:p>
         </p:txBody>
       </p:sp>
@@ -9895,6 +10240,13 @@
           </a:solidFill>
           <a:ln/>
         </p:spPr>
+        <p:txBody>
+          <a:bodyPr/>
+          <a:lstStyle/>
+          <a:p>
+            <a:endParaRPr lang="ja-JP" noProof="0" dirty="0"/>
+          </a:p>
+        </p:txBody>
       </p:sp>
       <p:sp>
         <p:nvSpPr>
@@ -9917,18 +10269,18 @@
           <a:bodyPr wrap="square" lIns="0" tIns="76200" rIns="76200" bIns="0" rtlCol="0" anchor="ctr"/>
           <a:lstStyle/>
           <a:p>
-            <a:pPr algn="l" indent="0" marL="0">
-              <a:buNone/>
-            </a:pPr>
-            <a:r>
-              <a:rPr lang="en-US" sz="1150" dirty="0">
+            <a:pPr marL="0" indent="0" algn="l">
+              <a:buNone/>
+            </a:pPr>
+            <a:r>
+              <a:rPr lang="ja-JP" sz="1150" noProof="0" dirty="0">
                 <a:solidFill>
                   <a:srgbClr val="1E293B"/>
                 </a:solidFill>
               </a:rPr>
               <a:t>12:20</a:t>
             </a:r>
-            <a:endParaRPr lang="en-US" sz="1150" dirty="0"/>
+            <a:endParaRPr lang="ja-JP" sz="1150" noProof="0" dirty="0"/>
           </a:p>
         </p:txBody>
       </p:sp>
@@ -9951,6 +10303,13 @@
           </a:solidFill>
           <a:ln/>
         </p:spPr>
+        <p:txBody>
+          <a:bodyPr/>
+          <a:lstStyle/>
+          <a:p>
+            <a:endParaRPr lang="ja-JP" noProof="0" dirty="0"/>
+          </a:p>
+        </p:txBody>
       </p:sp>
       <p:sp>
         <p:nvSpPr>
@@ -9973,18 +10332,18 @@
           <a:bodyPr wrap="square" lIns="0" tIns="76200" rIns="76200" bIns="0" rtlCol="0" anchor="ctr"/>
           <a:lstStyle/>
           <a:p>
-            <a:pPr algn="l" indent="0" marL="0">
-              <a:buNone/>
-            </a:pPr>
-            <a:r>
-              <a:rPr lang="en-US" sz="1150" dirty="0">
+            <a:pPr marL="0" indent="0" algn="l">
+              <a:buNone/>
+            </a:pPr>
+            <a:r>
+              <a:rPr lang="ja-JP" sz="1150" noProof="0" dirty="0">
                 <a:solidFill>
                   <a:srgbClr val="3B82F6"/>
                 </a:solidFill>
               </a:rPr>
-              <a:t>10:30 〜 11:10 　ウィンドウ表示</a:t>
-            </a:r>
-            <a:endParaRPr lang="en-US" sz="1150" dirty="0"/>
+              <a:t>10:30 〜 11:10 　</a:t>
+            </a:r>
+            <a:endParaRPr lang="ja-JP" sz="1150" noProof="0" dirty="0"/>
           </a:p>
         </p:txBody>
       </p:sp>
@@ -10007,6 +10366,13 @@
           </a:solidFill>
           <a:ln/>
         </p:spPr>
+        <p:txBody>
+          <a:bodyPr/>
+          <a:lstStyle/>
+          <a:p>
+            <a:endParaRPr lang="ja-JP" noProof="0" dirty="0"/>
+          </a:p>
+        </p:txBody>
       </p:sp>
       <p:sp>
         <p:nvSpPr>
@@ -10029,18 +10395,18 @@
           <a:bodyPr wrap="square" lIns="0" tIns="76200" rIns="76200" bIns="0" rtlCol="0" anchor="ctr"/>
           <a:lstStyle/>
           <a:p>
-            <a:pPr algn="ctr" indent="0" marL="0">
-              <a:buNone/>
-            </a:pPr>
-            <a:r>
-              <a:rPr lang="en-US" sz="1150" b="1" dirty="0">
+            <a:pPr marL="0" indent="0" algn="ctr">
+              <a:buNone/>
+            </a:pPr>
+            <a:r>
+              <a:rPr lang="ja-JP" sz="1150" b="1" noProof="0" dirty="0">
                 <a:solidFill>
                   <a:srgbClr val="1E293B"/>
                 </a:solidFill>
               </a:rPr>
               <a:t>3限</a:t>
             </a:r>
-            <a:endParaRPr lang="en-US" sz="1150" dirty="0"/>
+            <a:endParaRPr lang="ja-JP" sz="1150" noProof="0" dirty="0"/>
           </a:p>
         </p:txBody>
       </p:sp>
@@ -10063,6 +10429,13 @@
           </a:solidFill>
           <a:ln/>
         </p:spPr>
+        <p:txBody>
+          <a:bodyPr/>
+          <a:lstStyle/>
+          <a:p>
+            <a:endParaRPr lang="ja-JP" noProof="0" dirty="0"/>
+          </a:p>
+        </p:txBody>
       </p:sp>
       <p:sp>
         <p:nvSpPr>
@@ -10085,18 +10458,18 @@
           <a:bodyPr wrap="square" lIns="0" tIns="76200" rIns="76200" bIns="0" rtlCol="0" anchor="ctr"/>
           <a:lstStyle/>
           <a:p>
-            <a:pPr algn="l" indent="0" marL="0">
-              <a:buNone/>
-            </a:pPr>
-            <a:r>
-              <a:rPr lang="en-US" sz="1150" dirty="0">
+            <a:pPr marL="0" indent="0" algn="l">
+              <a:buNone/>
+            </a:pPr>
+            <a:r>
+              <a:rPr lang="ja-JP" sz="1150" noProof="0" dirty="0">
                 <a:solidFill>
                   <a:srgbClr val="1E293B"/>
                 </a:solidFill>
               </a:rPr>
               <a:t>13:10</a:t>
             </a:r>
-            <a:endParaRPr lang="en-US" sz="1150" dirty="0"/>
+            <a:endParaRPr lang="ja-JP" sz="1150" noProof="0" dirty="0"/>
           </a:p>
         </p:txBody>
       </p:sp>
@@ -10119,6 +10492,13 @@
           </a:solidFill>
           <a:ln/>
         </p:spPr>
+        <p:txBody>
+          <a:bodyPr/>
+          <a:lstStyle/>
+          <a:p>
+            <a:endParaRPr lang="ja-JP" noProof="0" dirty="0"/>
+          </a:p>
+        </p:txBody>
       </p:sp>
       <p:sp>
         <p:nvSpPr>
@@ -10141,18 +10521,18 @@
           <a:bodyPr wrap="square" lIns="0" tIns="76200" rIns="76200" bIns="0" rtlCol="0" anchor="ctr"/>
           <a:lstStyle/>
           <a:p>
-            <a:pPr algn="l" indent="0" marL="0">
-              <a:buNone/>
-            </a:pPr>
-            <a:r>
-              <a:rPr lang="en-US" sz="1150" dirty="0">
+            <a:pPr marL="0" indent="0" algn="l">
+              <a:buNone/>
+            </a:pPr>
+            <a:r>
+              <a:rPr lang="ja-JP" sz="1150" noProof="0" dirty="0">
                 <a:solidFill>
                   <a:srgbClr val="1E293B"/>
                 </a:solidFill>
               </a:rPr>
               <a:t>14:50</a:t>
             </a:r>
-            <a:endParaRPr lang="en-US" sz="1150" dirty="0"/>
+            <a:endParaRPr lang="ja-JP" sz="1150" noProof="0" dirty="0"/>
           </a:p>
         </p:txBody>
       </p:sp>
@@ -10175,6 +10555,13 @@
           </a:solidFill>
           <a:ln/>
         </p:spPr>
+        <p:txBody>
+          <a:bodyPr/>
+          <a:lstStyle/>
+          <a:p>
+            <a:endParaRPr lang="ja-JP" noProof="0" dirty="0"/>
+          </a:p>
+        </p:txBody>
       </p:sp>
       <p:sp>
         <p:nvSpPr>
@@ -10197,18 +10584,18 @@
           <a:bodyPr wrap="square" lIns="0" tIns="76200" rIns="76200" bIns="0" rtlCol="0" anchor="ctr"/>
           <a:lstStyle/>
           <a:p>
-            <a:pPr algn="l" indent="0" marL="0">
-              <a:buNone/>
-            </a:pPr>
-            <a:r>
-              <a:rPr lang="en-US" sz="1150" dirty="0">
+            <a:pPr marL="0" indent="0" algn="l">
+              <a:buNone/>
+            </a:pPr>
+            <a:r>
+              <a:rPr lang="ja-JP" sz="1150" noProof="0" dirty="0">
                 <a:solidFill>
                   <a:srgbClr val="3B82F6"/>
                 </a:solidFill>
               </a:rPr>
-              <a:t>13:00 〜 13:40 　ウィンドウ表示</a:t>
-            </a:r>
-            <a:endParaRPr lang="en-US" sz="1150" dirty="0"/>
+              <a:t>13:00 〜 13:40 　</a:t>
+            </a:r>
+            <a:endParaRPr lang="ja-JP" sz="1150" noProof="0" dirty="0"/>
           </a:p>
         </p:txBody>
       </p:sp>
@@ -10231,6 +10618,13 @@
           </a:solidFill>
           <a:ln/>
         </p:spPr>
+        <p:txBody>
+          <a:bodyPr/>
+          <a:lstStyle/>
+          <a:p>
+            <a:endParaRPr lang="ja-JP" noProof="0" dirty="0"/>
+          </a:p>
+        </p:txBody>
       </p:sp>
       <p:sp>
         <p:nvSpPr>
@@ -10253,18 +10647,18 @@
           <a:bodyPr wrap="square" lIns="0" tIns="76200" rIns="76200" bIns="0" rtlCol="0" anchor="ctr"/>
           <a:lstStyle/>
           <a:p>
-            <a:pPr algn="ctr" indent="0" marL="0">
-              <a:buNone/>
-            </a:pPr>
-            <a:r>
-              <a:rPr lang="en-US" sz="1150" b="1" dirty="0">
+            <a:pPr marL="0" indent="0" algn="ctr">
+              <a:buNone/>
+            </a:pPr>
+            <a:r>
+              <a:rPr lang="ja-JP" sz="1150" b="1" noProof="0" dirty="0">
                 <a:solidFill>
                   <a:srgbClr val="1E293B"/>
                 </a:solidFill>
               </a:rPr>
               <a:t>4限</a:t>
             </a:r>
-            <a:endParaRPr lang="en-US" sz="1150" dirty="0"/>
+            <a:endParaRPr lang="ja-JP" sz="1150" noProof="0" dirty="0"/>
           </a:p>
         </p:txBody>
       </p:sp>
@@ -10287,6 +10681,13 @@
           </a:solidFill>
           <a:ln/>
         </p:spPr>
+        <p:txBody>
+          <a:bodyPr/>
+          <a:lstStyle/>
+          <a:p>
+            <a:endParaRPr lang="ja-JP" noProof="0" dirty="0"/>
+          </a:p>
+        </p:txBody>
       </p:sp>
       <p:sp>
         <p:nvSpPr>
@@ -10309,18 +10710,18 @@
           <a:bodyPr wrap="square" lIns="0" tIns="76200" rIns="76200" bIns="0" rtlCol="0" anchor="ctr"/>
           <a:lstStyle/>
           <a:p>
-            <a:pPr algn="l" indent="0" marL="0">
-              <a:buNone/>
-            </a:pPr>
-            <a:r>
-              <a:rPr lang="en-US" sz="1150" dirty="0">
+            <a:pPr marL="0" indent="0" algn="l">
+              <a:buNone/>
+            </a:pPr>
+            <a:r>
+              <a:rPr lang="ja-JP" sz="1150" noProof="0" dirty="0">
                 <a:solidFill>
                   <a:srgbClr val="1E293B"/>
                 </a:solidFill>
               </a:rPr>
               <a:t>15:00</a:t>
             </a:r>
-            <a:endParaRPr lang="en-US" sz="1150" dirty="0"/>
+            <a:endParaRPr lang="ja-JP" sz="1150" noProof="0" dirty="0"/>
           </a:p>
         </p:txBody>
       </p:sp>
@@ -10343,6 +10744,13 @@
           </a:solidFill>
           <a:ln/>
         </p:spPr>
+        <p:txBody>
+          <a:bodyPr/>
+          <a:lstStyle/>
+          <a:p>
+            <a:endParaRPr lang="ja-JP" noProof="0" dirty="0"/>
+          </a:p>
+        </p:txBody>
       </p:sp>
       <p:sp>
         <p:nvSpPr>
@@ -10365,18 +10773,18 @@
           <a:bodyPr wrap="square" lIns="0" tIns="76200" rIns="76200" bIns="0" rtlCol="0" anchor="ctr"/>
           <a:lstStyle/>
           <a:p>
-            <a:pPr algn="l" indent="0" marL="0">
-              <a:buNone/>
-            </a:pPr>
-            <a:r>
-              <a:rPr lang="en-US" sz="1150" dirty="0">
+            <a:pPr marL="0" indent="0" algn="l">
+              <a:buNone/>
+            </a:pPr>
+            <a:r>
+              <a:rPr lang="ja-JP" sz="1150" noProof="0" dirty="0">
                 <a:solidFill>
                   <a:srgbClr val="1E293B"/>
                 </a:solidFill>
               </a:rPr>
               <a:t>16:40</a:t>
             </a:r>
-            <a:endParaRPr lang="en-US" sz="1150" dirty="0"/>
+            <a:endParaRPr lang="ja-JP" sz="1150" noProof="0" dirty="0"/>
           </a:p>
         </p:txBody>
       </p:sp>
@@ -10399,6 +10807,13 @@
           </a:solidFill>
           <a:ln/>
         </p:spPr>
+        <p:txBody>
+          <a:bodyPr/>
+          <a:lstStyle/>
+          <a:p>
+            <a:endParaRPr lang="ja-JP" noProof="0" dirty="0"/>
+          </a:p>
+        </p:txBody>
       </p:sp>
       <p:sp>
         <p:nvSpPr>
@@ -10421,18 +10836,18 @@
           <a:bodyPr wrap="square" lIns="0" tIns="76200" rIns="76200" bIns="0" rtlCol="0" anchor="ctr"/>
           <a:lstStyle/>
           <a:p>
-            <a:pPr algn="l" indent="0" marL="0">
-              <a:buNone/>
-            </a:pPr>
-            <a:r>
-              <a:rPr lang="en-US" sz="1150" dirty="0">
+            <a:pPr marL="0" indent="0" algn="l">
+              <a:buNone/>
+            </a:pPr>
+            <a:r>
+              <a:rPr lang="ja-JP" sz="1150" noProof="0" dirty="0">
                 <a:solidFill>
                   <a:srgbClr val="3B82F6"/>
                 </a:solidFill>
               </a:rPr>
-              <a:t>14:50 〜 15:30 　ウィンドウ表示</a:t>
-            </a:r>
-            <a:endParaRPr lang="en-US" sz="1150" dirty="0"/>
+              <a:t>14:50 〜 15:30 　</a:t>
+            </a:r>
+            <a:endParaRPr lang="ja-JP" sz="1150" noProof="0" dirty="0"/>
           </a:p>
         </p:txBody>
       </p:sp>
@@ -10455,6 +10870,13 @@
           </a:solidFill>
           <a:ln/>
         </p:spPr>
+        <p:txBody>
+          <a:bodyPr/>
+          <a:lstStyle/>
+          <a:p>
+            <a:endParaRPr lang="ja-JP" noProof="0" dirty="0"/>
+          </a:p>
+        </p:txBody>
       </p:sp>
       <p:sp>
         <p:nvSpPr>
@@ -10477,18 +10899,18 @@
           <a:bodyPr wrap="square" lIns="0" tIns="76200" rIns="76200" bIns="0" rtlCol="0" anchor="ctr"/>
           <a:lstStyle/>
           <a:p>
-            <a:pPr algn="ctr" indent="0" marL="0">
-              <a:buNone/>
-            </a:pPr>
-            <a:r>
-              <a:rPr lang="en-US" sz="1150" b="1" dirty="0">
+            <a:pPr marL="0" indent="0" algn="ctr">
+              <a:buNone/>
+            </a:pPr>
+            <a:r>
+              <a:rPr lang="ja-JP" sz="1150" b="1" noProof="0" dirty="0">
                 <a:solidFill>
                   <a:srgbClr val="1E293B"/>
                 </a:solidFill>
               </a:rPr>
               <a:t>5限</a:t>
             </a:r>
-            <a:endParaRPr lang="en-US" sz="1150" dirty="0"/>
+            <a:endParaRPr lang="ja-JP" sz="1150" noProof="0" dirty="0"/>
           </a:p>
         </p:txBody>
       </p:sp>
@@ -10511,6 +10933,13 @@
           </a:solidFill>
           <a:ln/>
         </p:spPr>
+        <p:txBody>
+          <a:bodyPr/>
+          <a:lstStyle/>
+          <a:p>
+            <a:endParaRPr lang="ja-JP" noProof="0" dirty="0"/>
+          </a:p>
+        </p:txBody>
       </p:sp>
       <p:sp>
         <p:nvSpPr>
@@ -10533,18 +10962,18 @@
           <a:bodyPr wrap="square" lIns="0" tIns="76200" rIns="76200" bIns="0" rtlCol="0" anchor="ctr"/>
           <a:lstStyle/>
           <a:p>
-            <a:pPr algn="l" indent="0" marL="0">
-              <a:buNone/>
-            </a:pPr>
-            <a:r>
-              <a:rPr lang="en-US" sz="1150" dirty="0">
+            <a:pPr marL="0" indent="0" algn="l">
+              <a:buNone/>
+            </a:pPr>
+            <a:r>
+              <a:rPr lang="ja-JP" sz="1150" noProof="0" dirty="0">
                 <a:solidFill>
                   <a:srgbClr val="1E293B"/>
                 </a:solidFill>
               </a:rPr>
               <a:t>16:50</a:t>
             </a:r>
-            <a:endParaRPr lang="en-US" sz="1150" dirty="0"/>
+            <a:endParaRPr lang="ja-JP" sz="1150" noProof="0" dirty="0"/>
           </a:p>
         </p:txBody>
       </p:sp>
@@ -10567,6 +10996,13 @@
           </a:solidFill>
           <a:ln/>
         </p:spPr>
+        <p:txBody>
+          <a:bodyPr/>
+          <a:lstStyle/>
+          <a:p>
+            <a:endParaRPr lang="ja-JP" noProof="0" dirty="0"/>
+          </a:p>
+        </p:txBody>
       </p:sp>
       <p:sp>
         <p:nvSpPr>
@@ -10589,18 +11025,18 @@
           <a:bodyPr wrap="square" lIns="0" tIns="76200" rIns="76200" bIns="0" rtlCol="0" anchor="ctr"/>
           <a:lstStyle/>
           <a:p>
-            <a:pPr algn="l" indent="0" marL="0">
-              <a:buNone/>
-            </a:pPr>
-            <a:r>
-              <a:rPr lang="en-US" sz="1150" dirty="0">
+            <a:pPr marL="0" indent="0" algn="l">
+              <a:buNone/>
+            </a:pPr>
+            <a:r>
+              <a:rPr lang="ja-JP" sz="1150" noProof="0" dirty="0">
                 <a:solidFill>
                   <a:srgbClr val="1E293B"/>
                 </a:solidFill>
               </a:rPr>
               <a:t>18:30</a:t>
             </a:r>
-            <a:endParaRPr lang="en-US" sz="1150" dirty="0"/>
+            <a:endParaRPr lang="ja-JP" sz="1150" noProof="0" dirty="0"/>
           </a:p>
         </p:txBody>
       </p:sp>
@@ -10623,6 +11059,13 @@
           </a:solidFill>
           <a:ln/>
         </p:spPr>
+        <p:txBody>
+          <a:bodyPr/>
+          <a:lstStyle/>
+          <a:p>
+            <a:endParaRPr lang="ja-JP" noProof="0" dirty="0"/>
+          </a:p>
+        </p:txBody>
       </p:sp>
       <p:sp>
         <p:nvSpPr>
@@ -10645,18 +11088,18 @@
           <a:bodyPr wrap="square" lIns="0" tIns="76200" rIns="76200" bIns="0" rtlCol="0" anchor="ctr"/>
           <a:lstStyle/>
           <a:p>
-            <a:pPr algn="l" indent="0" marL="0">
-              <a:buNone/>
-            </a:pPr>
-            <a:r>
-              <a:rPr lang="en-US" sz="1150" dirty="0">
+            <a:pPr marL="0" indent="0" algn="l">
+              <a:buNone/>
+            </a:pPr>
+            <a:r>
+              <a:rPr lang="ja-JP" sz="1150" noProof="0" dirty="0">
                 <a:solidFill>
                   <a:srgbClr val="3B82F6"/>
                 </a:solidFill>
               </a:rPr>
-              <a:t>16:40 〜 17:20 　ウィンドウ表示</a:t>
-            </a:r>
-            <a:endParaRPr lang="en-US" sz="1150" dirty="0"/>
+              <a:t>16:40 〜 17:20 　</a:t>
+            </a:r>
+            <a:endParaRPr lang="ja-JP" sz="1150" noProof="0" dirty="0"/>
           </a:p>
         </p:txBody>
       </p:sp>
@@ -10679,6 +11122,13 @@
           </a:solidFill>
           <a:ln/>
         </p:spPr>
+        <p:txBody>
+          <a:bodyPr/>
+          <a:lstStyle/>
+          <a:p>
+            <a:endParaRPr lang="ja-JP" noProof="0" dirty="0"/>
+          </a:p>
+        </p:txBody>
       </p:sp>
       <p:sp>
         <p:nvSpPr>
@@ -10701,18 +11151,18 @@
           <a:bodyPr wrap="square" lIns="0" tIns="76200" rIns="76200" bIns="0" rtlCol="0" anchor="ctr"/>
           <a:lstStyle/>
           <a:p>
-            <a:pPr algn="ctr" indent="0" marL="0">
-              <a:buNone/>
-            </a:pPr>
-            <a:r>
-              <a:rPr lang="en-US" sz="1150" b="1" dirty="0">
+            <a:pPr marL="0" indent="0" algn="ctr">
+              <a:buNone/>
+            </a:pPr>
+            <a:r>
+              <a:rPr lang="ja-JP" sz="1150" b="1" noProof="0" dirty="0">
                 <a:solidFill>
                   <a:srgbClr val="1E293B"/>
                 </a:solidFill>
               </a:rPr>
               <a:t>6限</a:t>
             </a:r>
-            <a:endParaRPr lang="en-US" sz="1150" dirty="0"/>
+            <a:endParaRPr lang="ja-JP" sz="1150" noProof="0" dirty="0"/>
           </a:p>
         </p:txBody>
       </p:sp>
@@ -10735,6 +11185,13 @@
           </a:solidFill>
           <a:ln/>
         </p:spPr>
+        <p:txBody>
+          <a:bodyPr/>
+          <a:lstStyle/>
+          <a:p>
+            <a:endParaRPr lang="ja-JP" noProof="0" dirty="0"/>
+          </a:p>
+        </p:txBody>
       </p:sp>
       <p:sp>
         <p:nvSpPr>
@@ -10757,18 +11214,18 @@
           <a:bodyPr wrap="square" lIns="0" tIns="76200" rIns="76200" bIns="0" rtlCol="0" anchor="ctr"/>
           <a:lstStyle/>
           <a:p>
-            <a:pPr algn="l" indent="0" marL="0">
-              <a:buNone/>
-            </a:pPr>
-            <a:r>
-              <a:rPr lang="en-US" sz="1150" dirty="0">
+            <a:pPr marL="0" indent="0" algn="l">
+              <a:buNone/>
+            </a:pPr>
+            <a:r>
+              <a:rPr lang="ja-JP" sz="1150" noProof="0" dirty="0">
                 <a:solidFill>
                   <a:srgbClr val="1E293B"/>
                 </a:solidFill>
               </a:rPr>
               <a:t>18:40</a:t>
             </a:r>
-            <a:endParaRPr lang="en-US" sz="1150" dirty="0"/>
+            <a:endParaRPr lang="ja-JP" sz="1150" noProof="0" dirty="0"/>
           </a:p>
         </p:txBody>
       </p:sp>
@@ -10791,6 +11248,13 @@
           </a:solidFill>
           <a:ln/>
         </p:spPr>
+        <p:txBody>
+          <a:bodyPr/>
+          <a:lstStyle/>
+          <a:p>
+            <a:endParaRPr lang="ja-JP" noProof="0" dirty="0"/>
+          </a:p>
+        </p:txBody>
       </p:sp>
       <p:sp>
         <p:nvSpPr>
@@ -10813,18 +11277,18 @@
           <a:bodyPr wrap="square" lIns="0" tIns="76200" rIns="76200" bIns="0" rtlCol="0" anchor="ctr"/>
           <a:lstStyle/>
           <a:p>
-            <a:pPr algn="l" indent="0" marL="0">
-              <a:buNone/>
-            </a:pPr>
-            <a:r>
-              <a:rPr lang="en-US" sz="1150" dirty="0">
+            <a:pPr marL="0" indent="0" algn="l">
+              <a:buNone/>
+            </a:pPr>
+            <a:r>
+              <a:rPr lang="ja-JP" sz="1150" noProof="0" dirty="0">
                 <a:solidFill>
                   <a:srgbClr val="1E293B"/>
                 </a:solidFill>
               </a:rPr>
               <a:t>20:20</a:t>
             </a:r>
-            <a:endParaRPr lang="en-US" sz="1150" dirty="0"/>
+            <a:endParaRPr lang="ja-JP" sz="1150" noProof="0" dirty="0"/>
           </a:p>
         </p:txBody>
       </p:sp>
@@ -10847,6 +11311,13 @@
           </a:solidFill>
           <a:ln/>
         </p:spPr>
+        <p:txBody>
+          <a:bodyPr/>
+          <a:lstStyle/>
+          <a:p>
+            <a:endParaRPr lang="ja-JP" noProof="0" dirty="0"/>
+          </a:p>
+        </p:txBody>
       </p:sp>
       <p:sp>
         <p:nvSpPr>
@@ -10869,18 +11340,18 @@
           <a:bodyPr wrap="square" lIns="0" tIns="76200" rIns="76200" bIns="0" rtlCol="0" anchor="ctr"/>
           <a:lstStyle/>
           <a:p>
-            <a:pPr algn="l" indent="0" marL="0">
-              <a:buNone/>
-            </a:pPr>
-            <a:r>
-              <a:rPr lang="en-US" sz="1150" dirty="0">
+            <a:pPr marL="0" indent="0" algn="l">
+              <a:buNone/>
+            </a:pPr>
+            <a:r>
+              <a:rPr lang="ja-JP" sz="1150" noProof="0" dirty="0">
                 <a:solidFill>
                   <a:srgbClr val="3B82F6"/>
                 </a:solidFill>
               </a:rPr>
-              <a:t>18:30 〜 19:10 　ウィンドウ表示</a:t>
-            </a:r>
-            <a:endParaRPr lang="en-US" sz="1150" dirty="0"/>
+              <a:t>18:30 〜 19:10 　</a:t>
+            </a:r>
+            <a:endParaRPr lang="ja-JP" sz="1150" noProof="0" dirty="0"/>
           </a:p>
         </p:txBody>
       </p:sp>
@@ -10903,6 +11374,13 @@
           </a:solidFill>
           <a:ln/>
         </p:spPr>
+        <p:txBody>
+          <a:bodyPr/>
+          <a:lstStyle/>
+          <a:p>
+            <a:endParaRPr lang="ja-JP" noProof="0" dirty="0"/>
+          </a:p>
+        </p:txBody>
       </p:sp>
       <p:sp>
         <p:nvSpPr>
@@ -10925,18 +11403,26 @@
           <a:bodyPr wrap="square" rtlCol="0" anchor="ctr"/>
           <a:lstStyle/>
           <a:p>
-            <a:pPr indent="0" marL="0">
-              <a:buNone/>
-            </a:pPr>
-            <a:r>
-              <a:rPr lang="en-US" sz="1050" dirty="0">
+            <a:pPr marL="0" indent="0">
+              <a:buNone/>
+            </a:pPr>
+            <a:r>
+              <a:rPr lang="ja-JP" sz="1050" noProof="0" dirty="0">
                 <a:solidFill>
                   <a:srgbClr val="92400E"/>
                 </a:solidFill>
               </a:rPr>
-              <a:t>💡 事前時間（デフォルト 10 分）と事後時間（デフォルト 30 分）は設定画面でカスタマイズできます。</a:t>
-            </a:r>
-            <a:endParaRPr lang="en-US" sz="1050" dirty="0"/>
+              <a:t>💡 </a:t>
+            </a:r>
+            <a:r>
+              <a:rPr lang="ja-JP" sz="1250" noProof="0" dirty="0">
+                <a:solidFill>
+                  <a:srgbClr val="92400E"/>
+                </a:solidFill>
+              </a:rPr>
+              <a:t>事前時間（デフォルト 10 分）と事後時間（デフォルト 30 分）は設定画面でカスタマイズできます。</a:t>
+            </a:r>
+            <a:endParaRPr lang="ja-JP" sz="1250" noProof="0" dirty="0"/>
           </a:p>
         </p:txBody>
       </p:sp>
@@ -10959,6 +11445,13 @@
           </a:solidFill>
           <a:ln/>
         </p:spPr>
+        <p:txBody>
+          <a:bodyPr/>
+          <a:lstStyle/>
+          <a:p>
+            <a:endParaRPr lang="ja-JP" noProof="0" dirty="0"/>
+          </a:p>
+        </p:txBody>
       </p:sp>
       <p:sp>
         <p:nvSpPr>
@@ -10981,18 +11474,18 @@
           <a:bodyPr wrap="square" rtlCol="0" anchor="ctr"/>
           <a:lstStyle/>
           <a:p>
-            <a:pPr indent="0" marL="0">
-              <a:buNone/>
-            </a:pPr>
-            <a:r>
-              <a:rPr lang="en-US" sz="900" dirty="0">
+            <a:pPr marL="0" indent="0">
+              <a:buNone/>
+            </a:pPr>
+            <a:r>
+              <a:rPr lang="ja-JP" sz="900" noProof="0" dirty="0">
                 <a:solidFill>
                   <a:srgbClr val="BFDBFE"/>
                 </a:solidFill>
               </a:rPr>
               <a:t>CodeWidget  ユーザーマニュアル</a:t>
             </a:r>
-            <a:endParaRPr lang="en-US" sz="900" dirty="0"/>
+            <a:endParaRPr lang="ja-JP" sz="900" noProof="0" dirty="0"/>
           </a:p>
         </p:txBody>
       </p:sp>
@@ -11017,18 +11510,18 @@
           <a:bodyPr wrap="square" rtlCol="0" anchor="ctr"/>
           <a:lstStyle/>
           <a:p>
-            <a:pPr algn="r" indent="0" marL="0">
-              <a:buNone/>
-            </a:pPr>
-            <a:r>
-              <a:rPr lang="en-US" sz="900" dirty="0">
+            <a:pPr marL="0" indent="0" algn="r">
+              <a:buNone/>
+            </a:pPr>
+            <a:r>
+              <a:rPr lang="ja-JP" sz="900" noProof="0" dirty="0">
                 <a:solidFill>
                   <a:srgbClr val="BFDBFE"/>
                 </a:solidFill>
               </a:rPr>
               <a:t>5</a:t>
             </a:r>
-            <a:endParaRPr lang="en-US" sz="900" dirty="0"/>
+            <a:endParaRPr lang="ja-JP" sz="900" noProof="0" dirty="0"/>
           </a:p>
         </p:txBody>
       </p:sp>
@@ -11048,6 +11541,7 @@
         <a:solidFill>
           <a:srgbClr val="FFFFFF"/>
         </a:solidFill>
+        <a:effectLst/>
       </p:bgPr>
     </p:bg>
     <p:spTree>
@@ -11083,6 +11577,13 @@
           </a:solidFill>
           <a:ln/>
         </p:spPr>
+        <p:txBody>
+          <a:bodyPr/>
+          <a:lstStyle/>
+          <a:p>
+            <a:endParaRPr lang="ja-JP" noProof="0" dirty="0"/>
+          </a:p>
+        </p:txBody>
       </p:sp>
       <p:sp>
         <p:nvSpPr>
@@ -11105,11 +11606,11 @@
           <a:bodyPr wrap="square" rtlCol="0" anchor="ctr"/>
           <a:lstStyle/>
           <a:p>
-            <a:pPr indent="0" marL="0">
-              <a:buNone/>
-            </a:pPr>
-            <a:r>
-              <a:rPr lang="en-US" sz="2300" b="1" dirty="0">
+            <a:pPr marL="0" indent="0">
+              <a:buNone/>
+            </a:pPr>
+            <a:r>
+              <a:rPr lang="ja-JP" sz="2300" b="1" noProof="0" dirty="0">
                 <a:solidFill>
                   <a:srgbClr val="FFFFFF"/>
                 </a:solidFill>
@@ -11119,7 +11620,7 @@
               </a:rPr>
               <a:t>03  授業の管理</a:t>
             </a:r>
-            <a:endParaRPr lang="en-US" sz="2300" dirty="0"/>
+            <a:endParaRPr lang="ja-JP" sz="2300" noProof="0" dirty="0"/>
           </a:p>
         </p:txBody>
       </p:sp>
@@ -11142,13 +11643,20 @@
           </a:solidFill>
           <a:ln/>
           <a:effectLst>
-            <a:outerShdw sx="100000" sy="100000" kx="0" ky="0" algn="bl" rotWithShape="0" blurRad="76200" dist="38100" dir="8100000">
+            <a:outerShdw blurRad="76200" dist="38100" dir="8100000" algn="bl" rotWithShape="0">
               <a:srgbClr val="1E40AF">
                 <a:alpha val="10000"/>
               </a:srgbClr>
             </a:outerShdw>
           </a:effectLst>
         </p:spPr>
+        <p:txBody>
+          <a:bodyPr/>
+          <a:lstStyle/>
+          <a:p>
+            <a:endParaRPr lang="ja-JP" noProof="0" dirty="0"/>
+          </a:p>
+        </p:txBody>
       </p:sp>
       <p:sp>
         <p:nvSpPr>
@@ -11169,6 +11677,13 @@
           </a:solidFill>
           <a:ln/>
         </p:spPr>
+        <p:txBody>
+          <a:bodyPr/>
+          <a:lstStyle/>
+          <a:p>
+            <a:endParaRPr lang="ja-JP" noProof="0" dirty="0"/>
+          </a:p>
+        </p:txBody>
       </p:sp>
       <p:sp>
         <p:nvSpPr>
@@ -11191,18 +11706,18 @@
           <a:bodyPr wrap="square" rtlCol="0" anchor="ctr"/>
           <a:lstStyle/>
           <a:p>
-            <a:pPr indent="0" marL="0">
-              <a:buNone/>
-            </a:pPr>
-            <a:r>
-              <a:rPr lang="en-US" sz="1250" b="1" dirty="0">
+            <a:pPr marL="0" indent="0">
+              <a:buNone/>
+            </a:pPr>
+            <a:r>
+              <a:rPr lang="ja-JP" sz="1250" b="1" noProof="0" dirty="0">
                 <a:solidFill>
                   <a:srgbClr val="FFFFFF"/>
                 </a:solidFill>
               </a:rPr>
               <a:t>操作手順とボタン説明</a:t>
             </a:r>
-            <a:endParaRPr lang="en-US" sz="1250" dirty="0"/>
+            <a:endParaRPr lang="ja-JP" sz="1250" noProof="0" dirty="0"/>
           </a:p>
         </p:txBody>
       </p:sp>
@@ -11225,6 +11740,13 @@
           </a:solidFill>
           <a:ln/>
         </p:spPr>
+        <p:txBody>
+          <a:bodyPr/>
+          <a:lstStyle/>
+          <a:p>
+            <a:endParaRPr lang="ja-JP" noProof="0" dirty="0"/>
+          </a:p>
+        </p:txBody>
       </p:sp>
       <p:sp>
         <p:nvSpPr>
@@ -11247,18 +11769,18 @@
           <a:bodyPr wrap="square" rtlCol="0" anchor="ctr"/>
           <a:lstStyle/>
           <a:p>
-            <a:pPr algn="ctr" indent="0" marL="0">
-              <a:buNone/>
-            </a:pPr>
-            <a:r>
-              <a:rPr lang="en-US" sz="1000" b="1" dirty="0">
+            <a:pPr marL="0" indent="0" algn="ctr">
+              <a:buNone/>
+            </a:pPr>
+            <a:r>
+              <a:rPr lang="ja-JP" sz="1000" b="1" noProof="0" dirty="0">
                 <a:solidFill>
                   <a:srgbClr val="FFFFFF"/>
                 </a:solidFill>
               </a:rPr>
               <a:t>1</a:t>
             </a:r>
-            <a:endParaRPr lang="en-US" sz="1000" dirty="0"/>
+            <a:endParaRPr lang="ja-JP" sz="1000" noProof="0" dirty="0"/>
           </a:p>
         </p:txBody>
       </p:sp>
@@ -11283,18 +11805,18 @@
           <a:bodyPr wrap="square" rtlCol="0" anchor="ctr"/>
           <a:lstStyle/>
           <a:p>
-            <a:pPr indent="0" marL="0">
-              <a:buNone/>
-            </a:pPr>
-            <a:r>
-              <a:rPr lang="en-US" sz="1150" dirty="0">
+            <a:pPr marL="0" indent="0">
+              <a:buNone/>
+            </a:pPr>
+            <a:r>
+              <a:rPr lang="ja-JP" sz="1150" noProof="0" dirty="0">
                 <a:solidFill>
                   <a:srgbClr val="1E293B"/>
                 </a:solidFill>
               </a:rPr>
               <a:t>トレイアイコンを右クリック</a:t>
             </a:r>
-            <a:endParaRPr lang="en-US" sz="1150" dirty="0"/>
+            <a:endParaRPr lang="ja-JP" sz="1150" noProof="0" dirty="0"/>
           </a:p>
         </p:txBody>
       </p:sp>
@@ -11317,6 +11839,13 @@
           </a:solidFill>
           <a:ln/>
         </p:spPr>
+        <p:txBody>
+          <a:bodyPr/>
+          <a:lstStyle/>
+          <a:p>
+            <a:endParaRPr lang="ja-JP" noProof="0" dirty="0"/>
+          </a:p>
+        </p:txBody>
       </p:sp>
       <p:sp>
         <p:nvSpPr>
@@ -11339,18 +11868,18 @@
           <a:bodyPr wrap="square" rtlCol="0" anchor="ctr"/>
           <a:lstStyle/>
           <a:p>
-            <a:pPr algn="ctr" indent="0" marL="0">
-              <a:buNone/>
-            </a:pPr>
-            <a:r>
-              <a:rPr lang="en-US" sz="1000" b="1" dirty="0">
+            <a:pPr marL="0" indent="0" algn="ctr">
+              <a:buNone/>
+            </a:pPr>
+            <a:r>
+              <a:rPr lang="ja-JP" sz="1000" b="1" noProof="0" dirty="0">
                 <a:solidFill>
                   <a:srgbClr val="FFFFFF"/>
                 </a:solidFill>
               </a:rPr>
               <a:t>2</a:t>
             </a:r>
-            <a:endParaRPr lang="en-US" sz="1000" dirty="0"/>
+            <a:endParaRPr lang="ja-JP" sz="1000" noProof="0" dirty="0"/>
           </a:p>
         </p:txBody>
       </p:sp>
@@ -11375,18 +11904,18 @@
           <a:bodyPr wrap="square" rtlCol="0" anchor="ctr"/>
           <a:lstStyle/>
           <a:p>
-            <a:pPr indent="0" marL="0">
-              <a:buNone/>
-            </a:pPr>
-            <a:r>
-              <a:rPr lang="en-US" sz="1150" dirty="0">
+            <a:pPr marL="0" indent="0">
+              <a:buNone/>
+            </a:pPr>
+            <a:r>
+              <a:rPr lang="ja-JP" sz="1150" noProof="0" dirty="0">
                 <a:solidFill>
                   <a:srgbClr val="1E293B"/>
                 </a:solidFill>
               </a:rPr>
               <a:t>「設定…」を選択</a:t>
             </a:r>
-            <a:endParaRPr lang="en-US" sz="1150" dirty="0"/>
+            <a:endParaRPr lang="ja-JP" sz="1150" noProof="0" dirty="0"/>
           </a:p>
         </p:txBody>
       </p:sp>
@@ -11409,6 +11938,13 @@
           </a:solidFill>
           <a:ln/>
         </p:spPr>
+        <p:txBody>
+          <a:bodyPr/>
+          <a:lstStyle/>
+          <a:p>
+            <a:endParaRPr lang="ja-JP" noProof="0" dirty="0"/>
+          </a:p>
+        </p:txBody>
       </p:sp>
       <p:sp>
         <p:nvSpPr>
@@ -11431,18 +11967,18 @@
           <a:bodyPr wrap="square" rtlCol="0" anchor="ctr"/>
           <a:lstStyle/>
           <a:p>
-            <a:pPr algn="ctr" indent="0" marL="0">
-              <a:buNone/>
-            </a:pPr>
-            <a:r>
-              <a:rPr lang="en-US" sz="1000" b="1" dirty="0">
+            <a:pPr marL="0" indent="0" algn="ctr">
+              <a:buNone/>
+            </a:pPr>
+            <a:r>
+              <a:rPr lang="ja-JP" sz="1000" b="1" noProof="0" dirty="0">
                 <a:solidFill>
                   <a:srgbClr val="FFFFFF"/>
                 </a:solidFill>
               </a:rPr>
               <a:t>3</a:t>
             </a:r>
-            <a:endParaRPr lang="en-US" sz="1000" dirty="0"/>
+            <a:endParaRPr lang="ja-JP" sz="1000" noProof="0" dirty="0"/>
           </a:p>
         </p:txBody>
       </p:sp>
@@ -11467,18 +12003,18 @@
           <a:bodyPr wrap="square" rtlCol="0" anchor="ctr"/>
           <a:lstStyle/>
           <a:p>
-            <a:pPr indent="0" marL="0">
-              <a:buNone/>
-            </a:pPr>
-            <a:r>
-              <a:rPr lang="en-US" sz="1150" dirty="0">
+            <a:pPr marL="0" indent="0">
+              <a:buNone/>
+            </a:pPr>
+            <a:r>
+              <a:rPr lang="ja-JP" sz="1150" noProof="0" dirty="0">
                 <a:solidFill>
                   <a:srgbClr val="1E293B"/>
                 </a:solidFill>
               </a:rPr>
               <a:t>「授業」タブに切り替える</a:t>
             </a:r>
-            <a:endParaRPr lang="en-US" sz="1150" dirty="0"/>
+            <a:endParaRPr lang="ja-JP" sz="1150" noProof="0" dirty="0"/>
           </a:p>
         </p:txBody>
       </p:sp>
@@ -11503,18 +12039,18 @@
           <a:bodyPr wrap="square" rtlCol="0" anchor="ctr"/>
           <a:lstStyle/>
           <a:p>
-            <a:pPr indent="0" marL="0">
-              <a:buNone/>
-            </a:pPr>
-            <a:r>
-              <a:rPr lang="en-US" sz="1200" b="1" dirty="0">
+            <a:pPr marL="0" indent="0">
+              <a:buNone/>
+            </a:pPr>
+            <a:r>
+              <a:rPr lang="ja-JP" sz="1200" b="1" noProof="0" dirty="0">
                 <a:solidFill>
                   <a:srgbClr val="1E40AF"/>
                 </a:solidFill>
               </a:rPr>
               <a:t>ボタン機能</a:t>
             </a:r>
-            <a:endParaRPr lang="en-US" sz="1200" dirty="0"/>
+            <a:endParaRPr lang="ja-JP" sz="1200" noProof="0" dirty="0"/>
           </a:p>
         </p:txBody>
       </p:sp>
@@ -11537,6 +12073,13 @@
           </a:solidFill>
           <a:ln/>
         </p:spPr>
+        <p:txBody>
+          <a:bodyPr/>
+          <a:lstStyle/>
+          <a:p>
+            <a:endParaRPr lang="ja-JP" noProof="0" dirty="0"/>
+          </a:p>
+        </p:txBody>
       </p:sp>
       <p:sp>
         <p:nvSpPr>
@@ -11559,18 +12102,18 @@
           <a:bodyPr wrap="square" rtlCol="0" anchor="ctr"/>
           <a:lstStyle/>
           <a:p>
-            <a:pPr algn="ctr" indent="0" marL="0">
-              <a:buNone/>
-            </a:pPr>
-            <a:r>
-              <a:rPr lang="en-US" sz="850" b="1" dirty="0">
+            <a:pPr marL="0" indent="0" algn="ctr">
+              <a:buNone/>
+            </a:pPr>
+            <a:r>
+              <a:rPr lang="ja-JP" sz="850" b="1" noProof="0" dirty="0">
                 <a:solidFill>
                   <a:srgbClr val="FFFFFF"/>
                 </a:solidFill>
               </a:rPr>
               <a:t>設定を読み込む</a:t>
             </a:r>
-            <a:endParaRPr lang="en-US" sz="850" dirty="0"/>
+            <a:endParaRPr lang="ja-JP" sz="850" noProof="0" dirty="0"/>
           </a:p>
         </p:txBody>
       </p:sp>
@@ -11582,31 +12125,31 @@
         </p:nvSpPr>
         <p:spPr>
           <a:xfrm>
-            <a:off x="1773936" y="3374136"/>
-            <a:ext cx="2011680" cy="210312"/>
-          </a:xfrm>
-          <a:prstGeom prst="rect">
-            <a:avLst/>
-          </a:prstGeom>
-          <a:noFill/>
-          <a:ln/>
-        </p:spPr>
-        <p:txBody>
-          <a:bodyPr wrap="square" rtlCol="0" anchor="ctr"/>
-          <a:lstStyle/>
-          <a:p>
-            <a:pPr indent="0" marL="0">
-              <a:buNone/>
-            </a:pPr>
-            <a:r>
-              <a:rPr lang="en-US" sz="950" dirty="0">
+            <a:off x="1735836" y="3374136"/>
+            <a:ext cx="2267712" cy="192024"/>
+          </a:xfrm>
+          <a:prstGeom prst="rect">
+            <a:avLst/>
+          </a:prstGeom>
+          <a:noFill/>
+          <a:ln/>
+        </p:spPr>
+        <p:txBody>
+          <a:bodyPr wrap="square" rtlCol="0" anchor="ctr"/>
+          <a:lstStyle/>
+          <a:p>
+            <a:pPr marL="0" indent="0">
+              <a:buNone/>
+            </a:pPr>
+            <a:r>
+              <a:rPr lang="ja-JP" sz="950" noProof="0" dirty="0">
                 <a:solidFill>
                   <a:srgbClr val="1E293B"/>
                 </a:solidFill>
               </a:rPr>
-              <a:t>→  他の教員の設定ファイルを読み込む</a:t>
-            </a:r>
-            <a:endParaRPr lang="en-US" sz="950" dirty="0"/>
+              <a:t>→  教員の設定ファイルを読み込む</a:t>
+            </a:r>
+            <a:endParaRPr lang="ja-JP" sz="950" noProof="0" dirty="0"/>
           </a:p>
         </p:txBody>
       </p:sp>
@@ -11629,6 +12172,13 @@
           </a:solidFill>
           <a:ln/>
         </p:spPr>
+        <p:txBody>
+          <a:bodyPr/>
+          <a:lstStyle/>
+          <a:p>
+            <a:endParaRPr lang="ja-JP" noProof="0" dirty="0"/>
+          </a:p>
+        </p:txBody>
       </p:sp>
       <p:sp>
         <p:nvSpPr>
@@ -11651,18 +12201,18 @@
           <a:bodyPr wrap="square" rtlCol="0" anchor="ctr"/>
           <a:lstStyle/>
           <a:p>
-            <a:pPr algn="ctr" indent="0" marL="0">
-              <a:buNone/>
-            </a:pPr>
-            <a:r>
-              <a:rPr lang="en-US" sz="850" b="1" dirty="0">
+            <a:pPr marL="0" indent="0" algn="ctr">
+              <a:buNone/>
+            </a:pPr>
+            <a:r>
+              <a:rPr lang="ja-JP" sz="850" b="1" noProof="0" dirty="0">
                 <a:solidFill>
                   <a:srgbClr val="FFFFFF"/>
                 </a:solidFill>
               </a:rPr>
               <a:t>追加</a:t>
             </a:r>
-            <a:endParaRPr lang="en-US" sz="850" dirty="0"/>
+            <a:endParaRPr lang="ja-JP" sz="850" noProof="0" dirty="0"/>
           </a:p>
         </p:txBody>
       </p:sp>
@@ -11674,7 +12224,7 @@
         </p:nvSpPr>
         <p:spPr>
           <a:xfrm>
-            <a:off x="1773936" y="3621024"/>
+            <a:off x="1735836" y="3621024"/>
             <a:ext cx="2011680" cy="210312"/>
           </a:xfrm>
           <a:prstGeom prst="rect">
@@ -11687,18 +12237,18 @@
           <a:bodyPr wrap="square" rtlCol="0" anchor="ctr"/>
           <a:lstStyle/>
           <a:p>
-            <a:pPr indent="0" marL="0">
-              <a:buNone/>
-            </a:pPr>
-            <a:r>
-              <a:rPr lang="en-US" sz="950" dirty="0">
+            <a:pPr marL="0" indent="0">
+              <a:buNone/>
+            </a:pPr>
+            <a:r>
+              <a:rPr lang="ja-JP" sz="950" noProof="0" dirty="0">
                 <a:solidFill>
                   <a:srgbClr val="1E293B"/>
                 </a:solidFill>
               </a:rPr>
               <a:t>→  新しい授業を追加する</a:t>
             </a:r>
-            <a:endParaRPr lang="en-US" sz="950" dirty="0"/>
+            <a:endParaRPr lang="ja-JP" sz="950" noProof="0" dirty="0"/>
           </a:p>
         </p:txBody>
       </p:sp>
@@ -11721,6 +12271,13 @@
           </a:solidFill>
           <a:ln/>
         </p:spPr>
+        <p:txBody>
+          <a:bodyPr/>
+          <a:lstStyle/>
+          <a:p>
+            <a:endParaRPr lang="ja-JP" noProof="0" dirty="0"/>
+          </a:p>
+        </p:txBody>
       </p:sp>
       <p:sp>
         <p:nvSpPr>
@@ -11743,18 +12300,18 @@
           <a:bodyPr wrap="square" rtlCol="0" anchor="ctr"/>
           <a:lstStyle/>
           <a:p>
-            <a:pPr algn="ctr" indent="0" marL="0">
-              <a:buNone/>
-            </a:pPr>
-            <a:r>
-              <a:rPr lang="en-US" sz="850" b="1" dirty="0">
+            <a:pPr marL="0" indent="0" algn="ctr">
+              <a:buNone/>
+            </a:pPr>
+            <a:r>
+              <a:rPr lang="ja-JP" sz="850" b="1" noProof="0" dirty="0">
                 <a:solidFill>
                   <a:srgbClr val="FFFFFF"/>
                 </a:solidFill>
               </a:rPr>
               <a:t>編集</a:t>
             </a:r>
-            <a:endParaRPr lang="en-US" sz="850" dirty="0"/>
+            <a:endParaRPr lang="ja-JP" sz="850" noProof="0" dirty="0"/>
           </a:p>
         </p:txBody>
       </p:sp>
@@ -11766,7 +12323,7 @@
         </p:nvSpPr>
         <p:spPr>
           <a:xfrm>
-            <a:off x="1773936" y="3867912"/>
+            <a:off x="1735836" y="3867912"/>
             <a:ext cx="2011680" cy="210312"/>
           </a:xfrm>
           <a:prstGeom prst="rect">
@@ -11779,18 +12336,18 @@
           <a:bodyPr wrap="square" rtlCol="0" anchor="ctr"/>
           <a:lstStyle/>
           <a:p>
-            <a:pPr indent="0" marL="0">
-              <a:buNone/>
-            </a:pPr>
-            <a:r>
-              <a:rPr lang="en-US" sz="950" dirty="0">
+            <a:pPr marL="0" indent="0">
+              <a:buNone/>
+            </a:pPr>
+            <a:r>
+              <a:rPr lang="ja-JP" sz="950" noProof="0" dirty="0">
                 <a:solidFill>
                   <a:srgbClr val="1E293B"/>
                 </a:solidFill>
               </a:rPr>
               <a:t>→  選択した授業を編集する</a:t>
             </a:r>
-            <a:endParaRPr lang="en-US" sz="950" dirty="0"/>
+            <a:endParaRPr lang="ja-JP" sz="950" noProof="0" dirty="0"/>
           </a:p>
         </p:txBody>
       </p:sp>
@@ -11813,6 +12370,13 @@
           </a:solidFill>
           <a:ln/>
         </p:spPr>
+        <p:txBody>
+          <a:bodyPr/>
+          <a:lstStyle/>
+          <a:p>
+            <a:endParaRPr lang="ja-JP" noProof="0" dirty="0"/>
+          </a:p>
+        </p:txBody>
       </p:sp>
       <p:sp>
         <p:nvSpPr>
@@ -11835,18 +12399,18 @@
           <a:bodyPr wrap="square" rtlCol="0" anchor="ctr"/>
           <a:lstStyle/>
           <a:p>
-            <a:pPr algn="ctr" indent="0" marL="0">
-              <a:buNone/>
-            </a:pPr>
-            <a:r>
-              <a:rPr lang="en-US" sz="850" b="1" dirty="0">
+            <a:pPr marL="0" indent="0" algn="ctr">
+              <a:buNone/>
+            </a:pPr>
+            <a:r>
+              <a:rPr lang="ja-JP" sz="850" b="1" noProof="0" dirty="0">
                 <a:solidFill>
                   <a:srgbClr val="FFFFFF"/>
                 </a:solidFill>
               </a:rPr>
               <a:t>削除</a:t>
             </a:r>
-            <a:endParaRPr lang="en-US" sz="850" dirty="0"/>
+            <a:endParaRPr lang="ja-JP" sz="850" noProof="0" dirty="0"/>
           </a:p>
         </p:txBody>
       </p:sp>
@@ -11858,7 +12422,7 @@
         </p:nvSpPr>
         <p:spPr>
           <a:xfrm>
-            <a:off x="1773936" y="4114800"/>
+            <a:off x="1735836" y="4114800"/>
             <a:ext cx="2011680" cy="210312"/>
           </a:xfrm>
           <a:prstGeom prst="rect">
@@ -11871,18 +12435,18 @@
           <a:bodyPr wrap="square" rtlCol="0" anchor="ctr"/>
           <a:lstStyle/>
           <a:p>
-            <a:pPr indent="0" marL="0">
-              <a:buNone/>
-            </a:pPr>
-            <a:r>
-              <a:rPr lang="en-US" sz="950" dirty="0">
+            <a:pPr marL="0" indent="0">
+              <a:buNone/>
+            </a:pPr>
+            <a:r>
+              <a:rPr lang="ja-JP" sz="950" noProof="0" dirty="0">
                 <a:solidFill>
                   <a:srgbClr val="1E293B"/>
                 </a:solidFill>
               </a:rPr>
               <a:t>→  選択した授業を削除する</a:t>
             </a:r>
-            <a:endParaRPr lang="en-US" sz="950" dirty="0"/>
+            <a:endParaRPr lang="ja-JP" sz="950" noProof="0" dirty="0"/>
           </a:p>
         </p:txBody>
       </p:sp>
@@ -11905,6 +12469,13 @@
           </a:solidFill>
           <a:ln/>
         </p:spPr>
+        <p:txBody>
+          <a:bodyPr/>
+          <a:lstStyle/>
+          <a:p>
+            <a:endParaRPr lang="ja-JP" noProof="0" dirty="0"/>
+          </a:p>
+        </p:txBody>
       </p:sp>
       <p:sp>
         <p:nvSpPr>
@@ -11927,18 +12498,18 @@
           <a:bodyPr wrap="square" rtlCol="0" anchor="ctr"/>
           <a:lstStyle/>
           <a:p>
-            <a:pPr algn="ctr" indent="0" marL="0">
-              <a:buNone/>
-            </a:pPr>
-            <a:r>
-              <a:rPr lang="en-US" sz="850" b="1" dirty="0">
+            <a:pPr marL="0" indent="0" algn="ctr">
+              <a:buNone/>
+            </a:pPr>
+            <a:r>
+              <a:rPr lang="ja-JP" sz="850" b="1" noProof="0" dirty="0">
                 <a:solidFill>
                   <a:srgbClr val="FFFFFF"/>
                 </a:solidFill>
               </a:rPr>
               <a:t>衝突検出</a:t>
             </a:r>
-            <a:endParaRPr lang="en-US" sz="850" dirty="0"/>
+            <a:endParaRPr lang="ja-JP" sz="850" noProof="0" dirty="0"/>
           </a:p>
         </p:txBody>
       </p:sp>
@@ -11950,7 +12521,7 @@
         </p:nvSpPr>
         <p:spPr>
           <a:xfrm>
-            <a:off x="1773936" y="4361688"/>
+            <a:off x="1735836" y="4361688"/>
             <a:ext cx="2011680" cy="210312"/>
           </a:xfrm>
           <a:prstGeom prst="rect">
@@ -11963,31 +12534,31 @@
           <a:bodyPr wrap="square" rtlCol="0" anchor="ctr"/>
           <a:lstStyle/>
           <a:p>
-            <a:pPr indent="0" marL="0">
-              <a:buNone/>
-            </a:pPr>
-            <a:r>
-              <a:rPr lang="en-US" sz="950" dirty="0">
+            <a:pPr marL="0" indent="0">
+              <a:buNone/>
+            </a:pPr>
+            <a:r>
+              <a:rPr lang="ja-JP" sz="950" noProof="0" dirty="0">
                 <a:solidFill>
                   <a:srgbClr val="1E293B"/>
                 </a:solidFill>
               </a:rPr>
               <a:t>→  時間の重複を確認する</a:t>
             </a:r>
-            <a:endParaRPr lang="en-US" sz="950" dirty="0"/>
+            <a:endParaRPr lang="ja-JP" sz="950" noProof="0" dirty="0"/>
           </a:p>
         </p:txBody>
       </p:sp>
       <p:pic>
         <p:nvPicPr>
-          <p:cNvPr id="32" name="Image 0" descr="preencoded.png">    </p:cNvPr>
+          <p:cNvPr id="32" name="Image 0" descr="preencoded.png"/>
           <p:cNvPicPr>
             <a:picLocks noChangeAspect="1"/>
           </p:cNvPicPr>
           <p:nvPr/>
         </p:nvPicPr>
         <p:blipFill>
-          <a:blip r:embed="rId1"/>
+          <a:blip r:embed="rId3"/>
           <a:stretch>
             <a:fillRect/>
           </a:stretch>
@@ -12001,7 +12572,7 @@
             <a:avLst/>
           </a:prstGeom>
           <a:effectLst>
-            <a:outerShdw sx="100000" sy="100000" kx="0" ky="0" algn="bl" rotWithShape="0" blurRad="76200" dist="38100" dir="8100000">
+            <a:outerShdw blurRad="76200" dist="38100" dir="8100000" algn="bl" rotWithShape="0">
               <a:srgbClr val="1E40AF">
                 <a:alpha val="10000"/>
               </a:srgbClr>
@@ -12030,18 +12601,18 @@
           <a:bodyPr wrap="square" rtlCol="0" anchor="ctr"/>
           <a:lstStyle/>
           <a:p>
-            <a:pPr algn="ctr" indent="0" marL="0">
-              <a:buNone/>
-            </a:pPr>
-            <a:r>
-              <a:rPr lang="en-US" sz="950" i="1" dirty="0">
+            <a:pPr marL="0" indent="0" algn="ctr">
+              <a:buNone/>
+            </a:pPr>
+            <a:r>
+              <a:rPr lang="ja-JP" sz="950" i="1" noProof="0" dirty="0">
                 <a:solidFill>
                   <a:srgbClr val="64748B"/>
                 </a:solidFill>
               </a:rPr>
               <a:t>「授業」タブ — 実際の画面</a:t>
             </a:r>
-            <a:endParaRPr lang="en-US" sz="950" dirty="0"/>
+            <a:endParaRPr lang="ja-JP" sz="950" noProof="0" dirty="0"/>
           </a:p>
         </p:txBody>
       </p:sp>
@@ -12064,6 +12635,13 @@
           </a:solidFill>
           <a:ln/>
         </p:spPr>
+        <p:txBody>
+          <a:bodyPr/>
+          <a:lstStyle/>
+          <a:p>
+            <a:endParaRPr lang="ja-JP" noProof="0" dirty="0"/>
+          </a:p>
+        </p:txBody>
       </p:sp>
       <p:sp>
         <p:nvSpPr>
@@ -12086,18 +12664,18 @@
           <a:bodyPr wrap="square" rtlCol="0" anchor="ctr"/>
           <a:lstStyle/>
           <a:p>
-            <a:pPr indent="0" marL="0">
-              <a:buNone/>
-            </a:pPr>
-            <a:r>
-              <a:rPr lang="en-US" sz="900" dirty="0">
+            <a:pPr marL="0" indent="0">
+              <a:buNone/>
+            </a:pPr>
+            <a:r>
+              <a:rPr lang="ja-JP" sz="900" noProof="0" dirty="0">
                 <a:solidFill>
                   <a:srgbClr val="BFDBFE"/>
                 </a:solidFill>
               </a:rPr>
               <a:t>CodeWidget  ユーザーマニュアル</a:t>
             </a:r>
-            <a:endParaRPr lang="en-US" sz="900" dirty="0"/>
+            <a:endParaRPr lang="ja-JP" sz="900" noProof="0" dirty="0"/>
           </a:p>
         </p:txBody>
       </p:sp>
@@ -12122,18 +12700,18 @@
           <a:bodyPr wrap="square" rtlCol="0" anchor="ctr"/>
           <a:lstStyle/>
           <a:p>
-            <a:pPr algn="r" indent="0" marL="0">
-              <a:buNone/>
-            </a:pPr>
-            <a:r>
-              <a:rPr lang="en-US" sz="900" dirty="0">
+            <a:pPr marL="0" indent="0" algn="r">
+              <a:buNone/>
+            </a:pPr>
+            <a:r>
+              <a:rPr lang="ja-JP" sz="900" noProof="0" dirty="0">
                 <a:solidFill>
                   <a:srgbClr val="BFDBFE"/>
                 </a:solidFill>
               </a:rPr>
               <a:t>6</a:t>
             </a:r>
-            <a:endParaRPr lang="en-US" sz="900" dirty="0"/>
+            <a:endParaRPr lang="ja-JP" sz="900" noProof="0" dirty="0"/>
           </a:p>
         </p:txBody>
       </p:sp>
@@ -12153,6 +12731,7 @@
         <a:solidFill>
           <a:srgbClr val="FFFFFF"/>
         </a:solidFill>
+        <a:effectLst/>
       </p:bgPr>
     </p:bg>
     <p:spTree>
@@ -12188,6 +12767,13 @@
           </a:solidFill>
           <a:ln/>
         </p:spPr>
+        <p:txBody>
+          <a:bodyPr/>
+          <a:lstStyle/>
+          <a:p>
+            <a:endParaRPr lang="ja-JP" noProof="0" dirty="0"/>
+          </a:p>
+        </p:txBody>
       </p:sp>
       <p:sp>
         <p:nvSpPr>
@@ -12210,11 +12796,11 @@
           <a:bodyPr wrap="square" rtlCol="0" anchor="ctr"/>
           <a:lstStyle/>
           <a:p>
-            <a:pPr indent="0" marL="0">
-              <a:buNone/>
-            </a:pPr>
-            <a:r>
-              <a:rPr lang="en-US" sz="2300" b="1" dirty="0">
+            <a:pPr marL="0" indent="0">
+              <a:buNone/>
+            </a:pPr>
+            <a:r>
+              <a:rPr lang="ja-JP" sz="2300" b="1" noProof="0" dirty="0">
                 <a:solidFill>
                   <a:srgbClr val="FFFFFF"/>
                 </a:solidFill>
@@ -12224,20 +12810,20 @@
               </a:rPr>
               <a:t>04  出席コードの操作</a:t>
             </a:r>
-            <a:endParaRPr lang="en-US" sz="2300" dirty="0"/>
+            <a:endParaRPr lang="ja-JP" sz="2300" noProof="0" dirty="0"/>
           </a:p>
         </p:txBody>
       </p:sp>
       <p:pic>
         <p:nvPicPr>
-          <p:cNvPr id="4" name="Image 0" descr="preencoded.png">    </p:cNvPr>
+          <p:cNvPr id="4" name="Image 0" descr="preencoded.png"/>
           <p:cNvPicPr>
             <a:picLocks noChangeAspect="1"/>
           </p:cNvPicPr>
           <p:nvPr/>
         </p:nvPicPr>
         <p:blipFill>
-          <a:blip r:embed="rId1"/>
+          <a:blip r:embed="rId3"/>
           <a:stretch>
             <a:fillRect/>
           </a:stretch>
@@ -12251,7 +12837,7 @@
             <a:avLst/>
           </a:prstGeom>
           <a:effectLst>
-            <a:outerShdw sx="100000" sy="100000" kx="0" ky="0" algn="bl" rotWithShape="0" blurRad="76200" dist="38100" dir="8100000">
+            <a:outerShdw blurRad="76200" dist="38100" dir="8100000" algn="bl" rotWithShape="0">
               <a:srgbClr val="1E40AF">
                 <a:alpha val="10000"/>
               </a:srgbClr>
@@ -12280,31 +12866,31 @@
           <a:bodyPr wrap="square" rtlCol="0" anchor="ctr"/>
           <a:lstStyle/>
           <a:p>
-            <a:pPr algn="ctr" indent="0" marL="0">
-              <a:buNone/>
-            </a:pPr>
-            <a:r>
-              <a:rPr lang="en-US" sz="950" i="1" dirty="0">
+            <a:pPr marL="0" indent="0" algn="ctr">
+              <a:buNone/>
+            </a:pPr>
+            <a:r>
+              <a:rPr lang="ja-JP" sz="950" i="1" noProof="0" dirty="0">
                 <a:solidFill>
                   <a:srgbClr val="64748B"/>
                 </a:solidFill>
               </a:rPr>
               <a:t>▲ 通常表示状態</a:t>
             </a:r>
-            <a:endParaRPr lang="en-US" sz="950" dirty="0"/>
+            <a:endParaRPr lang="ja-JP" sz="950" noProof="0" dirty="0"/>
           </a:p>
         </p:txBody>
       </p:sp>
       <p:pic>
         <p:nvPicPr>
-          <p:cNvPr id="6" name="Image 1" descr="preencoded.png">    </p:cNvPr>
+          <p:cNvPr id="6" name="Image 1" descr="preencoded.png"/>
           <p:cNvPicPr>
             <a:picLocks noChangeAspect="1"/>
           </p:cNvPicPr>
           <p:nvPr/>
         </p:nvPicPr>
         <p:blipFill>
-          <a:blip r:embed="rId2"/>
+          <a:blip r:embed="rId4"/>
           <a:stretch>
             <a:fillRect/>
           </a:stretch>
@@ -12318,7 +12904,7 @@
             <a:avLst/>
           </a:prstGeom>
           <a:effectLst>
-            <a:outerShdw sx="100000" sy="100000" kx="0" ky="0" algn="bl" rotWithShape="0" blurRad="76200" dist="38100" dir="8100000">
+            <a:outerShdw blurRad="76200" dist="38100" dir="8100000" algn="bl" rotWithShape="0">
               <a:srgbClr val="1E40AF">
                 <a:alpha val="10000"/>
               </a:srgbClr>
@@ -12347,18 +12933,18 @@
           <a:bodyPr wrap="square" rtlCol="0" anchor="ctr"/>
           <a:lstStyle/>
           <a:p>
-            <a:pPr algn="ctr" indent="0" marL="0">
-              <a:buNone/>
-            </a:pPr>
-            <a:r>
-              <a:rPr lang="en-US" sz="950" i="1" dirty="0">
+            <a:pPr marL="0" indent="0" algn="ctr">
+              <a:buNone/>
+            </a:pPr>
+            <a:r>
+              <a:rPr lang="ja-JP" sz="950" i="1" noProof="0" dirty="0">
                 <a:solidFill>
                   <a:srgbClr val="64748B"/>
                 </a:solidFill>
               </a:rPr>
               <a:t>▲ 右クリック「入力」後の入力状態</a:t>
             </a:r>
-            <a:endParaRPr lang="en-US" sz="950" dirty="0"/>
+            <a:endParaRPr lang="ja-JP" sz="950" noProof="0" dirty="0"/>
           </a:p>
         </p:txBody>
       </p:sp>
@@ -12381,13 +12967,20 @@
           </a:solidFill>
           <a:ln/>
           <a:effectLst>
-            <a:outerShdw sx="100000" sy="100000" kx="0" ky="0" algn="bl" rotWithShape="0" blurRad="76200" dist="38100" dir="8100000">
+            <a:outerShdw blurRad="76200" dist="38100" dir="8100000" algn="bl" rotWithShape="0">
               <a:srgbClr val="1E40AF">
                 <a:alpha val="10000"/>
               </a:srgbClr>
             </a:outerShdw>
           </a:effectLst>
         </p:spPr>
+        <p:txBody>
+          <a:bodyPr/>
+          <a:lstStyle/>
+          <a:p>
+            <a:endParaRPr lang="ja-JP" noProof="0" dirty="0"/>
+          </a:p>
+        </p:txBody>
       </p:sp>
       <p:sp>
         <p:nvSpPr>
@@ -12408,6 +13001,13 @@
           </a:solidFill>
           <a:ln/>
         </p:spPr>
+        <p:txBody>
+          <a:bodyPr/>
+          <a:lstStyle/>
+          <a:p>
+            <a:endParaRPr lang="ja-JP" noProof="0" dirty="0"/>
+          </a:p>
+        </p:txBody>
       </p:sp>
       <p:sp>
         <p:nvSpPr>
@@ -12430,18 +13030,18 @@
           <a:bodyPr wrap="square" rtlCol="0" anchor="ctr"/>
           <a:lstStyle/>
           <a:p>
-            <a:pPr indent="0" marL="0">
-              <a:buNone/>
-            </a:pPr>
-            <a:r>
-              <a:rPr lang="en-US" sz="1250" b="1" dirty="0">
+            <a:pPr marL="0" indent="0">
+              <a:buNone/>
+            </a:pPr>
+            <a:r>
+              <a:rPr lang="ja-JP" sz="1250" b="1" noProof="0" dirty="0">
                 <a:solidFill>
                   <a:srgbClr val="1E40AF"/>
                 </a:solidFill>
               </a:rPr>
               <a:t>①  出席コードを入力（一時コード）</a:t>
             </a:r>
-            <a:endParaRPr lang="en-US" sz="1250" dirty="0"/>
+            <a:endParaRPr lang="ja-JP" sz="1250" noProof="0" dirty="0"/>
           </a:p>
         </p:txBody>
       </p:sp>
@@ -12466,32 +13066,32 @@
           <a:bodyPr wrap="square" rtlCol="0" anchor="ctr"/>
           <a:lstStyle/>
           <a:p>
-            <a:pPr indent="0" marL="0">
-              <a:buNone/>
-            </a:pPr>
-            <a:r>
-              <a:rPr lang="en-US" sz="1100" dirty="0">
+            <a:pPr marL="0" indent="0">
+              <a:buNone/>
+            </a:pPr>
+            <a:r>
+              <a:rPr lang="ja-JP" sz="1100" noProof="0" dirty="0">
                 <a:solidFill>
                   <a:srgbClr val="1E293B"/>
                 </a:solidFill>
               </a:rPr>
               <a:t>表示ウィンドウを右クリック →「入力」→ コードを貼り付けて Enter。</a:t>
             </a:r>
-            <a:endParaRPr lang="en-US" sz="1100" dirty="0"/>
-          </a:p>
-          <a:p>
-            <a:pPr indent="0" marL="0">
-              <a:buNone/>
-            </a:pPr>
-            <a:r>
-              <a:rPr lang="en-US" sz="1100" dirty="0">
+            <a:endParaRPr lang="ja-JP" sz="1100" noProof="0" dirty="0"/>
+          </a:p>
+          <a:p>
+            <a:pPr marL="0" indent="0">
+              <a:buNone/>
+            </a:pPr>
+            <a:r>
+              <a:rPr lang="ja-JP" sz="1100" noProof="0" dirty="0">
                 <a:solidFill>
                   <a:srgbClr val="1E293B"/>
                 </a:solidFill>
               </a:rPr>
               <a:t>⚠ 一時コードは 30 分で自動消去（設定ファイルには保存されません）。</a:t>
             </a:r>
-            <a:endParaRPr lang="en-US" sz="1100" dirty="0"/>
+            <a:endParaRPr lang="ja-JP" sz="1100" noProof="0" dirty="0"/>
           </a:p>
         </p:txBody>
       </p:sp>
@@ -12514,13 +13114,20 @@
           </a:solidFill>
           <a:ln/>
           <a:effectLst>
-            <a:outerShdw sx="100000" sy="100000" kx="0" ky="0" algn="bl" rotWithShape="0" blurRad="76200" dist="38100" dir="8100000">
+            <a:outerShdw blurRad="76200" dist="38100" dir="8100000" algn="bl" rotWithShape="0">
               <a:srgbClr val="1E40AF">
                 <a:alpha val="10000"/>
               </a:srgbClr>
             </a:outerShdw>
           </a:effectLst>
         </p:spPr>
+        <p:txBody>
+          <a:bodyPr/>
+          <a:lstStyle/>
+          <a:p>
+            <a:endParaRPr lang="ja-JP" noProof="0" dirty="0"/>
+          </a:p>
+        </p:txBody>
       </p:sp>
       <p:sp>
         <p:nvSpPr>
@@ -12541,6 +13148,13 @@
           </a:solidFill>
           <a:ln/>
         </p:spPr>
+        <p:txBody>
+          <a:bodyPr/>
+          <a:lstStyle/>
+          <a:p>
+            <a:endParaRPr lang="ja-JP" noProof="0" dirty="0"/>
+          </a:p>
+        </p:txBody>
       </p:sp>
       <p:sp>
         <p:nvSpPr>
@@ -12563,18 +13177,18 @@
           <a:bodyPr wrap="square" rtlCol="0" anchor="ctr"/>
           <a:lstStyle/>
           <a:p>
-            <a:pPr indent="0" marL="0">
-              <a:buNone/>
-            </a:pPr>
-            <a:r>
-              <a:rPr lang="en-US" sz="1250" b="1" dirty="0">
+            <a:pPr marL="0" indent="0">
+              <a:buNone/>
+            </a:pPr>
+            <a:r>
+              <a:rPr lang="ja-JP" sz="1250" b="1" noProof="0" dirty="0">
                 <a:solidFill>
                   <a:srgbClr val="1E40AF"/>
                 </a:solidFill>
               </a:rPr>
               <a:t>②  コードを一括生成（永続コード）</a:t>
             </a:r>
-            <a:endParaRPr lang="en-US" sz="1250" dirty="0"/>
+            <a:endParaRPr lang="ja-JP" sz="1250" noProof="0" dirty="0"/>
           </a:p>
         </p:txBody>
       </p:sp>
@@ -12599,18 +13213,18 @@
           <a:bodyPr wrap="square" rtlCol="0" anchor="ctr"/>
           <a:lstStyle/>
           <a:p>
-            <a:pPr indent="0" marL="0">
-              <a:buNone/>
-            </a:pPr>
-            <a:r>
-              <a:rPr lang="en-US" sz="1100" dirty="0">
+            <a:pPr marL="0" indent="0">
+              <a:buNone/>
+            </a:pPr>
+            <a:r>
+              <a:rPr lang="ja-JP" sz="1100" noProof="0" dirty="0">
                 <a:solidFill>
                   <a:srgbClr val="1E293B"/>
                 </a:solidFill>
               </a:rPr>
               <a:t>設定 →「日程プレビュー」タブ →「コード生成」ボタンをクリック。全授業回のコードを自動生成します。</a:t>
             </a:r>
-            <a:endParaRPr lang="en-US" sz="1100" dirty="0"/>
+            <a:endParaRPr lang="ja-JP" sz="1100" noProof="0" dirty="0"/>
           </a:p>
         </p:txBody>
       </p:sp>
@@ -12633,13 +13247,20 @@
           </a:solidFill>
           <a:ln/>
           <a:effectLst>
-            <a:outerShdw sx="100000" sy="100000" kx="0" ky="0" algn="bl" rotWithShape="0" blurRad="76200" dist="38100" dir="8100000">
+            <a:outerShdw blurRad="76200" dist="38100" dir="8100000" algn="bl" rotWithShape="0">
               <a:srgbClr val="1E40AF">
                 <a:alpha val="10000"/>
               </a:srgbClr>
             </a:outerShdw>
           </a:effectLst>
         </p:spPr>
+        <p:txBody>
+          <a:bodyPr/>
+          <a:lstStyle/>
+          <a:p>
+            <a:endParaRPr lang="ja-JP" noProof="0" dirty="0"/>
+          </a:p>
+        </p:txBody>
       </p:sp>
       <p:sp>
         <p:nvSpPr>
@@ -12660,6 +13281,13 @@
           </a:solidFill>
           <a:ln/>
         </p:spPr>
+        <p:txBody>
+          <a:bodyPr/>
+          <a:lstStyle/>
+          <a:p>
+            <a:endParaRPr lang="ja-JP" noProof="0" dirty="0"/>
+          </a:p>
+        </p:txBody>
       </p:sp>
       <p:sp>
         <p:nvSpPr>
@@ -12682,18 +13310,18 @@
           <a:bodyPr wrap="square" rtlCol="0" anchor="ctr"/>
           <a:lstStyle/>
           <a:p>
-            <a:pPr indent="0" marL="0">
-              <a:buNone/>
-            </a:pPr>
-            <a:r>
-              <a:rPr lang="en-US" sz="1250" b="1" dirty="0">
+            <a:pPr marL="0" indent="0">
+              <a:buNone/>
+            </a:pPr>
+            <a:r>
+              <a:rPr lang="ja-JP" sz="1250" b="1" noProof="0" dirty="0">
                 <a:solidFill>
                   <a:srgbClr val="1E40AF"/>
                 </a:solidFill>
               </a:rPr>
               <a:t>③  コードをクリア</a:t>
             </a:r>
-            <a:endParaRPr lang="en-US" sz="1250" dirty="0"/>
+            <a:endParaRPr lang="ja-JP" sz="1250" noProof="0" dirty="0"/>
           </a:p>
         </p:txBody>
       </p:sp>
@@ -12718,18 +13346,18 @@
           <a:bodyPr wrap="square" rtlCol="0" anchor="ctr"/>
           <a:lstStyle/>
           <a:p>
-            <a:pPr indent="0" marL="0">
-              <a:buNone/>
-            </a:pPr>
-            <a:r>
-              <a:rPr lang="en-US" sz="1100" dirty="0">
+            <a:pPr marL="0" indent="0">
+              <a:buNone/>
+            </a:pPr>
+            <a:r>
+              <a:rPr lang="ja-JP" sz="1100" noProof="0" dirty="0">
                 <a:solidFill>
                   <a:srgbClr val="1E293B"/>
                 </a:solidFill>
               </a:rPr>
               <a:t>表示ウィンドウを右クリック →「クリア」。コードが消去され「----」が表示されます。</a:t>
             </a:r>
-            <a:endParaRPr lang="en-US" sz="1100" dirty="0"/>
+            <a:endParaRPr lang="ja-JP" sz="1100" noProof="0" dirty="0"/>
           </a:p>
         </p:txBody>
       </p:sp>
@@ -12752,6 +13380,13 @@
           </a:solidFill>
           <a:ln/>
         </p:spPr>
+        <p:txBody>
+          <a:bodyPr/>
+          <a:lstStyle/>
+          <a:p>
+            <a:endParaRPr lang="ja-JP" noProof="0" dirty="0"/>
+          </a:p>
+        </p:txBody>
       </p:sp>
       <p:sp>
         <p:nvSpPr>
@@ -12774,18 +13409,18 @@
           <a:bodyPr wrap="square" rtlCol="0" anchor="ctr"/>
           <a:lstStyle/>
           <a:p>
-            <a:pPr indent="0" marL="0">
-              <a:buNone/>
-            </a:pPr>
-            <a:r>
-              <a:rPr lang="en-US" sz="900" dirty="0">
+            <a:pPr marL="0" indent="0">
+              <a:buNone/>
+            </a:pPr>
+            <a:r>
+              <a:rPr lang="ja-JP" sz="900" noProof="0" dirty="0">
                 <a:solidFill>
                   <a:srgbClr val="BFDBFE"/>
                 </a:solidFill>
               </a:rPr>
               <a:t>CodeWidget  ユーザーマニュアル</a:t>
             </a:r>
-            <a:endParaRPr lang="en-US" sz="900" dirty="0"/>
+            <a:endParaRPr lang="ja-JP" sz="900" noProof="0" dirty="0"/>
           </a:p>
         </p:txBody>
       </p:sp>
@@ -12810,18 +13445,18 @@
           <a:bodyPr wrap="square" rtlCol="0" anchor="ctr"/>
           <a:lstStyle/>
           <a:p>
-            <a:pPr algn="r" indent="0" marL="0">
-              <a:buNone/>
-            </a:pPr>
-            <a:r>
-              <a:rPr lang="en-US" sz="900" dirty="0">
+            <a:pPr marL="0" indent="0" algn="r">
+              <a:buNone/>
+            </a:pPr>
+            <a:r>
+              <a:rPr lang="ja-JP" sz="900" noProof="0" dirty="0">
                 <a:solidFill>
                   <a:srgbClr val="BFDBFE"/>
                 </a:solidFill>
               </a:rPr>
               <a:t>7</a:t>
             </a:r>
-            <a:endParaRPr lang="en-US" sz="900" dirty="0"/>
+            <a:endParaRPr lang="ja-JP" sz="900" noProof="0" dirty="0"/>
           </a:p>
         </p:txBody>
       </p:sp>
@@ -12841,6 +13476,7 @@
         <a:solidFill>
           <a:srgbClr val="FFFFFF"/>
         </a:solidFill>
+        <a:effectLst/>
       </p:bgPr>
     </p:bg>
     <p:spTree>
@@ -12876,6 +13512,13 @@
           </a:solidFill>
           <a:ln/>
         </p:spPr>
+        <p:txBody>
+          <a:bodyPr/>
+          <a:lstStyle/>
+          <a:p>
+            <a:endParaRPr lang="ja-JP" noProof="0" dirty="0"/>
+          </a:p>
+        </p:txBody>
       </p:sp>
       <p:sp>
         <p:nvSpPr>
@@ -12898,11 +13541,11 @@
           <a:bodyPr wrap="square" rtlCol="0" anchor="ctr"/>
           <a:lstStyle/>
           <a:p>
-            <a:pPr indent="0" marL="0">
-              <a:buNone/>
-            </a:pPr>
-            <a:r>
-              <a:rPr lang="en-US" sz="2300" b="1" dirty="0">
+            <a:pPr marL="0" indent="0">
+              <a:buNone/>
+            </a:pPr>
+            <a:r>
+              <a:rPr lang="ja-JP" sz="2300" b="1" noProof="0" dirty="0">
                 <a:solidFill>
                   <a:srgbClr val="FFFFFF"/>
                 </a:solidFill>
@@ -12912,20 +13555,20 @@
               </a:rPr>
               <a:t>04  出席コード — 日程プレビューで一括管理</a:t>
             </a:r>
-            <a:endParaRPr lang="en-US" sz="2300" dirty="0"/>
+            <a:endParaRPr lang="ja-JP" sz="2300" noProof="0" dirty="0"/>
           </a:p>
         </p:txBody>
       </p:sp>
       <p:pic>
         <p:nvPicPr>
-          <p:cNvPr id="4" name="Image 0" descr="preencoded.png">    </p:cNvPr>
+          <p:cNvPr id="4" name="Image 0" descr="preencoded.png"/>
           <p:cNvPicPr>
             <a:picLocks noChangeAspect="1"/>
           </p:cNvPicPr>
           <p:nvPr/>
         </p:nvPicPr>
         <p:blipFill>
-          <a:blip r:embed="rId1"/>
+          <a:blip r:embed="rId3"/>
           <a:stretch>
             <a:fillRect/>
           </a:stretch>
@@ -12939,7 +13582,7 @@
             <a:avLst/>
           </a:prstGeom>
           <a:effectLst>
-            <a:outerShdw sx="100000" sy="100000" kx="0" ky="0" algn="bl" rotWithShape="0" blurRad="76200" dist="38100" dir="8100000">
+            <a:outerShdw blurRad="76200" dist="38100" dir="8100000" algn="bl" rotWithShape="0">
               <a:srgbClr val="1E40AF">
                 <a:alpha val="10000"/>
               </a:srgbClr>
@@ -12968,18 +13611,18 @@
           <a:bodyPr wrap="square" rtlCol="0" anchor="ctr"/>
           <a:lstStyle/>
           <a:p>
-            <a:pPr algn="ctr" indent="0" marL="0">
-              <a:buNone/>
-            </a:pPr>
-            <a:r>
-              <a:rPr lang="en-US" sz="950" i="1" dirty="0">
+            <a:pPr marL="0" indent="0" algn="ctr">
+              <a:buNone/>
+            </a:pPr>
+            <a:r>
+              <a:rPr lang="ja-JP" sz="950" i="1" noProof="0" dirty="0">
                 <a:solidFill>
                   <a:srgbClr val="64748B"/>
                 </a:solidFill>
               </a:rPr>
               <a:t>「日程プレビュー」タブ — 実際の画面</a:t>
             </a:r>
-            <a:endParaRPr lang="en-US" sz="950" dirty="0"/>
+            <a:endParaRPr lang="ja-JP" sz="950" noProof="0" dirty="0"/>
           </a:p>
         </p:txBody>
       </p:sp>
@@ -13002,13 +13645,20 @@
           </a:solidFill>
           <a:ln/>
           <a:effectLst>
-            <a:outerShdw sx="100000" sy="100000" kx="0" ky="0" algn="bl" rotWithShape="0" blurRad="76200" dist="38100" dir="8100000">
+            <a:outerShdw blurRad="76200" dist="38100" dir="8100000" algn="bl" rotWithShape="0">
               <a:srgbClr val="1E40AF">
                 <a:alpha val="10000"/>
               </a:srgbClr>
             </a:outerShdw>
           </a:effectLst>
         </p:spPr>
+        <p:txBody>
+          <a:bodyPr/>
+          <a:lstStyle/>
+          <a:p>
+            <a:endParaRPr lang="ja-JP" noProof="0" dirty="0"/>
+          </a:p>
+        </p:txBody>
       </p:sp>
       <p:sp>
         <p:nvSpPr>
@@ -13031,18 +13681,18 @@
           <a:bodyPr wrap="square" rtlCol="0" anchor="ctr"/>
           <a:lstStyle/>
           <a:p>
-            <a:pPr indent="0" marL="0">
-              <a:buNone/>
-            </a:pPr>
-            <a:r>
-              <a:rPr lang="en-US" sz="1200" b="1" dirty="0">
+            <a:pPr marL="0" indent="0">
+              <a:buNone/>
+            </a:pPr>
+            <a:r>
+              <a:rPr lang="ja-JP" sz="1200" b="1" noProof="0" dirty="0">
                 <a:solidFill>
                   <a:srgbClr val="1E40AF"/>
                 </a:solidFill>
               </a:rPr>
               <a:t>🔵  コード設定済み</a:t>
             </a:r>
-            <a:endParaRPr lang="en-US" sz="1200" dirty="0"/>
+            <a:endParaRPr lang="ja-JP" sz="1200" noProof="0" dirty="0"/>
           </a:p>
         </p:txBody>
       </p:sp>
@@ -13067,18 +13717,18 @@
           <a:bodyPr wrap="square" rtlCol="0" anchor="ctr"/>
           <a:lstStyle/>
           <a:p>
-            <a:pPr indent="0" marL="0">
-              <a:buNone/>
-            </a:pPr>
-            <a:r>
-              <a:rPr lang="en-US" sz="1050" dirty="0">
+            <a:pPr marL="0" indent="0">
+              <a:buNone/>
+            </a:pPr>
+            <a:r>
+              <a:rPr lang="ja-JP" sz="1050" noProof="0" dirty="0">
                 <a:solidFill>
                   <a:srgbClr val="1E293B"/>
                 </a:solidFill>
               </a:rPr>
               <a:t>4桁の数字が表示されます。次回起動時も有効です。</a:t>
             </a:r>
-            <a:endParaRPr lang="en-US" sz="1050" dirty="0"/>
+            <a:endParaRPr lang="ja-JP" sz="1050" noProof="0" dirty="0"/>
           </a:p>
         </p:txBody>
       </p:sp>
@@ -13101,13 +13751,20 @@
           </a:solidFill>
           <a:ln/>
           <a:effectLst>
-            <a:outerShdw sx="100000" sy="100000" kx="0" ky="0" algn="bl" rotWithShape="0" blurRad="76200" dist="38100" dir="8100000">
+            <a:outerShdw blurRad="76200" dist="38100" dir="8100000" algn="bl" rotWithShape="0">
               <a:srgbClr val="1E40AF">
                 <a:alpha val="10000"/>
               </a:srgbClr>
             </a:outerShdw>
           </a:effectLst>
         </p:spPr>
+        <p:txBody>
+          <a:bodyPr/>
+          <a:lstStyle/>
+          <a:p>
+            <a:endParaRPr lang="ja-JP" noProof="0" dirty="0"/>
+          </a:p>
+        </p:txBody>
       </p:sp>
       <p:sp>
         <p:nvSpPr>
@@ -13130,18 +13787,18 @@
           <a:bodyPr wrap="square" rtlCol="0" anchor="ctr"/>
           <a:lstStyle/>
           <a:p>
-            <a:pPr indent="0" marL="0">
-              <a:buNone/>
-            </a:pPr>
-            <a:r>
-              <a:rPr lang="en-US" sz="1200" b="1" dirty="0">
+            <a:pPr marL="0" indent="0">
+              <a:buNone/>
+            </a:pPr>
+            <a:r>
+              <a:rPr lang="ja-JP" sz="1200" b="1" noProof="0" dirty="0">
                 <a:solidFill>
                   <a:srgbClr val="1E40AF"/>
                 </a:solidFill>
               </a:rPr>
               <a:t>🟡  コード未設定</a:t>
             </a:r>
-            <a:endParaRPr lang="en-US" sz="1200" dirty="0"/>
+            <a:endParaRPr lang="ja-JP" sz="1200" noProof="0" dirty="0"/>
           </a:p>
         </p:txBody>
       </p:sp>
@@ -13166,18 +13823,18 @@
           <a:bodyPr wrap="square" rtlCol="0" anchor="ctr"/>
           <a:lstStyle/>
           <a:p>
-            <a:pPr indent="0" marL="0">
-              <a:buNone/>
-            </a:pPr>
-            <a:r>
-              <a:rPr lang="en-US" sz="1050" dirty="0">
+            <a:pPr marL="0" indent="0">
+              <a:buNone/>
+            </a:pPr>
+            <a:r>
+              <a:rPr lang="ja-JP" sz="1050" noProof="0" dirty="0">
                 <a:solidFill>
                   <a:srgbClr val="1E293B"/>
                 </a:solidFill>
               </a:rPr>
               <a:t>黄色の背景行に「（未設定）」と表示されます。セルをクリックして手動入力できます。</a:t>
             </a:r>
-            <a:endParaRPr lang="en-US" sz="1050" dirty="0"/>
+            <a:endParaRPr lang="ja-JP" sz="1050" noProof="0" dirty="0"/>
           </a:p>
         </p:txBody>
       </p:sp>
@@ -13200,13 +13857,20 @@
           </a:solidFill>
           <a:ln/>
           <a:effectLst>
-            <a:outerShdw sx="100000" sy="100000" kx="0" ky="0" algn="bl" rotWithShape="0" blurRad="76200" dist="38100" dir="8100000">
+            <a:outerShdw blurRad="76200" dist="38100" dir="8100000" algn="bl" rotWithShape="0">
               <a:srgbClr val="1E40AF">
                 <a:alpha val="10000"/>
               </a:srgbClr>
             </a:outerShdw>
           </a:effectLst>
         </p:spPr>
+        <p:txBody>
+          <a:bodyPr/>
+          <a:lstStyle/>
+          <a:p>
+            <a:endParaRPr lang="ja-JP" noProof="0" dirty="0"/>
+          </a:p>
+        </p:txBody>
       </p:sp>
       <p:sp>
         <p:nvSpPr>
@@ -13229,18 +13893,18 @@
           <a:bodyPr wrap="square" rtlCol="0" anchor="ctr"/>
           <a:lstStyle/>
           <a:p>
-            <a:pPr indent="0" marL="0">
-              <a:buNone/>
-            </a:pPr>
-            <a:r>
-              <a:rPr lang="en-US" sz="1200" b="1" dirty="0">
+            <a:pPr marL="0" indent="0">
+              <a:buNone/>
+            </a:pPr>
+            <a:r>
+              <a:rPr lang="ja-JP" sz="1200" b="1" noProof="0" dirty="0">
                 <a:solidFill>
                   <a:srgbClr val="1E40AF"/>
                 </a:solidFill>
               </a:rPr>
               <a:t>✨  コード生成 ボタン</a:t>
             </a:r>
-            <a:endParaRPr lang="en-US" sz="1200" dirty="0"/>
+            <a:endParaRPr lang="ja-JP" sz="1200" noProof="0" dirty="0"/>
           </a:p>
         </p:txBody>
       </p:sp>
@@ -13265,18 +13929,18 @@
           <a:bodyPr wrap="square" rtlCol="0" anchor="ctr"/>
           <a:lstStyle/>
           <a:p>
-            <a:pPr indent="0" marL="0">
-              <a:buNone/>
-            </a:pPr>
-            <a:r>
-              <a:rPr lang="en-US" sz="1050" dirty="0">
+            <a:pPr marL="0" indent="0">
+              <a:buNone/>
+            </a:pPr>
+            <a:r>
+              <a:rPr lang="ja-JP" sz="1050" noProof="0" dirty="0">
                 <a:solidFill>
                   <a:srgbClr val="1E293B"/>
                 </a:solidFill>
               </a:rPr>
               <a:t>未設定の全回次にランダムな 4 桁コードを自動生成します。</a:t>
             </a:r>
-            <a:endParaRPr lang="en-US" sz="1050" dirty="0"/>
+            <a:endParaRPr lang="ja-JP" sz="1050" noProof="0" dirty="0"/>
           </a:p>
         </p:txBody>
       </p:sp>
@@ -13299,13 +13963,20 @@
           </a:solidFill>
           <a:ln/>
           <a:effectLst>
-            <a:outerShdw sx="100000" sy="100000" kx="0" ky="0" algn="bl" rotWithShape="0" blurRad="76200" dist="38100" dir="8100000">
+            <a:outerShdw blurRad="76200" dist="38100" dir="8100000" algn="bl" rotWithShape="0">
               <a:srgbClr val="1E40AF">
                 <a:alpha val="10000"/>
               </a:srgbClr>
             </a:outerShdw>
           </a:effectLst>
         </p:spPr>
+        <p:txBody>
+          <a:bodyPr/>
+          <a:lstStyle/>
+          <a:p>
+            <a:endParaRPr lang="ja-JP" noProof="0" dirty="0"/>
+          </a:p>
+        </p:txBody>
       </p:sp>
       <p:sp>
         <p:nvSpPr>
@@ -13328,18 +13999,18 @@
           <a:bodyPr wrap="square" rtlCol="0" anchor="ctr"/>
           <a:lstStyle/>
           <a:p>
-            <a:pPr indent="0" marL="0">
-              <a:buNone/>
-            </a:pPr>
-            <a:r>
-              <a:rPr lang="en-US" sz="1200" b="1" dirty="0">
+            <a:pPr marL="0" indent="0">
+              <a:buNone/>
+            </a:pPr>
+            <a:r>
+              <a:rPr lang="ja-JP" sz="1200" b="1" noProof="0" dirty="0">
                 <a:solidFill>
                   <a:srgbClr val="1E40AF"/>
                 </a:solidFill>
               </a:rPr>
               <a:t>✏️  直接編集</a:t>
             </a:r>
-            <a:endParaRPr lang="en-US" sz="1200" dirty="0"/>
+            <a:endParaRPr lang="ja-JP" sz="1200" noProof="0" dirty="0"/>
           </a:p>
         </p:txBody>
       </p:sp>
@@ -13364,18 +14035,18 @@
           <a:bodyPr wrap="square" rtlCol="0" anchor="ctr"/>
           <a:lstStyle/>
           <a:p>
-            <a:pPr indent="0" marL="0">
-              <a:buNone/>
-            </a:pPr>
-            <a:r>
-              <a:rPr lang="en-US" sz="1050" dirty="0">
+            <a:pPr marL="0" indent="0">
+              <a:buNone/>
+            </a:pPr>
+            <a:r>
+              <a:rPr lang="ja-JP" sz="1050" noProof="0" dirty="0">
                 <a:solidFill>
                   <a:srgbClr val="1E293B"/>
                 </a:solidFill>
               </a:rPr>
               <a:t>出席コード列のセルをクリックして直接入力・修正できます。</a:t>
             </a:r>
-            <a:endParaRPr lang="en-US" sz="1050" dirty="0"/>
+            <a:endParaRPr lang="ja-JP" sz="1050" noProof="0" dirty="0"/>
           </a:p>
         </p:txBody>
       </p:sp>
@@ -13398,6 +14069,13 @@
           </a:solidFill>
           <a:ln/>
         </p:spPr>
+        <p:txBody>
+          <a:bodyPr/>
+          <a:lstStyle/>
+          <a:p>
+            <a:endParaRPr lang="ja-JP" noProof="0" dirty="0"/>
+          </a:p>
+        </p:txBody>
       </p:sp>
       <p:sp>
         <p:nvSpPr>
@@ -13420,18 +14098,18 @@
           <a:bodyPr wrap="square" rtlCol="0" anchor="ctr"/>
           <a:lstStyle/>
           <a:p>
-            <a:pPr indent="0" marL="0">
-              <a:buNone/>
-            </a:pPr>
-            <a:r>
-              <a:rPr lang="en-US" sz="900" dirty="0">
+            <a:pPr marL="0" indent="0">
+              <a:buNone/>
+            </a:pPr>
+            <a:r>
+              <a:rPr lang="ja-JP" sz="900" noProof="0" dirty="0">
                 <a:solidFill>
                   <a:srgbClr val="BFDBFE"/>
                 </a:solidFill>
               </a:rPr>
               <a:t>CodeWidget  ユーザーマニュアル</a:t>
             </a:r>
-            <a:endParaRPr lang="en-US" sz="900" dirty="0"/>
+            <a:endParaRPr lang="ja-JP" sz="900" noProof="0" dirty="0"/>
           </a:p>
         </p:txBody>
       </p:sp>
@@ -13456,18 +14134,18 @@
           <a:bodyPr wrap="square" rtlCol="0" anchor="ctr"/>
           <a:lstStyle/>
           <a:p>
-            <a:pPr algn="r" indent="0" marL="0">
-              <a:buNone/>
-            </a:pPr>
-            <a:r>
-              <a:rPr lang="en-US" sz="900" dirty="0">
+            <a:pPr marL="0" indent="0" algn="r">
+              <a:buNone/>
+            </a:pPr>
+            <a:r>
+              <a:rPr lang="ja-JP" sz="900" noProof="0" dirty="0">
                 <a:solidFill>
                   <a:srgbClr val="BFDBFE"/>
                 </a:solidFill>
               </a:rPr>
               <a:t>8</a:t>
             </a:r>
-            <a:endParaRPr lang="en-US" sz="900" dirty="0"/>
+            <a:endParaRPr lang="ja-JP" sz="900" noProof="0" dirty="0"/>
           </a:p>
         </p:txBody>
       </p:sp>
@@ -13487,6 +14165,7 @@
         <a:solidFill>
           <a:srgbClr val="FFFFFF"/>
         </a:solidFill>
+        <a:effectLst/>
       </p:bgPr>
     </p:bg>
     <p:spTree>
@@ -13522,6 +14201,13 @@
           </a:solidFill>
           <a:ln/>
         </p:spPr>
+        <p:txBody>
+          <a:bodyPr/>
+          <a:lstStyle/>
+          <a:p>
+            <a:endParaRPr lang="ja-JP" noProof="0" dirty="0"/>
+          </a:p>
+        </p:txBody>
       </p:sp>
       <p:sp>
         <p:nvSpPr>
@@ -13544,11 +14230,11 @@
           <a:bodyPr wrap="square" rtlCol="0" anchor="ctr"/>
           <a:lstStyle/>
           <a:p>
-            <a:pPr indent="0" marL="0">
-              <a:buNone/>
-            </a:pPr>
-            <a:r>
-              <a:rPr lang="en-US" sz="2300" b="1" dirty="0">
+            <a:pPr marL="0" indent="0">
+              <a:buNone/>
+            </a:pPr>
+            <a:r>
+              <a:rPr lang="ja-JP" sz="2300" b="1" noProof="0" dirty="0">
                 <a:solidFill>
                   <a:srgbClr val="FFFFFF"/>
                 </a:solidFill>
@@ -13558,7 +14244,7 @@
               </a:rPr>
               <a:t>04  出席コード — 優先順位の仕組み</a:t>
             </a:r>
-            <a:endParaRPr lang="en-US" sz="2300" dirty="0"/>
+            <a:endParaRPr lang="ja-JP" sz="2300" noProof="0" dirty="0"/>
           </a:p>
         </p:txBody>
       </p:sp>
@@ -13583,18 +14269,18 @@
           <a:bodyPr wrap="square" rtlCol="0" anchor="ctr"/>
           <a:lstStyle/>
           <a:p>
-            <a:pPr indent="0" marL="0">
-              <a:buNone/>
-            </a:pPr>
-            <a:r>
-              <a:rPr lang="en-US" sz="1250" dirty="0">
+            <a:pPr marL="0" indent="0">
+              <a:buNone/>
+            </a:pPr>
+            <a:r>
+              <a:rPr lang="ja-JP" sz="1250" noProof="0" dirty="0">
                 <a:solidFill>
                   <a:srgbClr val="1E293B"/>
                 </a:solidFill>
               </a:rPr>
               <a:t>複数の出席コードが存在する場合、以下の優先順位でウィンドウに表示されます：</a:t>
             </a:r>
-            <a:endParaRPr lang="en-US" sz="1250" dirty="0"/>
+            <a:endParaRPr lang="ja-JP" sz="1250" noProof="0" dirty="0"/>
           </a:p>
         </p:txBody>
       </p:sp>
@@ -13617,13 +14303,20 @@
           </a:solidFill>
           <a:ln/>
           <a:effectLst>
-            <a:outerShdw sx="100000" sy="100000" kx="0" ky="0" algn="bl" rotWithShape="0" blurRad="76200" dist="38100" dir="8100000">
+            <a:outerShdw blurRad="76200" dist="38100" dir="8100000" algn="bl" rotWithShape="0">
               <a:srgbClr val="1E40AF">
                 <a:alpha val="10000"/>
               </a:srgbClr>
             </a:outerShdw>
           </a:effectLst>
         </p:spPr>
+        <p:txBody>
+          <a:bodyPr/>
+          <a:lstStyle/>
+          <a:p>
+            <a:endParaRPr lang="ja-JP" noProof="0" dirty="0"/>
+          </a:p>
+        </p:txBody>
       </p:sp>
       <p:sp>
         <p:nvSpPr>
@@ -13644,6 +14337,13 @@
           </a:solidFill>
           <a:ln/>
         </p:spPr>
+        <p:txBody>
+          <a:bodyPr/>
+          <a:lstStyle/>
+          <a:p>
+            <a:endParaRPr lang="ja-JP" noProof="0" dirty="0"/>
+          </a:p>
+        </p:txBody>
       </p:sp>
       <p:sp>
         <p:nvSpPr>
@@ -13666,18 +14366,18 @@
           <a:bodyPr wrap="square" rtlCol="0" anchor="ctr"/>
           <a:lstStyle/>
           <a:p>
-            <a:pPr algn="ctr" indent="0" marL="0">
-              <a:buNone/>
-            </a:pPr>
-            <a:r>
-              <a:rPr lang="en-US" sz="1250" b="1" dirty="0">
+            <a:pPr marL="0" indent="0" algn="ctr">
+              <a:buNone/>
+            </a:pPr>
+            <a:r>
+              <a:rPr lang="ja-JP" sz="1250" b="1" noProof="0" dirty="0">
                 <a:solidFill>
                   <a:srgbClr val="FFFFFF"/>
                 </a:solidFill>
               </a:rPr>
               <a:t>最優先</a:t>
             </a:r>
-            <a:endParaRPr lang="en-US" sz="1250" dirty="0"/>
+            <a:endParaRPr lang="ja-JP" sz="1250" noProof="0" dirty="0"/>
           </a:p>
         </p:txBody>
       </p:sp>
@@ -13702,18 +14402,18 @@
           <a:bodyPr wrap="square" rtlCol="0" anchor="ctr"/>
           <a:lstStyle/>
           <a:p>
-            <a:pPr indent="0" marL="0">
-              <a:buNone/>
-            </a:pPr>
-            <a:r>
-              <a:rPr lang="en-US" sz="1350" b="1" dirty="0">
+            <a:pPr marL="0" indent="0">
+              <a:buNone/>
+            </a:pPr>
+            <a:r>
+              <a:rPr lang="ja-JP" sz="1350" b="1" noProof="0" dirty="0">
                 <a:solidFill>
                   <a:srgbClr val="1E40AF"/>
                 </a:solidFill>
               </a:rPr>
               <a:t>一時コード（メモリ）</a:t>
             </a:r>
-            <a:endParaRPr lang="en-US" sz="1350" dirty="0"/>
+            <a:endParaRPr lang="ja-JP" sz="1350" noProof="0" dirty="0"/>
           </a:p>
         </p:txBody>
       </p:sp>
@@ -13738,18 +14438,18 @@
           <a:bodyPr wrap="square" rtlCol="0" anchor="ctr"/>
           <a:lstStyle/>
           <a:p>
-            <a:pPr indent="0" marL="0">
-              <a:buNone/>
-            </a:pPr>
-            <a:r>
-              <a:rPr lang="en-US" sz="1100" dirty="0">
+            <a:pPr marL="0" indent="0">
+              <a:buNone/>
+            </a:pPr>
+            <a:r>
+              <a:rPr lang="ja-JP" sz="1100" noProof="0" dirty="0">
                 <a:solidFill>
                   <a:srgbClr val="1E293B"/>
                 </a:solidFill>
               </a:rPr>
               <a:t>右クリック「入力」で入力したコード。有効期限は 30 分で、期限切れ後は自動的に消去されます。設定ファイルには保存されません。</a:t>
             </a:r>
-            <a:endParaRPr lang="en-US" sz="1100" dirty="0"/>
+            <a:endParaRPr lang="ja-JP" sz="1100" noProof="0" dirty="0"/>
           </a:p>
         </p:txBody>
       </p:sp>
@@ -13772,13 +14472,20 @@
           </a:solidFill>
           <a:ln/>
           <a:effectLst>
-            <a:outerShdw sx="100000" sy="100000" kx="0" ky="0" algn="bl" rotWithShape="0" blurRad="76200" dist="38100" dir="8100000">
+            <a:outerShdw blurRad="76200" dist="38100" dir="8100000" algn="bl" rotWithShape="0">
               <a:srgbClr val="1E40AF">
                 <a:alpha val="10000"/>
               </a:srgbClr>
             </a:outerShdw>
           </a:effectLst>
         </p:spPr>
+        <p:txBody>
+          <a:bodyPr/>
+          <a:lstStyle/>
+          <a:p>
+            <a:endParaRPr lang="ja-JP" noProof="0" dirty="0"/>
+          </a:p>
+        </p:txBody>
       </p:sp>
       <p:sp>
         <p:nvSpPr>
@@ -13799,6 +14506,13 @@
           </a:solidFill>
           <a:ln/>
         </p:spPr>
+        <p:txBody>
+          <a:bodyPr/>
+          <a:lstStyle/>
+          <a:p>
+            <a:endParaRPr lang="ja-JP" noProof="0" dirty="0"/>
+          </a:p>
+        </p:txBody>
       </p:sp>
       <p:sp>
         <p:nvSpPr>
@@ -13821,18 +14535,18 @@
           <a:bodyPr wrap="square" rtlCol="0" anchor="ctr"/>
           <a:lstStyle/>
           <a:p>
-            <a:pPr algn="ctr" indent="0" marL="0">
-              <a:buNone/>
-            </a:pPr>
-            <a:r>
-              <a:rPr lang="en-US" sz="1250" b="1" dirty="0">
+            <a:pPr marL="0" indent="0" algn="ctr">
+              <a:buNone/>
+            </a:pPr>
+            <a:r>
+              <a:rPr lang="ja-JP" sz="1250" b="1" noProof="0" dirty="0">
                 <a:solidFill>
                   <a:srgbClr val="FFFFFF"/>
                 </a:solidFill>
               </a:rPr>
               <a:t>次優先</a:t>
             </a:r>
-            <a:endParaRPr lang="en-US" sz="1250" dirty="0"/>
+            <a:endParaRPr lang="ja-JP" sz="1250" noProof="0" dirty="0"/>
           </a:p>
         </p:txBody>
       </p:sp>
@@ -13857,18 +14571,18 @@
           <a:bodyPr wrap="square" rtlCol="0" anchor="ctr"/>
           <a:lstStyle/>
           <a:p>
-            <a:pPr indent="0" marL="0">
-              <a:buNone/>
-            </a:pPr>
-            <a:r>
-              <a:rPr lang="en-US" sz="1350" b="1" dirty="0">
+            <a:pPr marL="0" indent="0">
+              <a:buNone/>
+            </a:pPr>
+            <a:r>
+              <a:rPr lang="ja-JP" sz="1350" b="1" noProof="0" dirty="0">
                 <a:solidFill>
                   <a:srgbClr val="1E40AF"/>
                 </a:solidFill>
               </a:rPr>
               <a:t>永続コード（設定ファイル）</a:t>
             </a:r>
-            <a:endParaRPr lang="en-US" sz="1350" dirty="0"/>
+            <a:endParaRPr lang="ja-JP" sz="1350" noProof="0" dirty="0"/>
           </a:p>
         </p:txBody>
       </p:sp>
@@ -13893,18 +14607,18 @@
           <a:bodyPr wrap="square" rtlCol="0" anchor="ctr"/>
           <a:lstStyle/>
           <a:p>
-            <a:pPr indent="0" marL="0">
-              <a:buNone/>
-            </a:pPr>
-            <a:r>
-              <a:rPr lang="en-US" sz="1100" dirty="0">
+            <a:pPr marL="0" indent="0">
+              <a:buNone/>
+            </a:pPr>
+            <a:r>
+              <a:rPr lang="ja-JP" sz="1100" noProof="0" dirty="0">
                 <a:solidFill>
                   <a:srgbClr val="1E293B"/>
                 </a:solidFill>
               </a:rPr>
               <a:t>「日程プレビュー」で編集するか「コード生成」で作成したコード。teacher_config.json に保存され、再起動後も有効です。</a:t>
             </a:r>
-            <a:endParaRPr lang="en-US" sz="1100" dirty="0"/>
+            <a:endParaRPr lang="ja-JP" sz="1100" noProof="0" dirty="0"/>
           </a:p>
         </p:txBody>
       </p:sp>
@@ -13927,13 +14641,20 @@
           </a:solidFill>
           <a:ln/>
           <a:effectLst>
-            <a:outerShdw sx="100000" sy="100000" kx="0" ky="0" algn="bl" rotWithShape="0" blurRad="76200" dist="38100" dir="8100000">
+            <a:outerShdw blurRad="76200" dist="38100" dir="8100000" algn="bl" rotWithShape="0">
               <a:srgbClr val="1E40AF">
                 <a:alpha val="10000"/>
               </a:srgbClr>
             </a:outerShdw>
           </a:effectLst>
         </p:spPr>
+        <p:txBody>
+          <a:bodyPr/>
+          <a:lstStyle/>
+          <a:p>
+            <a:endParaRPr lang="ja-JP" noProof="0" dirty="0"/>
+          </a:p>
+        </p:txBody>
       </p:sp>
       <p:sp>
         <p:nvSpPr>
@@ -13954,6 +14675,13 @@
           </a:solidFill>
           <a:ln/>
         </p:spPr>
+        <p:txBody>
+          <a:bodyPr/>
+          <a:lstStyle/>
+          <a:p>
+            <a:endParaRPr lang="ja-JP" noProof="0" dirty="0"/>
+          </a:p>
+        </p:txBody>
       </p:sp>
       <p:sp>
         <p:nvSpPr>
@@ -13976,18 +14704,18 @@
           <a:bodyPr wrap="square" rtlCol="0" anchor="ctr"/>
           <a:lstStyle/>
           <a:p>
-            <a:pPr algn="ctr" indent="0" marL="0">
-              <a:buNone/>
-            </a:pPr>
-            <a:r>
-              <a:rPr lang="en-US" sz="1250" b="1" dirty="0">
+            <a:pPr marL="0" indent="0" algn="ctr">
+              <a:buNone/>
+            </a:pPr>
+            <a:r>
+              <a:rPr lang="ja-JP" sz="1250" b="1" noProof="0" dirty="0">
                 <a:solidFill>
                   <a:srgbClr val="FFFFFF"/>
                 </a:solidFill>
               </a:rPr>
               <a:t>デフォルト</a:t>
             </a:r>
-            <a:endParaRPr lang="en-US" sz="1250" dirty="0"/>
+            <a:endParaRPr lang="ja-JP" sz="1250" noProof="0" dirty="0"/>
           </a:p>
         </p:txBody>
       </p:sp>
@@ -14012,18 +14740,18 @@
           <a:bodyPr wrap="square" rtlCol="0" anchor="ctr"/>
           <a:lstStyle/>
           <a:p>
-            <a:pPr indent="0" marL="0">
-              <a:buNone/>
-            </a:pPr>
-            <a:r>
-              <a:rPr lang="en-US" sz="1350" b="1" dirty="0">
+            <a:pPr marL="0" indent="0">
+              <a:buNone/>
+            </a:pPr>
+            <a:r>
+              <a:rPr lang="ja-JP" sz="1350" b="1" noProof="0" dirty="0">
                 <a:solidFill>
                   <a:srgbClr val="1E40AF"/>
                 </a:solidFill>
               </a:rPr>
               <a:t>なし（プレースホルダー表示）</a:t>
             </a:r>
-            <a:endParaRPr lang="en-US" sz="1350" dirty="0"/>
+            <a:endParaRPr lang="ja-JP" sz="1350" noProof="0" dirty="0"/>
           </a:p>
         </p:txBody>
       </p:sp>
@@ -14048,18 +14776,18 @@
           <a:bodyPr wrap="square" rtlCol="0" anchor="ctr"/>
           <a:lstStyle/>
           <a:p>
-            <a:pPr indent="0" marL="0">
-              <a:buNone/>
-            </a:pPr>
-            <a:r>
-              <a:rPr lang="en-US" sz="1100" dirty="0">
+            <a:pPr marL="0" indent="0">
+              <a:buNone/>
+            </a:pPr>
+            <a:r>
+              <a:rPr lang="ja-JP" sz="1100" noProof="0" dirty="0">
                 <a:solidFill>
                   <a:srgbClr val="1E293B"/>
                 </a:solidFill>
               </a:rPr>
               <a:t>コードが設定されていない場合、ウィンドウには「----」と表示されます。</a:t>
             </a:r>
-            <a:endParaRPr lang="en-US" sz="1100" dirty="0"/>
+            <a:endParaRPr lang="ja-JP" sz="1100" noProof="0" dirty="0"/>
           </a:p>
         </p:txBody>
       </p:sp>
@@ -14082,6 +14810,13 @@
           </a:solidFill>
           <a:ln/>
         </p:spPr>
+        <p:txBody>
+          <a:bodyPr/>
+          <a:lstStyle/>
+          <a:p>
+            <a:endParaRPr lang="ja-JP" noProof="0" dirty="0"/>
+          </a:p>
+        </p:txBody>
       </p:sp>
       <p:sp>
         <p:nvSpPr>
@@ -14104,18 +14839,18 @@
           <a:bodyPr wrap="square" rtlCol="0" anchor="ctr"/>
           <a:lstStyle/>
           <a:p>
-            <a:pPr indent="0" marL="0">
-              <a:buNone/>
-            </a:pPr>
-            <a:r>
-              <a:rPr lang="en-US" sz="1050" dirty="0">
+            <a:pPr marL="0" indent="0">
+              <a:buNone/>
+            </a:pPr>
+            <a:r>
+              <a:rPr lang="ja-JP" sz="1050" noProof="0" dirty="0">
                 <a:solidFill>
                   <a:srgbClr val="92400E"/>
                 </a:solidFill>
               </a:rPr>
               <a:t>💡 推奨：学期開始前に「日程プレビュー」で全授業回のコードを一括生成してください。一時コードは例外的な場面のみ使用します。</a:t>
             </a:r>
-            <a:endParaRPr lang="en-US" sz="1050" dirty="0"/>
+            <a:endParaRPr lang="ja-JP" sz="1050" noProof="0" dirty="0"/>
           </a:p>
         </p:txBody>
       </p:sp>
@@ -14138,6 +14873,13 @@
           </a:solidFill>
           <a:ln/>
         </p:spPr>
+        <p:txBody>
+          <a:bodyPr/>
+          <a:lstStyle/>
+          <a:p>
+            <a:endParaRPr lang="ja-JP" noProof="0" dirty="0"/>
+          </a:p>
+        </p:txBody>
       </p:sp>
       <p:sp>
         <p:nvSpPr>
@@ -14160,18 +14902,18 @@
           <a:bodyPr wrap="square" rtlCol="0" anchor="ctr"/>
           <a:lstStyle/>
           <a:p>
-            <a:pPr indent="0" marL="0">
-              <a:buNone/>
-            </a:pPr>
-            <a:r>
-              <a:rPr lang="en-US" sz="900" dirty="0">
+            <a:pPr marL="0" indent="0">
+              <a:buNone/>
+            </a:pPr>
+            <a:r>
+              <a:rPr lang="ja-JP" sz="900" noProof="0" dirty="0">
                 <a:solidFill>
                   <a:srgbClr val="BFDBFE"/>
                 </a:solidFill>
               </a:rPr>
               <a:t>CodeWidget  ユーザーマニュアル</a:t>
             </a:r>
-            <a:endParaRPr lang="en-US" sz="900" dirty="0"/>
+            <a:endParaRPr lang="ja-JP" sz="900" noProof="0" dirty="0"/>
           </a:p>
         </p:txBody>
       </p:sp>
@@ -14196,18 +14938,18 @@
           <a:bodyPr wrap="square" rtlCol="0" anchor="ctr"/>
           <a:lstStyle/>
           <a:p>
-            <a:pPr algn="r" indent="0" marL="0">
-              <a:buNone/>
-            </a:pPr>
-            <a:r>
-              <a:rPr lang="en-US" sz="900" dirty="0">
+            <a:pPr marL="0" indent="0" algn="r">
+              <a:buNone/>
+            </a:pPr>
+            <a:r>
+              <a:rPr lang="ja-JP" sz="900" noProof="0" dirty="0">
                 <a:solidFill>
                   <a:srgbClr val="BFDBFE"/>
                 </a:solidFill>
               </a:rPr>
               <a:t>9</a:t>
             </a:r>
-            <a:endParaRPr lang="en-US" sz="900" dirty="0"/>
+            <a:endParaRPr lang="ja-JP" sz="900" noProof="0" dirty="0"/>
           </a:p>
         </p:txBody>
       </p:sp>
@@ -14512,4 +15254,319 @@
     </a:ext>
   </a:extLst>
 </a:theme>
+</file>
+
+<file path=ppt/theme/theme2.xml><?xml version="1.0" encoding="utf-8"?>
+<a:theme xmlns:a="http://schemas.openxmlformats.org/drawingml/2006/main" name="Office 主题​​">
+  <a:themeElements>
+    <a:clrScheme name="Office">
+      <a:dk1>
+        <a:sysClr val="windowText" lastClr="000000"/>
+      </a:dk1>
+      <a:lt1>
+        <a:sysClr val="window" lastClr="FFFFFF"/>
+      </a:lt1>
+      <a:dk2>
+        <a:srgbClr val="0E2841"/>
+      </a:dk2>
+      <a:lt2>
+        <a:srgbClr val="E8E8E8"/>
+      </a:lt2>
+      <a:accent1>
+        <a:srgbClr val="156082"/>
+      </a:accent1>
+      <a:accent2>
+        <a:srgbClr val="E97132"/>
+      </a:accent2>
+      <a:accent3>
+        <a:srgbClr val="196B24"/>
+      </a:accent3>
+      <a:accent4>
+        <a:srgbClr val="0F9ED5"/>
+      </a:accent4>
+      <a:accent5>
+        <a:srgbClr val="A02B93"/>
+      </a:accent5>
+      <a:accent6>
+        <a:srgbClr val="4EA72E"/>
+      </a:accent6>
+      <a:hlink>
+        <a:srgbClr val="467886"/>
+      </a:hlink>
+      <a:folHlink>
+        <a:srgbClr val="96607D"/>
+      </a:folHlink>
+    </a:clrScheme>
+    <a:fontScheme name="Office">
+      <a:majorFont>
+        <a:latin typeface="Aptos Display" panose="02110004020202020204"/>
+        <a:ea typeface=""/>
+        <a:cs typeface=""/>
+        <a:font script="Jpan" typeface="游ゴシック Light"/>
+        <a:font script="Hang" typeface="맑은 고딕"/>
+        <a:font script="Hans" typeface="等线 Light"/>
+        <a:font script="Hant" typeface="新細明體"/>
+        <a:font script="Arab" typeface="Times New Roman"/>
+        <a:font script="Hebr" typeface="Times New Roman"/>
+        <a:font script="Thai" typeface="Angsana New"/>
+        <a:font script="Ethi" typeface="Nyala"/>
+        <a:font script="Beng" typeface="Vrinda"/>
+        <a:font script="Gujr" typeface="Shruti"/>
+        <a:font script="Khmr" typeface="MoolBoran"/>
+        <a:font script="Knda" typeface="Tunga"/>
+        <a:font script="Guru" typeface="Raavi"/>
+        <a:font script="Cans" typeface="Euphemia"/>
+        <a:font script="Cher" typeface="Plantagenet Cherokee"/>
+        <a:font script="Yiii" typeface="Microsoft Yi Baiti"/>
+        <a:font script="Tibt" typeface="Microsoft Himalaya"/>
+        <a:font script="Thaa" typeface="MV Boli"/>
+        <a:font script="Deva" typeface="Mangal"/>
+        <a:font script="Telu" typeface="Gautami"/>
+        <a:font script="Taml" typeface="Latha"/>
+        <a:font script="Syrc" typeface="Estrangelo Edessa"/>
+        <a:font script="Orya" typeface="Kalinga"/>
+        <a:font script="Mlym" typeface="Kartika"/>
+        <a:font script="Laoo" typeface="DokChampa"/>
+        <a:font script="Sinh" typeface="Iskoola Pota"/>
+        <a:font script="Mong" typeface="Mongolian Baiti"/>
+        <a:font script="Viet" typeface="Times New Roman"/>
+        <a:font script="Uigh" typeface="Microsoft Uighur"/>
+        <a:font script="Geor" typeface="Sylfaen"/>
+        <a:font script="Armn" typeface="Arial"/>
+        <a:font script="Bugi" typeface="Leelawadee UI"/>
+        <a:font script="Bopo" typeface="Microsoft JhengHei"/>
+        <a:font script="Java" typeface="Javanese Text"/>
+        <a:font script="Lisu" typeface="Segoe UI"/>
+        <a:font script="Mymr" typeface="Myanmar Text"/>
+        <a:font script="Nkoo" typeface="Ebrima"/>
+        <a:font script="Olck" typeface="Nirmala UI"/>
+        <a:font script="Osma" typeface="Ebrima"/>
+        <a:font script="Phag" typeface="Phagspa"/>
+        <a:font script="Syrn" typeface="Estrangelo Edessa"/>
+        <a:font script="Syrj" typeface="Estrangelo Edessa"/>
+        <a:font script="Syre" typeface="Estrangelo Edessa"/>
+        <a:font script="Sora" typeface="Nirmala UI"/>
+        <a:font script="Tale" typeface="Microsoft Tai Le"/>
+        <a:font script="Talu" typeface="Microsoft New Tai Lue"/>
+        <a:font script="Tfng" typeface="Ebrima"/>
+      </a:majorFont>
+      <a:minorFont>
+        <a:latin typeface="Aptos" panose="02110004020202020204"/>
+        <a:ea typeface=""/>
+        <a:cs typeface=""/>
+        <a:font script="Jpan" typeface="游ゴシック"/>
+        <a:font script="Hang" typeface="맑은 고딕"/>
+        <a:font script="Hans" typeface="等线"/>
+        <a:font script="Hant" typeface="新細明體"/>
+        <a:font script="Arab" typeface="Arial"/>
+        <a:font script="Hebr" typeface="Arial"/>
+        <a:font script="Thai" typeface="Cordia New"/>
+        <a:font script="Ethi" typeface="Nyala"/>
+        <a:font script="Beng" typeface="Vrinda"/>
+        <a:font script="Gujr" typeface="Shruti"/>
+        <a:font script="Khmr" typeface="DaunPenh"/>
+        <a:font script="Knda" typeface="Tunga"/>
+        <a:font script="Guru" typeface="Raavi"/>
+        <a:font script="Cans" typeface="Euphemia"/>
+        <a:font script="Cher" typeface="Plantagenet Cherokee"/>
+        <a:font script="Yiii" typeface="Microsoft Yi Baiti"/>
+        <a:font script="Tibt" typeface="Microsoft Himalaya"/>
+        <a:font script="Thaa" typeface="MV Boli"/>
+        <a:font script="Deva" typeface="Mangal"/>
+        <a:font script="Telu" typeface="Gautami"/>
+        <a:font script="Taml" typeface="Latha"/>
+        <a:font script="Syrc" typeface="Estrangelo Edessa"/>
+        <a:font script="Orya" typeface="Kalinga"/>
+        <a:font script="Mlym" typeface="Kartika"/>
+        <a:font script="Laoo" typeface="DokChampa"/>
+        <a:font script="Sinh" typeface="Iskoola Pota"/>
+        <a:font script="Mong" typeface="Mongolian Baiti"/>
+        <a:font script="Viet" typeface="Arial"/>
+        <a:font script="Uigh" typeface="Microsoft Uighur"/>
+        <a:font script="Geor" typeface="Sylfaen"/>
+        <a:font script="Armn" typeface="Arial"/>
+        <a:font script="Bugi" typeface="Leelawadee UI"/>
+        <a:font script="Bopo" typeface="Microsoft JhengHei"/>
+        <a:font script="Java" typeface="Javanese Text"/>
+        <a:font script="Lisu" typeface="Segoe UI"/>
+        <a:font script="Mymr" typeface="Myanmar Text"/>
+        <a:font script="Nkoo" typeface="Ebrima"/>
+        <a:font script="Olck" typeface="Nirmala UI"/>
+        <a:font script="Osma" typeface="Ebrima"/>
+        <a:font script="Phag" typeface="Phagspa"/>
+        <a:font script="Syrn" typeface="Estrangelo Edessa"/>
+        <a:font script="Syrj" typeface="Estrangelo Edessa"/>
+        <a:font script="Syre" typeface="Estrangelo Edessa"/>
+        <a:font script="Sora" typeface="Nirmala UI"/>
+        <a:font script="Tale" typeface="Microsoft Tai Le"/>
+        <a:font script="Talu" typeface="Microsoft New Tai Lue"/>
+        <a:font script="Tfng" typeface="Ebrima"/>
+      </a:minorFont>
+    </a:fontScheme>
+    <a:fmtScheme name="Office">
+      <a:fillStyleLst>
+        <a:solidFill>
+          <a:schemeClr val="phClr"/>
+        </a:solidFill>
+        <a:gradFill rotWithShape="1">
+          <a:gsLst>
+            <a:gs pos="0">
+              <a:schemeClr val="phClr">
+                <a:lumMod val="110000"/>
+                <a:satMod val="105000"/>
+                <a:tint val="67000"/>
+              </a:schemeClr>
+            </a:gs>
+            <a:gs pos="50000">
+              <a:schemeClr val="phClr">
+                <a:lumMod val="105000"/>
+                <a:satMod val="103000"/>
+                <a:tint val="73000"/>
+              </a:schemeClr>
+            </a:gs>
+            <a:gs pos="100000">
+              <a:schemeClr val="phClr">
+                <a:lumMod val="105000"/>
+                <a:satMod val="109000"/>
+                <a:tint val="81000"/>
+              </a:schemeClr>
+            </a:gs>
+          </a:gsLst>
+          <a:lin ang="5400000" scaled="0"/>
+        </a:gradFill>
+        <a:gradFill rotWithShape="1">
+          <a:gsLst>
+            <a:gs pos="0">
+              <a:schemeClr val="phClr">
+                <a:satMod val="103000"/>
+                <a:lumMod val="102000"/>
+                <a:tint val="94000"/>
+              </a:schemeClr>
+            </a:gs>
+            <a:gs pos="50000">
+              <a:schemeClr val="phClr">
+                <a:satMod val="110000"/>
+                <a:lumMod val="100000"/>
+                <a:shade val="100000"/>
+              </a:schemeClr>
+            </a:gs>
+            <a:gs pos="100000">
+              <a:schemeClr val="phClr">
+                <a:lumMod val="99000"/>
+                <a:satMod val="120000"/>
+                <a:shade val="78000"/>
+              </a:schemeClr>
+            </a:gs>
+          </a:gsLst>
+          <a:lin ang="5400000" scaled="0"/>
+        </a:gradFill>
+      </a:fillStyleLst>
+      <a:lnStyleLst>
+        <a:ln w="12700" cap="flat" cmpd="sng" algn="ctr">
+          <a:solidFill>
+            <a:schemeClr val="phClr"/>
+          </a:solidFill>
+          <a:prstDash val="solid"/>
+          <a:miter lim="800000"/>
+        </a:ln>
+        <a:ln w="19050" cap="flat" cmpd="sng" algn="ctr">
+          <a:solidFill>
+            <a:schemeClr val="phClr"/>
+          </a:solidFill>
+          <a:prstDash val="solid"/>
+          <a:miter lim="800000"/>
+        </a:ln>
+        <a:ln w="25400" cap="flat" cmpd="sng" algn="ctr">
+          <a:solidFill>
+            <a:schemeClr val="phClr"/>
+          </a:solidFill>
+          <a:prstDash val="solid"/>
+          <a:miter lim="800000"/>
+        </a:ln>
+      </a:lnStyleLst>
+      <a:effectStyleLst>
+        <a:effectStyle>
+          <a:effectLst/>
+        </a:effectStyle>
+        <a:effectStyle>
+          <a:effectLst/>
+        </a:effectStyle>
+        <a:effectStyle>
+          <a:effectLst>
+            <a:outerShdw blurRad="57150" dist="19050" dir="5400000" algn="ctr" rotWithShape="0">
+              <a:srgbClr val="000000">
+                <a:alpha val="63000"/>
+              </a:srgbClr>
+            </a:outerShdw>
+          </a:effectLst>
+        </a:effectStyle>
+      </a:effectStyleLst>
+      <a:bgFillStyleLst>
+        <a:solidFill>
+          <a:schemeClr val="phClr"/>
+        </a:solidFill>
+        <a:solidFill>
+          <a:schemeClr val="phClr">
+            <a:tint val="95000"/>
+            <a:satMod val="170000"/>
+          </a:schemeClr>
+        </a:solidFill>
+        <a:gradFill rotWithShape="1">
+          <a:gsLst>
+            <a:gs pos="0">
+              <a:schemeClr val="phClr">
+                <a:tint val="93000"/>
+                <a:satMod val="150000"/>
+                <a:shade val="98000"/>
+                <a:lumMod val="102000"/>
+              </a:schemeClr>
+            </a:gs>
+            <a:gs pos="50000">
+              <a:schemeClr val="phClr">
+                <a:tint val="98000"/>
+                <a:satMod val="130000"/>
+                <a:shade val="90000"/>
+                <a:lumMod val="103000"/>
+              </a:schemeClr>
+            </a:gs>
+            <a:gs pos="100000">
+              <a:schemeClr val="phClr">
+                <a:shade val="63000"/>
+                <a:satMod val="120000"/>
+              </a:schemeClr>
+            </a:gs>
+          </a:gsLst>
+          <a:lin ang="5400000" scaled="0"/>
+        </a:gradFill>
+      </a:bgFillStyleLst>
+    </a:fmtScheme>
+  </a:themeElements>
+  <a:objectDefaults>
+    <a:lnDef>
+      <a:spPr/>
+      <a:bodyPr/>
+      <a:lstStyle/>
+      <a:style>
+        <a:lnRef idx="2">
+          <a:schemeClr val="accent1"/>
+        </a:lnRef>
+        <a:fillRef idx="0">
+          <a:schemeClr val="accent1"/>
+        </a:fillRef>
+        <a:effectRef idx="1">
+          <a:schemeClr val="accent1"/>
+        </a:effectRef>
+        <a:fontRef idx="minor">
+          <a:schemeClr val="tx1"/>
+        </a:fontRef>
+      </a:style>
+    </a:lnDef>
+  </a:objectDefaults>
+  <a:extraClrSchemeLst/>
+  <a:extLst>
+    <a:ext uri="{05A4C25C-085E-4340-85A3-A5531E510DB2}">
+      <thm15:themeFamily xmlns:thm15="http://schemas.microsoft.com/office/thememl/2012/main" name="Office Theme" id="{2E142A2C-CD16-42D6-873A-C26D2A0506FA}" vid="{1BDDFF52-6CD6-40A5-AB3C-68EB2F1E4D0A}"/>
+    </a:ext>
+  </a:extLst>
+</a:theme>
 </file>